--- a/library/seminars/sem-02/rendered/sem-02.pptx
+++ b/library/seminars/sem-02/rendered/sem-02.pptx
@@ -2072,7 +2072,12 @@
           </a:p>
           <a:p>
             <a:r>
-              <a:t>Обратите внимание на объём входных данных, это обычно первая подсказка.</a:t>
+              <a:t>Не просто называйте технологию — объясните ход рассуждения целиком, от</a:t>
+            </a:r>
+          </a:p>
+          <a:p>
+            <a:r>
+              <a:t>формулировки задачи до вывода. Кто готов ответить первым?</a:t>
             </a:r>
           </a:p>
         </p:txBody>
@@ -2667,12 +2672,17 @@
           </a:p>
           <a:p>
             <a:r>
-              <a:t>именно на эту мысль. Подсказка: подумайте, что именно нужно сделать,</a:t>
-            </a:r>
-          </a:p>
-          <a:p>
-            <a:r>
-              <a:t>прежде чем модель вообще увидит текст для суммаризации.</a:t>
+              <a:t>именно на эту мысль. Здесь тоже стоит сначала проговорить всю</a:t>
+            </a:r>
+          </a:p>
+          <a:p>
+            <a:r>
+              <a:t>постановку своими словами, а уже потом называть архитектуру — так</a:t>
+            </a:r>
+          </a:p>
+          <a:p>
+            <a:r>
+              <a:t>ошибка обычно всплывает сама. Кто готов? Аргументируйте свой выбор.</a:t>
             </a:r>
           </a:p>
         </p:txBody>
@@ -5392,17 +5402,22 @@
           </a:p>
           <a:p>
             <a:r>
-              <a:t>задачами. Держим в голове — мы ещё вернёмся к вопросу чувствительности</a:t>
-            </a:r>
-          </a:p>
-          <a:p>
-            <a:r>
-              <a:t>данных ближе к концу занятия, когда будем разбирать, где вообще можно</a:t>
-            </a:r>
-          </a:p>
-          <a:p>
-            <a:r>
-              <a:t>считать такие данные.</a:t>
+              <a:t>задачами. Практический вывод — не выбирать инструмент один раз для всей</a:t>
+            </a:r>
+          </a:p>
+          <a:p>
+            <a:r>
+              <a:t>задачи целиком, а раскладывать задачу на подзадачи и подбирать метод под</a:t>
+            </a:r>
+          </a:p>
+          <a:p>
+            <a:r>
+              <a:t>каждую отдельно. Тот же вопрос чувствительности данных всплывёт и в</a:t>
+            </a:r>
+          </a:p>
+          <a:p>
+            <a:r>
+              <a:t>кейсе про звонки продаж — там ставки заметно выше.</a:t>
             </a:r>
           </a:p>
         </p:txBody>
@@ -15125,7 +15140,46 @@
       </p:sp>
       <p:sp>
         <p:nvSpPr>
-          <p:cNvPr id="13" name="Rounded Rectangle 12"/>
+          <p:cNvPr id="13" name="TextBox 12"/>
+          <p:cNvSpPr txBox="1"/>
+          <p:nvPr/>
+        </p:nvSpPr>
+        <p:spPr>
+          <a:xfrm>
+            <a:off x="502920" y="5047488"/>
+            <a:ext cx="5486400" cy="219456"/>
+          </a:xfrm>
+          <a:prstGeom prst="rect">
+            <a:avLst/>
+          </a:prstGeom>
+          <a:noFill/>
+        </p:spPr>
+        <p:txBody>
+          <a:bodyPr wrap="square" lIns="0" rIns="0" tIns="0" bIns="0" anchor="t">
+            <a:spAutoFit/>
+          </a:bodyPr>
+          <a:lstStyle/>
+          <a:p>
+            <a:pPr algn="l">
+              <a:lnSpc>
+                <a:spcPct val="115000"/>
+              </a:lnSpc>
+            </a:pPr>
+            <a:r>
+              <a:rPr sz="1050" b="0" i="1">
+                <a:solidFill>
+                  <a:srgbClr val="6B7685"/>
+                </a:solidFill>
+                <a:latin typeface="Arial"/>
+              </a:rPr>
+              <a:t>ступени архитектуры</a:t>
+            </a:r>
+          </a:p>
+        </p:txBody>
+      </p:sp>
+      <p:sp>
+        <p:nvSpPr>
+          <p:cNvPr id="14" name="Rounded Rectangle 13"/>
           <p:cNvSpPr/>
           <p:nvPr/>
         </p:nvSpPr>
@@ -15159,7 +15213,7 @@
       </p:sp>
       <p:sp>
         <p:nvSpPr>
-          <p:cNvPr id="14" name="TextBox 13"/>
+          <p:cNvPr id="15" name="TextBox 14"/>
           <p:cNvSpPr txBox="1"/>
           <p:nvPr/>
         </p:nvSpPr>
@@ -15198,7 +15252,7 @@
       </p:sp>
       <p:sp>
         <p:nvSpPr>
-          <p:cNvPr id="15" name="Right Arrow 14"/>
+          <p:cNvPr id="16" name="Right Arrow 15"/>
           <p:cNvSpPr/>
           <p:nvPr/>
         </p:nvSpPr>
@@ -15228,7 +15282,7 @@
       </p:sp>
       <p:sp>
         <p:nvSpPr>
-          <p:cNvPr id="16" name="Rounded Rectangle 15"/>
+          <p:cNvPr id="17" name="Rounded Rectangle 16"/>
           <p:cNvSpPr/>
           <p:nvPr/>
         </p:nvSpPr>
@@ -15262,7 +15316,7 @@
       </p:sp>
       <p:sp>
         <p:nvSpPr>
-          <p:cNvPr id="17" name="TextBox 16"/>
+          <p:cNvPr id="18" name="TextBox 17"/>
           <p:cNvSpPr txBox="1"/>
           <p:nvPr/>
         </p:nvSpPr>
@@ -15301,7 +15355,7 @@
       </p:sp>
       <p:sp>
         <p:nvSpPr>
-          <p:cNvPr id="18" name="Right Arrow 17"/>
+          <p:cNvPr id="19" name="Right Arrow 18"/>
           <p:cNvSpPr/>
           <p:nvPr/>
         </p:nvSpPr>
@@ -15331,7 +15385,7 @@
       </p:sp>
       <p:sp>
         <p:nvSpPr>
-          <p:cNvPr id="19" name="Rounded Rectangle 18"/>
+          <p:cNvPr id="20" name="Rounded Rectangle 19"/>
           <p:cNvSpPr/>
           <p:nvPr/>
         </p:nvSpPr>
@@ -15365,7 +15419,7 @@
       </p:sp>
       <p:sp>
         <p:nvSpPr>
-          <p:cNvPr id="20" name="TextBox 19"/>
+          <p:cNvPr id="21" name="TextBox 20"/>
           <p:cNvSpPr txBox="1"/>
           <p:nvPr/>
         </p:nvSpPr>
@@ -16255,7 +16309,46 @@
       </p:sp>
       <p:sp>
         <p:nvSpPr>
-          <p:cNvPr id="16" name="Rounded Rectangle 15"/>
+          <p:cNvPr id="16" name="TextBox 15"/>
+          <p:cNvSpPr txBox="1"/>
+          <p:nvPr/>
+        </p:nvSpPr>
+        <p:spPr>
+          <a:xfrm>
+            <a:off x="502920" y="3813048"/>
+            <a:ext cx="5486400" cy="219456"/>
+          </a:xfrm>
+          <a:prstGeom prst="rect">
+            <a:avLst/>
+          </a:prstGeom>
+          <a:noFill/>
+        </p:spPr>
+        <p:txBody>
+          <a:bodyPr wrap="square" lIns="0" rIns="0" tIns="0" bIns="0" anchor="t">
+            <a:spAutoFit/>
+          </a:bodyPr>
+          <a:lstStyle/>
+          <a:p>
+            <a:pPr algn="l">
+              <a:lnSpc>
+                <a:spcPct val="115000"/>
+              </a:lnSpc>
+            </a:pPr>
+            <a:r>
+              <a:rPr sz="1050" b="0" i="1">
+                <a:solidFill>
+                  <a:srgbClr val="6B7685"/>
+                </a:solidFill>
+                <a:latin typeface="Arial"/>
+              </a:rPr>
+              <a:t>ступени архитектуры</a:t>
+            </a:r>
+          </a:p>
+        </p:txBody>
+      </p:sp>
+      <p:sp>
+        <p:nvSpPr>
+          <p:cNvPr id="17" name="Rounded Rectangle 16"/>
           <p:cNvSpPr/>
           <p:nvPr/>
         </p:nvSpPr>
@@ -16289,7 +16382,7 @@
       </p:sp>
       <p:sp>
         <p:nvSpPr>
-          <p:cNvPr id="17" name="TextBox 16"/>
+          <p:cNvPr id="18" name="TextBox 17"/>
           <p:cNvSpPr txBox="1"/>
           <p:nvPr/>
         </p:nvSpPr>
@@ -16328,7 +16421,7 @@
       </p:sp>
       <p:sp>
         <p:nvSpPr>
-          <p:cNvPr id="18" name="Right Arrow 17"/>
+          <p:cNvPr id="19" name="Right Arrow 18"/>
           <p:cNvSpPr/>
           <p:nvPr/>
         </p:nvSpPr>
@@ -16358,7 +16451,7 @@
       </p:sp>
       <p:sp>
         <p:nvSpPr>
-          <p:cNvPr id="19" name="Rounded Rectangle 18"/>
+          <p:cNvPr id="20" name="Rounded Rectangle 19"/>
           <p:cNvSpPr/>
           <p:nvPr/>
         </p:nvSpPr>
@@ -16392,7 +16485,7 @@
       </p:sp>
       <p:sp>
         <p:nvSpPr>
-          <p:cNvPr id="20" name="TextBox 19"/>
+          <p:cNvPr id="21" name="TextBox 20"/>
           <p:cNvSpPr txBox="1"/>
           <p:nvPr/>
         </p:nvSpPr>
@@ -16431,7 +16524,7 @@
       </p:sp>
       <p:sp>
         <p:nvSpPr>
-          <p:cNvPr id="21" name="Right Arrow 20"/>
+          <p:cNvPr id="22" name="Right Arrow 21"/>
           <p:cNvSpPr/>
           <p:nvPr/>
         </p:nvSpPr>
@@ -16461,7 +16554,7 @@
       </p:sp>
       <p:sp>
         <p:nvSpPr>
-          <p:cNvPr id="22" name="Rounded Rectangle 21"/>
+          <p:cNvPr id="23" name="Rounded Rectangle 22"/>
           <p:cNvSpPr/>
           <p:nvPr/>
         </p:nvSpPr>
@@ -16495,7 +16588,7 @@
       </p:sp>
       <p:sp>
         <p:nvSpPr>
-          <p:cNvPr id="23" name="TextBox 22"/>
+          <p:cNvPr id="24" name="TextBox 23"/>
           <p:cNvSpPr txBox="1"/>
           <p:nvPr/>
         </p:nvSpPr>
@@ -17221,7 +17314,46 @@
       </p:sp>
       <p:sp>
         <p:nvSpPr>
-          <p:cNvPr id="13" name="Rounded Rectangle 12"/>
+          <p:cNvPr id="13" name="TextBox 12"/>
+          <p:cNvSpPr txBox="1"/>
+          <p:nvPr/>
+        </p:nvSpPr>
+        <p:spPr>
+          <a:xfrm>
+            <a:off x="502920" y="4133087"/>
+            <a:ext cx="5486400" cy="219456"/>
+          </a:xfrm>
+          <a:prstGeom prst="rect">
+            <a:avLst/>
+          </a:prstGeom>
+          <a:noFill/>
+        </p:spPr>
+        <p:txBody>
+          <a:bodyPr wrap="square" lIns="0" rIns="0" tIns="0" bIns="0" anchor="t">
+            <a:spAutoFit/>
+          </a:bodyPr>
+          <a:lstStyle/>
+          <a:p>
+            <a:pPr algn="l">
+              <a:lnSpc>
+                <a:spcPct val="115000"/>
+              </a:lnSpc>
+            </a:pPr>
+            <a:r>
+              <a:rPr sz="1050" b="0" i="1">
+                <a:solidFill>
+                  <a:srgbClr val="6B7685"/>
+                </a:solidFill>
+                <a:latin typeface="Arial"/>
+              </a:rPr>
+              <a:t>ступени архитектуры</a:t>
+            </a:r>
+          </a:p>
+        </p:txBody>
+      </p:sp>
+      <p:sp>
+        <p:nvSpPr>
+          <p:cNvPr id="14" name="Rounded Rectangle 13"/>
           <p:cNvSpPr/>
           <p:nvPr/>
         </p:nvSpPr>
@@ -17255,7 +17387,7 @@
       </p:sp>
       <p:sp>
         <p:nvSpPr>
-          <p:cNvPr id="14" name="TextBox 13"/>
+          <p:cNvPr id="15" name="TextBox 14"/>
           <p:cNvSpPr txBox="1"/>
           <p:nvPr/>
         </p:nvSpPr>
@@ -17294,7 +17426,7 @@
       </p:sp>
       <p:sp>
         <p:nvSpPr>
-          <p:cNvPr id="15" name="Right Arrow 14"/>
+          <p:cNvPr id="16" name="Right Arrow 15"/>
           <p:cNvSpPr/>
           <p:nvPr/>
         </p:nvSpPr>
@@ -17324,7 +17456,7 @@
       </p:sp>
       <p:sp>
         <p:nvSpPr>
-          <p:cNvPr id="16" name="Rounded Rectangle 15"/>
+          <p:cNvPr id="17" name="Rounded Rectangle 16"/>
           <p:cNvSpPr/>
           <p:nvPr/>
         </p:nvSpPr>
@@ -17358,7 +17490,7 @@
       </p:sp>
       <p:sp>
         <p:nvSpPr>
-          <p:cNvPr id="17" name="TextBox 16"/>
+          <p:cNvPr id="18" name="TextBox 17"/>
           <p:cNvSpPr txBox="1"/>
           <p:nvPr/>
         </p:nvSpPr>
@@ -17397,7 +17529,7 @@
       </p:sp>
       <p:sp>
         <p:nvSpPr>
-          <p:cNvPr id="18" name="Right Arrow 17"/>
+          <p:cNvPr id="19" name="Right Arrow 18"/>
           <p:cNvSpPr/>
           <p:nvPr/>
         </p:nvSpPr>
@@ -17427,7 +17559,7 @@
       </p:sp>
       <p:sp>
         <p:nvSpPr>
-          <p:cNvPr id="19" name="Rounded Rectangle 18"/>
+          <p:cNvPr id="20" name="Rounded Rectangle 19"/>
           <p:cNvSpPr/>
           <p:nvPr/>
         </p:nvSpPr>
@@ -17461,7 +17593,7 @@
       </p:sp>
       <p:sp>
         <p:nvSpPr>
-          <p:cNvPr id="20" name="TextBox 19"/>
+          <p:cNvPr id="21" name="TextBox 20"/>
           <p:cNvSpPr txBox="1"/>
           <p:nvPr/>
         </p:nvSpPr>
@@ -21268,7 +21400,46 @@
       </p:sp>
       <p:sp>
         <p:nvSpPr>
-          <p:cNvPr id="10" name="Rounded Rectangle 9"/>
+          <p:cNvPr id="10" name="TextBox 9"/>
+          <p:cNvSpPr txBox="1"/>
+          <p:nvPr/>
+        </p:nvSpPr>
+        <p:spPr>
+          <a:xfrm>
+            <a:off x="502920" y="4544568"/>
+            <a:ext cx="5486400" cy="219456"/>
+          </a:xfrm>
+          <a:prstGeom prst="rect">
+            <a:avLst/>
+          </a:prstGeom>
+          <a:noFill/>
+        </p:spPr>
+        <p:txBody>
+          <a:bodyPr wrap="square" lIns="0" rIns="0" tIns="0" bIns="0" anchor="t">
+            <a:spAutoFit/>
+          </a:bodyPr>
+          <a:lstStyle/>
+          <a:p>
+            <a:pPr algn="l">
+              <a:lnSpc>
+                <a:spcPct val="115000"/>
+              </a:lnSpc>
+            </a:pPr>
+            <a:r>
+              <a:rPr sz="1050" b="0" i="1">
+                <a:solidFill>
+                  <a:srgbClr val="6B7685"/>
+                </a:solidFill>
+                <a:latin typeface="Arial"/>
+              </a:rPr>
+              <a:t>ходы разбора кейса</a:t>
+            </a:r>
+          </a:p>
+        </p:txBody>
+      </p:sp>
+      <p:sp>
+        <p:nvSpPr>
+          <p:cNvPr id="11" name="Rounded Rectangle 10"/>
           <p:cNvSpPr/>
           <p:nvPr/>
         </p:nvSpPr>
@@ -21302,7 +21473,7 @@
       </p:sp>
       <p:sp>
         <p:nvSpPr>
-          <p:cNvPr id="11" name="TextBox 10"/>
+          <p:cNvPr id="12" name="TextBox 11"/>
           <p:cNvSpPr txBox="1"/>
           <p:nvPr/>
         </p:nvSpPr>
@@ -21336,36 +21507,6 @@
               </a:rPr>
               <a:t>Ход 1: Облачный frontier?</a:t>
             </a:r>
-          </a:p>
-        </p:txBody>
-      </p:sp>
-      <p:sp>
-        <p:nvSpPr>
-          <p:cNvPr id="12" name="Right Arrow 11"/>
-          <p:cNvSpPr/>
-          <p:nvPr/>
-        </p:nvSpPr>
-        <p:spPr>
-          <a:xfrm>
-            <a:off x="4084320" y="5157216"/>
-            <a:ext cx="201167" cy="201168"/>
-          </a:xfrm>
-          <a:prstGeom prst="rightArrow">
-            <a:avLst/>
-          </a:prstGeom>
-          <a:solidFill>
-            <a:srgbClr val="028090"/>
-          </a:solidFill>
-          <a:ln>
-            <a:noFill/>
-          </a:ln>
-          <a:effectLst/>
-        </p:spPr>
-        <p:txBody>
-          <a:bodyPr rtlCol="0" anchor="ctr"/>
-          <a:lstStyle/>
-          <a:p>
-            <a:pPr algn="ctr"/>
           </a:p>
         </p:txBody>
       </p:sp>
@@ -21444,37 +21585,7 @@
       </p:sp>
       <p:sp>
         <p:nvSpPr>
-          <p:cNvPr id="15" name="Right Arrow 14"/>
-          <p:cNvSpPr/>
-          <p:nvPr/>
-        </p:nvSpPr>
-        <p:spPr>
-          <a:xfrm>
-            <a:off x="7903463" y="5157216"/>
-            <a:ext cx="201167" cy="201168"/>
-          </a:xfrm>
-          <a:prstGeom prst="rightArrow">
-            <a:avLst/>
-          </a:prstGeom>
-          <a:solidFill>
-            <a:srgbClr val="028090"/>
-          </a:solidFill>
-          <a:ln>
-            <a:noFill/>
-          </a:ln>
-          <a:effectLst/>
-        </p:spPr>
-        <p:txBody>
-          <a:bodyPr rtlCol="0" anchor="ctr"/>
-          <a:lstStyle/>
-          <a:p>
-            <a:pPr algn="ctr"/>
-          </a:p>
-        </p:txBody>
-      </p:sp>
-      <p:sp>
-        <p:nvSpPr>
-          <p:cNvPr id="16" name="Rounded Rectangle 15"/>
+          <p:cNvPr id="15" name="Rounded Rectangle 14"/>
           <p:cNvSpPr/>
           <p:nvPr/>
         </p:nvSpPr>
@@ -21508,7 +21619,7 @@
       </p:sp>
       <p:sp>
         <p:nvSpPr>
-          <p:cNvPr id="17" name="TextBox 16"/>
+          <p:cNvPr id="16" name="TextBox 15"/>
           <p:cNvSpPr txBox="1"/>
           <p:nvPr/>
         </p:nvSpPr>

--- a/library/seminars/sem-02/rendered/sem-02.pptx
+++ b/library/seminars/sem-02/rendered/sem-02.pptx
@@ -795,47 +795,42 @@
           <a:lstStyle/>
           <a:p>
             <a:r>
-              <a:t>Постановка: «Сделайте нам ИИ-помощника для операторов техподдержки —</a:t>
-            </a:r>
-          </a:p>
-          <a:p>
-            <a:r>
-              <a:t>подсказки ответов на тикеты, поиск похожих обращений в истории». На линии</a:t>
-            </a:r>
-          </a:p>
-          <a:p>
-            <a:r>
-              <a:t>12 операторов, поток — около 300 тикетов в день, с явным пиком с 10:00 до</a:t>
-            </a:r>
-          </a:p>
-          <a:p>
-            <a:r>
-              <a:t>13:00, когда очередь обращений растёт быстрее всего. Идея понятная —</a:t>
-            </a:r>
-          </a:p>
-          <a:p>
-            <a:r>
-              <a:t>оператор открывает новый тикет, а система сама подсказывает, как отвечали</a:t>
-            </a:r>
-          </a:p>
-          <a:p>
-            <a:r>
-              <a:t>на похожие обращения раньше, чтобы не искать вручную. Операторы весь</a:t>
-            </a:r>
-          </a:p>
-          <a:p>
-            <a:r>
-              <a:t>рабочий день сидят в одном и том же интерфейсе helpdesk-системы —</a:t>
-            </a:r>
-          </a:p>
-          <a:p>
-            <a:r>
-              <a:t>что-то вроде Zendesk или Jira Service Management, открывают тикет за</a:t>
-            </a:r>
-          </a:p>
-          <a:p>
-            <a:r>
-              <a:t>тикетом, отвечают клиентам, переключаются между обращениями десятками раз</a:t>
+              <a:t>Зачитайте реплику целиком. Ключевое для решения — не выделено особо: идея</a:t>
+            </a:r>
+          </a:p>
+          <a:p>
+            <a:r>
+              <a:t>подсказок ответов и поиска похожих обращений, 12 операторов на линии,</a:t>
+            </a:r>
+          </a:p>
+          <a:p>
+            <a:r>
+              <a:t>около 300 тикетов в день, пик с 10:00 до 13:00. Онбординг новичков,</a:t>
+            </a:r>
+          </a:p>
+          <a:p>
+            <a:r>
+              <a:t>квартальное ревью — шум, к архитектурному выбору не относится. На слайде</a:t>
+            </a:r>
+          </a:p>
+          <a:p>
+            <a:r>
+              <a:t>показан рабочий стол оператора техподдержки: список тикетов, окно ответа</a:t>
+            </a:r>
+          </a:p>
+          <a:p>
+            <a:r>
+              <a:t>клиенту. Операторы весь рабочий день сидят в одном и том же интерфейсе</a:t>
+            </a:r>
+          </a:p>
+          <a:p>
+            <a:r>
+              <a:t>helpdesk-системы — что-то вроде Zendesk или Jira Service Management,</a:t>
+            </a:r>
+          </a:p>
+          <a:p>
+            <a:r>
+              <a:t>открывают тикет за тикетом, переключаются между обращениями десятками раз</a:t>
             </a:r>
           </a:p>
           <a:p>
@@ -851,12 +846,6 @@
           <a:p>
             <a:r>
               <a:t>не менее важно, почему именно так, а не иначе?</a:t>
-            </a:r>
-          </a:p>
-          <a:p/>
-          <a:p>
-            <a:r>
-              <a:t>(Фото: FiveOne51 · Wikimedia Commons · CC BY-SA 3.0)</a:t>
             </a:r>
           </a:p>
         </p:txBody>
@@ -926,67 +915,67 @@
           <a:lstStyle/>
           <a:p>
             <a:r>
-              <a:t>А вот что говорит ИТ-директор компании, когда к нему приходят с этой</a:t>
-            </a:r>
-          </a:p>
-          <a:p>
-            <a:r>
-              <a:t>идеей: «У нас коробочный helpdesk. Открытого API нет, кастомизаций нет —</a:t>
-            </a:r>
-          </a:p>
-          <a:p>
-            <a:r>
-              <a:t>вендор и на письма-то не отвечает». Систему купили 4 года назад, на ней же</a:t>
-            </a:r>
-          </a:p>
-          <a:p>
-            <a:r>
-              <a:t>висят тикеты от HR и от фасилити-менеджмента, а контракт с вендором ещё на</a:t>
-            </a:r>
-          </a:p>
-          <a:p>
-            <a:r>
-              <a:t>2 года — так что сменить систему в моменте не получится даже при желании.</a:t>
-            </a:r>
-          </a:p>
-          <a:p>
-            <a:r>
-              <a:t>Компания даже написала вендору с вопросом об интеграции, и ответа так и не</a:t>
-            </a:r>
-          </a:p>
-          <a:p>
-            <a:r>
-              <a:t>получила. Вопрос в зал: что делаем? Обратите внимание, я не говорю вам,</a:t>
-            </a:r>
-          </a:p>
-          <a:p>
-            <a:r>
-              <a:t>хорошо это или плохо для вашего плана — просто называю факт, который вы бы</a:t>
-            </a:r>
-          </a:p>
-          <a:p>
-            <a:r>
-              <a:t>узнали, только если бы сами спросили ИТ-отдел заранее, до того как начали</a:t>
-            </a:r>
-          </a:p>
-          <a:p>
-            <a:r>
-              <a:t>проектировать решение. Кто хочет высказаться первым, что теперь</a:t>
-            </a:r>
-          </a:p>
-          <a:p>
-            <a:r>
-              <a:t>предлагаете? И кто из тех, кто минуту назад предлагал встроить помощника</a:t>
-            </a:r>
-          </a:p>
-          <a:p>
-            <a:r>
-              <a:t>прямо в интерфейс — что вы думаете сейчас, когда выяснилось, что сам</a:t>
-            </a:r>
-          </a:p>
-          <a:p>
-            <a:r>
-              <a:t>интерфейс для вас закрыт наглухо?</a:t>
+              <a:t>Зачитайте реплику ИТ-директора целиком, не выделяя ключевые слова</a:t>
+            </a:r>
+          </a:p>
+          <a:p>
+            <a:r>
+              <a:t>интонацией. Ключевое для решения — расположено внутри абзаца, а не в</a:t>
+            </a:r>
+          </a:p>
+          <a:p>
+            <a:r>
+              <a:t>первой фразе: открытого API нет, кастомизаций нет, систему купили 4 года</a:t>
+            </a:r>
+          </a:p>
+          <a:p>
+            <a:r>
+              <a:t>назад, на ней же тикеты HR и фасилити-менеджмента, контракт с вендором ещё</a:t>
+            </a:r>
+          </a:p>
+          <a:p>
+            <a:r>
+              <a:t>на 2 года. Переписка с вендором, бюджет на год, будущий пересмотр ИТ-</a:t>
+            </a:r>
+          </a:p>
+          <a:p>
+            <a:r>
+              <a:t>ландшафта — шум, к архитектурному выбору не относится. Вопрос в зал: что</a:t>
+            </a:r>
+          </a:p>
+          <a:p>
+            <a:r>
+              <a:t>делаем? Обратите внимание, я не говорю вам, хорошо это или плохо для</a:t>
+            </a:r>
+          </a:p>
+          <a:p>
+            <a:r>
+              <a:t>вашего плана — просто называю факт, который вы бы узнали, только если бы</a:t>
+            </a:r>
+          </a:p>
+          <a:p>
+            <a:r>
+              <a:t>сами спросили ИТ-отдел заранее, до того как начали проектировать решение.</a:t>
+            </a:r>
+          </a:p>
+          <a:p>
+            <a:r>
+              <a:t>Кто хочет высказаться первым, что теперь предлагаете? И кто из тех, кто</a:t>
+            </a:r>
+          </a:p>
+          <a:p>
+            <a:r>
+              <a:t>минуту назад предлагал встроить помощника прямо в интерфейс — что вы</a:t>
+            </a:r>
+          </a:p>
+          <a:p>
+            <a:r>
+              <a:t>думаете сейчас, когда выяснилось, что сам интерфейс для вас закрыт</a:t>
+            </a:r>
+          </a:p>
+          <a:p>
+            <a:r>
+              <a:t>наглухо?</a:t>
             </a:r>
           </a:p>
         </p:txBody>
@@ -1206,42 +1195,37 @@
           <a:lstStyle/>
           <a:p>
             <a:r>
-              <a:t>Маркетинг просит отдельный ИИ-сервис для генерации описаний товаров —</a:t>
-            </a:r>
-          </a:p>
-          <a:p>
-            <a:r>
-              <a:t>что-то вроде нового отдельного инструмента, куда нужно будет заходить,</a:t>
-            </a:r>
-          </a:p>
-          <a:p>
-            <a:r>
-              <a:t>логиниться и вбивать характеристики товара, чтобы получить готовое</a:t>
-            </a:r>
-          </a:p>
-          <a:p>
-            <a:r>
-              <a:t>описание для карточки на сайте. Каталог — 12 000 товарных позиций, а</a:t>
-            </a:r>
-          </a:p>
-          <a:p>
-            <a:r>
-              <a:t>описания сейчас пишет один копирайтер на аутсорсе, по мере поступления</a:t>
-            </a:r>
-          </a:p>
-          <a:p>
-            <a:r>
-              <a:t>новых товаров. Идея, судя по всему, родилась после того, как маркетинг</a:t>
-            </a:r>
-          </a:p>
-          <a:p>
-            <a:r>
-              <a:t>увидел похожий сервис у конкурента и решил, что нужно что-то подобное у</a:t>
-            </a:r>
-          </a:p>
-          <a:p>
-            <a:r>
-              <a:t>себя, причём как можно скорее. Вопрос в зал: отдельный сервис — хорошая</a:t>
+              <a:t>Зачитайте реплику из маркетинга целиком. Ключевое для решения — не</a:t>
+            </a:r>
+          </a:p>
+          <a:p>
+            <a:r>
+              <a:t>выделено особо: маркетинг хочет именно отдельный сервис-приложение по</a:t>
+            </a:r>
+          </a:p>
+          <a:p>
+            <a:r>
+              <a:t>образцу конкурента, каталог 12 000 товарных позиций, описания сейчас пишет</a:t>
+            </a:r>
+          </a:p>
+          <a:p>
+            <a:r>
+              <a:t>один копирайтер на аутсорсе. Конференция ритейла, демо для инвесторов,</a:t>
+            </a:r>
+          </a:p>
+          <a:p>
+            <a:r>
+              <a:t>жалобы копирайтера на нагрузку, баннеры на главной — шум, к архитектурному</a:t>
+            </a:r>
+          </a:p>
+          <a:p>
+            <a:r>
+              <a:t>выбору не относится. На слайде — макет отдельного нового сервиса: форма</a:t>
+            </a:r>
+          </a:p>
+          <a:p>
+            <a:r>
+              <a:t>ввода, кнопка «сгенерировать». Вопрос в зал: отдельный сервис — хорошая</a:t>
             </a:r>
           </a:p>
           <a:p>
@@ -2243,42 +2227,42 @@
           <a:lstStyle/>
           <a:p>
             <a:r>
-              <a:t>Постановка: после каждого созвона транскрипт приходит письмом, и нужен</a:t>
-            </a:r>
-          </a:p>
-          <a:p>
-            <a:r>
-              <a:t>протокол — решения, поручения, сроки. У команды около 15 встреч в неделю,</a:t>
-            </a:r>
-          </a:p>
-          <a:p>
-            <a:r>
-              <a:t>и сейчас протокол по каждой пишет проджект-менеджер вручную, пересматривая</a:t>
-            </a:r>
-          </a:p>
-          <a:p>
-            <a:r>
-              <a:t>транскрипт и выписывая ключевые пункты, а готовые протоколы складывают в</a:t>
-            </a:r>
-          </a:p>
-          <a:p>
-            <a:r>
-              <a:t>общую папку на диске. На это уходит заметное время каждую неделю, которое</a:t>
-            </a:r>
-          </a:p>
-          <a:p>
-            <a:r>
-              <a:t>хочется освободить. На входе у нас — полный транскрипт одной встречи</a:t>
-            </a:r>
-          </a:p>
-          <a:p>
-            <a:r>
-              <a:t>целиком, разумного объёма, буквально запись одного созвона, а на выходе</a:t>
-            </a:r>
-          </a:p>
-          <a:p>
-            <a:r>
-              <a:t>нужны структурированные решения, поручения и сроки, разложенные по</a:t>
+              <a:t>Зачитайте реплику целиком. Ключевое для решения — не выделено интонацией:</a:t>
+            </a:r>
+          </a:p>
+          <a:p>
+            <a:r>
+              <a:t>после каждого созвона транскрипт целиком приходит письмом, нужен протокол</a:t>
+            </a:r>
+          </a:p>
+          <a:p>
+            <a:r>
+              <a:t>с решениями, поручениями и сроками, около 15 встреч в неделю, сейчас</a:t>
+            </a:r>
+          </a:p>
+          <a:p>
+            <a:r>
+              <a:t>протокол пишет проджект-менеджер вручную. Имя Насти, её спринт-отчёты и</a:t>
+            </a:r>
+          </a:p>
+          <a:p>
+            <a:r>
+              <a:t>онбординг новых, аудит процессов, английский с подрядчиком — шум, к</a:t>
+            </a:r>
+          </a:p>
+          <a:p>
+            <a:r>
+              <a:t>архитектуре задачи не относится. На входе у нас — полный транскрипт одной</a:t>
+            </a:r>
+          </a:p>
+          <a:p>
+            <a:r>
+              <a:t>встречи целиком, разумного объёма, буквально запись одного созвона, а на</a:t>
+            </a:r>
+          </a:p>
+          <a:p>
+            <a:r>
+              <a:t>выходе нужны структурированные решения, поручения и сроки, разложенные по</a:t>
             </a:r>
           </a:p>
           <a:p>
@@ -2288,12 +2272,12 @@
           </a:p>
           <a:p>
             <a:r>
-              <a:t>почему именно так — что конкретно в этой постановке подсказывает вам</a:t>
-            </a:r>
-          </a:p>
-          <a:p>
-            <a:r>
-              <a:t>этот выбор, а не другой? Кто готов ответить первым?</a:t>
+              <a:t>почему именно так — что конкретно в этой постановке подсказывает вам этот</a:t>
+            </a:r>
+          </a:p>
+          <a:p>
+            <a:r>
+              <a:t>выбор, а не другой? Кто готов ответить первым?</a:t>
             </a:r>
           </a:p>
           <a:p/>
@@ -2494,52 +2478,57 @@
           <a:lstStyle/>
           <a:p>
             <a:r>
-              <a:t>Проходит время. Протоколы копятся в общей папке на диске, и на планёрке</a:t>
-            </a:r>
-          </a:p>
-          <a:p>
-            <a:r>
-              <a:t>кто-то спрашивает: «А что мы решали по подрядчику X в мае?» За это время</a:t>
-            </a:r>
-          </a:p>
-          <a:p>
-            <a:r>
-              <a:t>накопилось уже много протоколов с разных встреч, по разным проектам и</a:t>
-            </a:r>
-          </a:p>
-          <a:p>
-            <a:r>
-              <a:t>подрядчикам, и это не одна встреча, а десятки. Вопрос в зал: меняет ли это</a:t>
-            </a:r>
-          </a:p>
-          <a:p>
-            <a:r>
-              <a:t>архитектуру? Что именно изменилось по сравнению с тем, что мы обсуждали</a:t>
-            </a:r>
-          </a:p>
-          <a:p>
-            <a:r>
-              <a:t>минуту назад? Дайте себе секунду сопоставить новую просьбу с тем решением,</a:t>
-            </a:r>
-          </a:p>
-          <a:p>
-            <a:r>
-              <a:t>которое вы предлагали для одной встречи. Кто хочет высказаться первым? И</a:t>
-            </a:r>
-          </a:p>
-          <a:p>
-            <a:r>
-              <a:t>отдельно спрошу тех, кто минуту назад говорил про разовый вызов модели: кто</a:t>
-            </a:r>
-          </a:p>
-          <a:p>
-            <a:r>
-              <a:t>из вас сейчас передумал — и почему именно эта деталь заставила вас</a:t>
-            </a:r>
-          </a:p>
-          <a:p>
-            <a:r>
-              <a:t>пересмотреть ответ?</a:t>
+              <a:t>Зачитайте реплику целиком, не педалируя ключевую часть интонацией. Ключевое</a:t>
+            </a:r>
+          </a:p>
+          <a:p>
+            <a:r>
+              <a:t>для решения — растворено в рассказе про планёрку: протоколы копятся в общей</a:t>
+            </a:r>
+          </a:p>
+          <a:p>
+            <a:r>
+              <a:t>папке, вопрос «что решали по подрядчику X в мае» ищется по теме и примерной</a:t>
+            </a:r>
+          </a:p>
+          <a:p>
+            <a:r>
+              <a:t>дате, а не по точному документу, и это уже не одна встреча, а много</a:t>
+            </a:r>
+          </a:p>
+          <a:p>
+            <a:r>
+              <a:t>накопленных протоколов. Бюджет на квартал, отпускной график — шум, к</a:t>
+            </a:r>
+          </a:p>
+          <a:p>
+            <a:r>
+              <a:t>архитектуре не относится. Вопрос в зал: меняет ли это архитектуру? Что</a:t>
+            </a:r>
+          </a:p>
+          <a:p>
+            <a:r>
+              <a:t>именно изменилось по сравнению с тем, что мы обсуждали минуту назад? Дайте</a:t>
+            </a:r>
+          </a:p>
+          <a:p>
+            <a:r>
+              <a:t>себе секунду сопоставить новую просьбу с тем решением, которое вы предлагали</a:t>
+            </a:r>
+          </a:p>
+          <a:p>
+            <a:r>
+              <a:t>для одной встречи. Кто хочет высказаться первым? И отдельно спрошу тех, кто</a:t>
+            </a:r>
+          </a:p>
+          <a:p>
+            <a:r>
+              <a:t>минуту назад говорил про разовый вызов модели: кто из вас сейчас передумал —</a:t>
+            </a:r>
+          </a:p>
+          <a:p>
+            <a:r>
+              <a:t>и почему именно эта деталь заставила вас пересмотреть ответ?</a:t>
             </a:r>
           </a:p>
         </p:txBody>
@@ -2744,62 +2733,52 @@
           <a:lstStyle/>
           <a:p>
             <a:r>
-              <a:t>И ещё одна реплика от той же команды, чуть позже: «Поручения из протоколов</a:t>
-            </a:r>
-          </a:p>
-          <a:p>
-            <a:r>
-              <a:t>мы всё равно руками в таск-трекер переносим...» — то есть система уже</a:t>
-            </a:r>
-          </a:p>
-          <a:p>
-            <a:r>
-              <a:t>находит решения и поручения в тексте протокола, показывает их человеку, но</a:t>
-            </a:r>
-          </a:p>
-          <a:p>
-            <a:r>
-              <a:t>кто-то всё равно вручную открывает таск-трекер и заводит там задачи одну</a:t>
-            </a:r>
-          </a:p>
-          <a:p>
-            <a:r>
-              <a:t>за другой, выставляя исполнителя и срок. При этом уже сейчас видно, что</a:t>
-            </a:r>
-          </a:p>
-          <a:p>
-            <a:r>
-              <a:t>половина поручений из майских протоколов до сих пор без исполнителя —</a:t>
-            </a:r>
-          </a:p>
-          <a:p>
-            <a:r>
-              <a:t>руки до переноса просто не доходят. Вопрос в зал: меняет ли это</a:t>
-            </a:r>
-          </a:p>
-          <a:p>
-            <a:r>
-              <a:t>архитектуру ещё раз? Что здесь появилось нового по сравнению с поиском по</a:t>
-            </a:r>
-          </a:p>
-          <a:p>
-            <a:r>
-              <a:t>базе, о котором мы только что говорили минуту назад? Кто передумал — и,</a:t>
-            </a:r>
-          </a:p>
-          <a:p>
-            <a:r>
-              <a:t>что важнее самого факта смены мнения, почему именно эта деталь заставила</a:t>
-            </a:r>
-          </a:p>
-          <a:p>
-            <a:r>
-              <a:t>вас пересмотреть архитектуру, а не просто добавить ещё один шаг к прежнему</a:t>
-            </a:r>
-          </a:p>
-          <a:p>
-            <a:r>
-              <a:t>решению?</a:t>
+              <a:t>Зачитайте реплику целиком. Ключевое для решения — не выделено особо:</a:t>
+            </a:r>
+          </a:p>
+          <a:p>
+            <a:r>
+              <a:t>поручения из протоколов система уже находит, но их всё равно вручную</a:t>
+            </a:r>
+          </a:p>
+          <a:p>
+            <a:r>
+              <a:t>переносят в таск-трекер одно за другим, и половина поручений из майских</a:t>
+            </a:r>
+          </a:p>
+          <a:p>
+            <a:r>
+              <a:t>протоколов до сих пор без исполнителя. Благодарность за поиск, ретро, цвет</a:t>
+            </a:r>
+          </a:p>
+          <a:p>
+            <a:r>
+              <a:t>тегов в таск-трекере — шум, к архитектуре не относится. Вопрос в зал:</a:t>
+            </a:r>
+          </a:p>
+          <a:p>
+            <a:r>
+              <a:t>меняет ли это архитектуру ещё раз? Что здесь появилось нового по сравнению</a:t>
+            </a:r>
+          </a:p>
+          <a:p>
+            <a:r>
+              <a:t>с поиском по базе, о котором мы только что говорили минуту назад? Кто</a:t>
+            </a:r>
+          </a:p>
+          <a:p>
+            <a:r>
+              <a:t>передумал — и, что важнее самого факта смены мнения, почему именно эта</a:t>
+            </a:r>
+          </a:p>
+          <a:p>
+            <a:r>
+              <a:t>деталь заставила вас пересмотреть архитектуру, а не просто добавить ещё</a:t>
+            </a:r>
+          </a:p>
+          <a:p>
+            <a:r>
+              <a:t>один шаг к прежнему решению?</a:t>
             </a:r>
           </a:p>
         </p:txBody>
@@ -3004,62 +2983,47 @@
           <a:lstStyle/>
           <a:p>
             <a:r>
-              <a:t>Ещё один блиц. Постановка: нужен еженедельный дайджест по рабочим чатам и</a:t>
-            </a:r>
-          </a:p>
-          <a:p>
-            <a:r>
-              <a:t>почте команды — что обсуждали, что решили за неделю, коротко, одним</a:t>
-            </a:r>
-          </a:p>
-          <a:p>
-            <a:r>
-              <a:t>сообщением, чтобы не перечитывать всю переписку заново. Дайджест нужен по</a:t>
-            </a:r>
-          </a:p>
-          <a:p>
-            <a:r>
-              <a:t>пятницам, к 17:00, чтобы руководитель успевал его прочитать перед</a:t>
-            </a:r>
-          </a:p>
-          <a:p>
-            <a:r>
-              <a:t>выходными, а не разбирался с накопившейся перепиской уже в понедельник</a:t>
-            </a:r>
-          </a:p>
-          <a:p>
-            <a:r>
-              <a:t>утром. Источников несколько — и рабочий чат команды, и почта, и всё это</a:t>
-            </a:r>
-          </a:p>
-          <a:p>
-            <a:r>
-              <a:t>нужно свести в одно связное сообщение, а не просто склеить куски текста</a:t>
-            </a:r>
-          </a:p>
-          <a:p>
-            <a:r>
-              <a:t>подряд. Вопрос в зал: какая архитектура здесь нужна — разовый вызов</a:t>
-            </a:r>
-          </a:p>
-          <a:p>
-            <a:r>
-              <a:t>модели, RAG, агент, или что-то ещё? Аргументируйте, не просто называйте</a:t>
-            </a:r>
-          </a:p>
-          <a:p>
-            <a:r>
-              <a:t>технологию — объясните, почему выбрали именно её, и что конкретно в</a:t>
-            </a:r>
-          </a:p>
-          <a:p>
-            <a:r>
-              <a:t>постановке навело вас именно на эту мысль. Кто готов? Аргументируйте свой</a:t>
-            </a:r>
-          </a:p>
-          <a:p>
-            <a:r>
-              <a:t>выбор.</a:t>
+              <a:t>Зачитайте реплику целиком. Ключевое для решения — не выделено особо:</a:t>
+            </a:r>
+          </a:p>
+          <a:p>
+            <a:r>
+              <a:t>нужен именно еженедельный (по расписанию, не по запросу) дайджест по</a:t>
+            </a:r>
+          </a:p>
+          <a:p>
+            <a:r>
+              <a:t>нескольким конкретным источникам — рабочему чату и почте, — раз в неделю к</a:t>
+            </a:r>
+          </a:p>
+          <a:p>
+            <a:r>
+              <a:t>пятнице 17:00, и информацию нужно свести в одно связное сообщение. Переезд</a:t>
+            </a:r>
+          </a:p>
+          <a:p>
+            <a:r>
+              <a:t>на другой мессенджер — шум, к архитектуре не относится. Вопрос в зал: какая</a:t>
+            </a:r>
+          </a:p>
+          <a:p>
+            <a:r>
+              <a:t>архитектура здесь нужна — разовый вызов модели, RAG, агент, или что-то ещё?</a:t>
+            </a:r>
+          </a:p>
+          <a:p>
+            <a:r>
+              <a:t>Аргументируйте, не просто называйте технологию — объясните, почему выбрали</a:t>
+            </a:r>
+          </a:p>
+          <a:p>
+            <a:r>
+              <a:t>именно её, и что конкретно в постановке навело вас именно на эту мысль. Кто</a:t>
+            </a:r>
+          </a:p>
+          <a:p>
+            <a:r>
+              <a:t>готов? Аргументируйте свой выбор.</a:t>
             </a:r>
           </a:p>
         </p:txBody>
@@ -3671,63 +3635,52 @@
           <a:lstStyle/>
           <a:p>
             <a:r>
-              <a:t>Постановка от руководителя отдела продаж: хочет по каждому звонку</a:t>
-            </a:r>
-          </a:p>
-          <a:p>
-            <a:r>
-              <a:t>менеджера карточку — какая потребность клиента выявлена, какие возражения</a:t>
-            </a:r>
-          </a:p>
-          <a:p>
-            <a:r>
-              <a:t>прозвучали, какие договорённости достигнуты, чтобы не пересматривать</a:t>
-            </a:r>
-          </a:p>
-          <a:p>
-            <a:r>
-              <a:t>запись целиком перед следующим звонком с тем же клиентом. В отделе 8</a:t>
-            </a:r>
-          </a:p>
-          <a:p>
-            <a:r>
-              <a:t>менеджеров по продажам, у каждого по 15-20 звонков в день. Записи сейчас</a:t>
-            </a:r>
-          </a:p>
-          <a:p>
-            <a:r>
-              <a:t>лежат в телефонии и никуда не выгружаются, а вся история клиента ведётся</a:t>
-            </a:r>
-          </a:p>
-          <a:p>
-            <a:r>
-              <a:t>в CRM компании. На входе — запись разговора, обычный свободный диалог</a:t>
-            </a:r>
-          </a:p>
-          <a:p>
-            <a:r>
-              <a:t>между менеджером и клиентом, без всякой структуры, с перебиваниями,</a:t>
-            </a:r>
-          </a:p>
-          <a:p>
-            <a:r>
-              <a:t>паузами, отступлениями от темы, иногда с посторонними звуками на фоне.</a:t>
-            </a:r>
-          </a:p>
-          <a:p>
-            <a:r>
-              <a:t>Вопрос в зал: как это построить? Что предложите, и почему именно так? Кто</a:t>
-            </a:r>
-          </a:p>
-          <a:p>
-            <a:r>
-              <a:t>начнёт?</a:t>
-            </a:r>
-          </a:p>
-          <a:p/>
-          <a:p>
-            <a:r>
-              <a:t>(Фото: OddibeKerfeld · Wikimedia Commons · CC BY-SA 3.0)</a:t>
+              <a:t>Зачитайте реплику руководителя отдела продаж целиком. Ключевое для</a:t>
+            </a:r>
+          </a:p>
+          <a:p>
+            <a:r>
+              <a:t>решения — не выделено особо: нужна карточка-выжимка по звонку (потребность</a:t>
+            </a:r>
+          </a:p>
+          <a:p>
+            <a:r>
+              <a:t>/ возражения / договорённости), 8 менеджеров, по 15-20 звонков в день,</a:t>
+            </a:r>
+          </a:p>
+          <a:p>
+            <a:r>
+              <a:t>записи лежат в телефонии и никуда не выгружаются, история клиента ведётся</a:t>
+            </a:r>
+          </a:p>
+          <a:p>
+            <a:r>
+              <a:t>в CRM компании. Стратегическая сессия, дубли контактов в CRM — шум, к</a:t>
+            </a:r>
+          </a:p>
+          <a:p>
+            <a:r>
+              <a:t>архитектуре не относится. На входе — запись разговора, обычный свободный</a:t>
+            </a:r>
+          </a:p>
+          <a:p>
+            <a:r>
+              <a:t>диалог между менеджером и клиентом, без всякой структуры, с</a:t>
+            </a:r>
+          </a:p>
+          <a:p>
+            <a:r>
+              <a:t>перебиваниями, паузами, отступлениями от темы, иногда с посторонними</a:t>
+            </a:r>
+          </a:p>
+          <a:p>
+            <a:r>
+              <a:t>звуками на фоне. Вопрос в зал: как это построить? Что предложите, и</a:t>
+            </a:r>
+          </a:p>
+          <a:p>
+            <a:r>
+              <a:t>почему именно так? Кто начнёт?</a:t>
             </a:r>
           </a:p>
         </p:txBody>
@@ -3947,47 +3900,42 @@
           <a:lstStyle/>
           <a:p>
             <a:r>
-              <a:t>Разговор случился на еженедельном созвоне по бюджету — туда же, кстати,</a:t>
-            </a:r>
-          </a:p>
-          <a:p>
-            <a:r>
-              <a:t>пригласили и юриста из предыдущего разбора. Две реплики подряд, от разных</a:t>
-            </a:r>
-          </a:p>
-          <a:p>
-            <a:r>
-              <a:t>людей, но они друг друга усиливают. CTO говорит: «GPU-сервера нет, и</a:t>
-            </a:r>
-          </a:p>
-          <a:p>
-            <a:r>
-              <a:t>бюджета на него в этом году нет» — то есть про мощную локальную</a:t>
-            </a:r>
-          </a:p>
-          <a:p>
-            <a:r>
-              <a:t>инфраструктуру для тяжёлой модели речи не идёт вообще. А руководитель</a:t>
-            </a:r>
-          </a:p>
-          <a:p>
-            <a:r>
-              <a:t>отдела продаж, когда его переспросили, что именно ему нужно на выходе,</a:t>
-            </a:r>
-          </a:p>
-          <a:p>
-            <a:r>
-              <a:t>отвечает довольно приземлённо: «Мне не беседа нужна — пять полей в CRM».</a:t>
-            </a:r>
-          </a:p>
-          <a:p>
-            <a:r>
-              <a:t>Не пересказ, не анализ тона голоса, просто пять конкретных полей. Вопрос</a:t>
-            </a:r>
-          </a:p>
-          <a:p>
-            <a:r>
-              <a:t>в зал: меняет ли это архитектуру ещё раз? Что из сказанного раньше теперь</a:t>
+              <a:t>Зачитайте обе реплики подряд, не выделяя ключевые слова интонацией.</a:t>
+            </a:r>
+          </a:p>
+          <a:p>
+            <a:r>
+              <a:t>Ключевое для решения растворено в контексте: у CTO — GPU-сервера нет и</a:t>
+            </a:r>
+          </a:p>
+          <a:p>
+            <a:r>
+              <a:t>бюджета на него в этом году нет, то есть про мощную локальную</a:t>
+            </a:r>
+          </a:p>
+          <a:p>
+            <a:r>
+              <a:t>инфраструктуру для тяжёлой модели речи не идёт; у РОП — нужны именно пять</a:t>
+            </a:r>
+          </a:p>
+          <a:p>
+            <a:r>
+              <a:t>конкретных полей в CRM, не беседа и не анализ тона голоса. Юрист на демо,</a:t>
+            </a:r>
+          </a:p>
+          <a:p>
+            <a:r>
+              <a:t>приоритеты финансового директора, миграция почты, ноутбуки поддержки,</a:t>
+            </a:r>
+          </a:p>
+          <a:p>
+            <a:r>
+              <a:t>понедельничный отчёт РОПа — шум, к архитектуре не относится. Вопрос в</a:t>
+            </a:r>
+          </a:p>
+          <a:p>
+            <a:r>
+              <a:t>зал: меняет ли это архитектуру ещё раз? Что из сказанного раньше теперь</a:t>
             </a:r>
           </a:p>
           <a:p>
@@ -4932,57 +4880,62 @@
           <a:lstStyle/>
           <a:p>
             <a:r>
-              <a:t>Реплика продакта, слово в слово: «Бухгалтерия тонет. Три человека, около</a:t>
-            </a:r>
-          </a:p>
-          <a:p>
-            <a:r>
-              <a:t>400 накладных в месяц, всё руками в 1С, к концу квартала завал и ошибки.</a:t>
-            </a:r>
-          </a:p>
-          <a:p>
-            <a:r>
-              <a:t>Вот два примера — форматы вроде одинаковые. Можно автоматом? Что по</a:t>
-            </a:r>
-          </a:p>
-          <a:p>
-            <a:r>
-              <a:t>срокам?» Вот эти два примера у вас на экране — посмотрите на них</a:t>
-            </a:r>
-          </a:p>
-          <a:p>
-            <a:r>
-              <a:t>внимательно, структура почти одинаковая: те же поля, тот же порядок,</a:t>
-            </a:r>
-          </a:p>
-          <a:p>
-            <a:r>
-              <a:t>похожий вид таблицы. А рядом — третья карточка, целевая таблица в 1С, куда</a:t>
-            </a:r>
-          </a:p>
-          <a:p>
-            <a:r>
-              <a:t>всё это в итоге должно попасть: дата, номер накладной, позиция, сумма. Те</a:t>
-            </a:r>
-          </a:p>
-          <a:p>
-            <a:r>
-              <a:t>же поля, что и в накладных, просто в другом месте. Вопрос в зал: что вы</a:t>
-            </a:r>
-          </a:p>
-          <a:p>
-            <a:r>
-              <a:t>предложите? Нужен ли здесь ИИ вообще, или можно обойтись без него? Какие</a:t>
-            </a:r>
-          </a:p>
-          <a:p>
-            <a:r>
-              <a:t>конкретно поля вы бы вытаскивали, и что, на ваш взгляд, определяет</a:t>
-            </a:r>
-          </a:p>
-          <a:p>
-            <a:r>
-              <a:t>сложность этой задачи? Кто готов высказаться первым?</a:t>
+              <a:t>Зачитайте цитату продакта целиком, не сокращая — студенты должны сами</a:t>
+            </a:r>
+          </a:p>
+          <a:p>
+            <a:r>
+              <a:t>выловить из неё то, что относится к задаче. Ключевое для решения: три</a:t>
+            </a:r>
+          </a:p>
+          <a:p>
+            <a:r>
+              <a:t>человека, около 400 накладных в месяц, всё руками в 1С, к концу квартала</a:t>
+            </a:r>
+          </a:p>
+          <a:p>
+            <a:r>
+              <a:t>завал и ошибки, и два примера накладных, где форматы «вроде одинаковые».</a:t>
+            </a:r>
+          </a:p>
+          <a:p>
+            <a:r>
+              <a:t>Всё остальное — отпуск Олега, Дима после релиза мобилки, склад, ревью</a:t>
+            </a:r>
+          </a:p>
+          <a:p>
+            <a:r>
+              <a:t>бюджета — шум, к архитектуре задачи отношения не имеет. Покажите на</a:t>
+            </a:r>
+          </a:p>
+          <a:p>
+            <a:r>
+              <a:t>слайде оба примера накладных и третью карточку — целевую таблицу в 1С с</a:t>
+            </a:r>
+          </a:p>
+          <a:p>
+            <a:r>
+              <a:t>теми же полями (Дата / № накладной / Позиция / Сумма), чтобы аудитория</a:t>
+            </a:r>
+          </a:p>
+          <a:p>
+            <a:r>
+              <a:t>сразу увидела совпадение структуры между источником и целью. Вопрос в</a:t>
+            </a:r>
+          </a:p>
+          <a:p>
+            <a:r>
+              <a:t>зал: что вы предложите? Нужен ли здесь ИИ вообще, или можно обойтись без</a:t>
+            </a:r>
+          </a:p>
+          <a:p>
+            <a:r>
+              <a:t>него? Какие конкретно поля вы бы вытаскивали, и что, на ваш взгляд,</a:t>
+            </a:r>
+          </a:p>
+          <a:p>
+            <a:r>
+              <a:t>определяет сложность этой задачи? Кто готов высказаться первым?</a:t>
             </a:r>
           </a:p>
           <a:p/>
@@ -5058,47 +5011,52 @@
           <a:lstStyle/>
           <a:p>
             <a:r>
-              <a:t>Ещё одна ситуация про поток новостей из многих источников. Нужно склеивать</a:t>
-            </a:r>
-          </a:p>
-          <a:p>
-            <a:r>
-              <a:t>сообщения об одном и том же событии в одну карточку, чтобы пользователь не</a:t>
-            </a:r>
-          </a:p>
-          <a:p>
-            <a:r>
-              <a:t>видел десять почти одинаковых новостей подряд от разных изданий, которые</a:t>
-            </a:r>
-          </a:p>
-          <a:p>
-            <a:r>
-              <a:t>пишут об одном и том же событии своими словами. Вопрос в зал: какая</a:t>
-            </a:r>
-          </a:p>
-          <a:p>
-            <a:r>
-              <a:t>технология здесь нужна? Интуитивно многие сейчас скажут — нужно понимание</a:t>
-            </a:r>
-          </a:p>
-          <a:p>
-            <a:r>
-              <a:t>смысла текста, значит модель, и придётся гонять каждую пару новостей через</a:t>
-            </a:r>
-          </a:p>
-          <a:p>
-            <a:r>
-              <a:t>LLM, сравнивая их попарно. Согласны с этим, или у кого-то в зале уже есть</a:t>
-            </a:r>
-          </a:p>
-          <a:p>
-            <a:r>
-              <a:t>сомнения на этот счёт? Подумайте, сколько таких пар новостей нужно будет</a:t>
-            </a:r>
-          </a:p>
-          <a:p>
-            <a:r>
-              <a:t>сравнивать каждый день при большом потоке источников.</a:t>
+              <a:t>Зачитайте реплику продакта целиком. Ключевое для решения — не выделено</a:t>
+            </a:r>
+          </a:p>
+          <a:p>
+            <a:r>
+              <a:t>особо: поток новостей из многих источников, нужно склеивать сообщения об</a:t>
+            </a:r>
+          </a:p>
+          <a:p>
+            <a:r>
+              <a:t>одном и том же событии в одну карточку. Жалобы в поддержку, подключение</a:t>
+            </a:r>
+          </a:p>
+          <a:p>
+            <a:r>
+              <a:t>новых источников, бюджет на фичи — шум, к архитектуре не относится.</a:t>
+            </a:r>
+          </a:p>
+          <a:p>
+            <a:r>
+              <a:t>Вопрос в зал: какая технология здесь нужна? Интуитивно многие сейчас</a:t>
+            </a:r>
+          </a:p>
+          <a:p>
+            <a:r>
+              <a:t>скажут — нужно понимание смысла текста, значит модель, и придётся гонять</a:t>
+            </a:r>
+          </a:p>
+          <a:p>
+            <a:r>
+              <a:t>каждую пару новостей через LLM, сравнивая их попарно. Согласны с этим, или</a:t>
+            </a:r>
+          </a:p>
+          <a:p>
+            <a:r>
+              <a:t>у кого-то в зале уже есть сомнения на этот счёт? Подумайте, сколько таких</a:t>
+            </a:r>
+          </a:p>
+          <a:p>
+            <a:r>
+              <a:t>пар новостей нужно будет сравнивать каждый день при большом потоке</a:t>
+            </a:r>
+          </a:p>
+          <a:p>
+            <a:r>
+              <a:t>источников.</a:t>
             </a:r>
           </a:p>
         </p:txBody>
@@ -5409,62 +5367,72 @@
           <a:lstStyle/>
           <a:p>
             <a:r>
-              <a:t>Дальше в этой истории было так: попросили архив — бухгалтерия прислала</a:t>
-            </a:r>
-          </a:p>
-          <a:p>
-            <a:r>
-              <a:t>ZIP-файл на 4,2 гигабайта, и внутри вперемешку и сканы актов сверки, и</a:t>
-            </a:r>
-          </a:p>
-          <a:p>
-            <a:r>
-              <a:t>договоры, а нужны из всего этого только накладные. Вот несколько примеров</a:t>
-            </a:r>
-          </a:p>
-          <a:p>
-            <a:r>
-              <a:t>накладных из этого архива — смотрите, форматы уже не такие одинаковые, как</a:t>
-            </a:r>
-          </a:p>
-          <a:p>
-            <a:r>
-              <a:t>в первых двух документах: один выглядит как обычная таблица, во втором</a:t>
-            </a:r>
-          </a:p>
-          <a:p>
-            <a:r>
-              <a:t>поля названы и расположены иначе, третий — со свободным текстом вместо</a:t>
-            </a:r>
-          </a:p>
-          <a:p>
-            <a:r>
-              <a:t>чёткой таблицы, а четвёртый и вовсе на английском языке, потому что один</a:t>
-            </a:r>
-          </a:p>
-          <a:p>
-            <a:r>
-              <a:t>из поставщиков — иностранный. Это тот же архив, только теперь мы видим его</a:t>
-            </a:r>
-          </a:p>
-          <a:p>
-            <a:r>
-              <a:t>целиком, а не два выбранных примера. Вопрос в зал: меняет ли это ваш</a:t>
-            </a:r>
-          </a:p>
-          <a:p>
-            <a:r>
-              <a:t>ответ? Дайте секунду посмотреть на эти четыре карточки и сравнить с тем,</a:t>
-            </a:r>
-          </a:p>
-          <a:p>
-            <a:r>
-              <a:t>что видели минуту назад. И если вы говорили про чистый парсер без ИИ — что</a:t>
-            </a:r>
-          </a:p>
-          <a:p>
-            <a:r>
-              <a:t>вы сейчас думаете, когда видите этот разброс форматов?</a:t>
+              <a:t>Зачитайте цитату бухгалтера. Ключевое для решения — она в середине текста,</a:t>
+            </a:r>
+          </a:p>
+          <a:p>
+            <a:r>
+              <a:t>не выделена: внутри архива вперемешку и сканы актов сверки, и договоры, и</a:t>
+            </a:r>
+          </a:p>
+          <a:p>
+            <a:r>
+              <a:t>сами накладные, отсортировать заранее не просили. Файлообменник, размер</a:t>
+            </a:r>
+          </a:p>
+          <a:p>
+            <a:r>
+              <a:t>письма 20 МБ, закрытие месяца, занятость до обеда — шум, к архитектуре</a:t>
+            </a:r>
+          </a:p>
+          <a:p>
+            <a:r>
+              <a:t>задачи не относится. На слайде показаны несколько примеров накладных из</a:t>
+            </a:r>
+          </a:p>
+          <a:p>
+            <a:r>
+              <a:t>этого архива — форматы уже не такие одинаковые, как в первых двух</a:t>
+            </a:r>
+          </a:p>
+          <a:p>
+            <a:r>
+              <a:t>документах: один выглядит как обычная таблица, во втором поля названы и</a:t>
+            </a:r>
+          </a:p>
+          <a:p>
+            <a:r>
+              <a:t>расположены иначе, третий — со свободным текстом вместо чёткой таблицы, а</a:t>
+            </a:r>
+          </a:p>
+          <a:p>
+            <a:r>
+              <a:t>четвёртый и вовсе на английском языке, потому что один из поставщиков —</a:t>
+            </a:r>
+          </a:p>
+          <a:p>
+            <a:r>
+              <a:t>иностранный. Это тот же архив, только теперь мы видим его целиком, а не</a:t>
+            </a:r>
+          </a:p>
+          <a:p>
+            <a:r>
+              <a:t>два выбранных примера. Вопрос в зал: меняет ли это ваш ответ? Дайте</a:t>
+            </a:r>
+          </a:p>
+          <a:p>
+            <a:r>
+              <a:t>секунду посмотреть на эти четыре карточки и сравнить с тем, что видели</a:t>
+            </a:r>
+          </a:p>
+          <a:p>
+            <a:r>
+              <a:t>минуту назад. И если вы говорили про чистый парсер без ИИ — что вы сейчас</a:t>
+            </a:r>
+          </a:p>
+          <a:p>
+            <a:r>
+              <a:t>думаете, когда видите этот разброс форматов?</a:t>
             </a:r>
           </a:p>
         </p:txBody>
@@ -5674,52 +5642,52 @@
           <a:lstStyle/>
           <a:p>
             <a:r>
-              <a:t>Постановка: нужно вычистить персональные данные из логов приложения перед</a:t>
-            </a:r>
-          </a:p>
-          <a:p>
-            <a:r>
-              <a:t>передачей их внешнему подрядчику на анализ производительности. Объём —</a:t>
-            </a:r>
-          </a:p>
-          <a:p>
-            <a:r>
-              <a:t>около 40 гигабайт логов за квартал, и подрядчик ждёт архив уже в пятницу,</a:t>
-            </a:r>
-          </a:p>
-          <a:p>
-            <a:r>
-              <a:t>так что времени разбираться вручную нет. Подрядчику нужны сами логи —</a:t>
-            </a:r>
-          </a:p>
-          <a:p>
-            <a:r>
-              <a:t>структура запросов, тайминги, ошибки, — но не данные конкретных людей. Вот</a:t>
-            </a:r>
-          </a:p>
-          <a:p>
-            <a:r>
-              <a:t>пример строки лога у вас на экране — посмотрите, что там вообще</a:t>
-            </a:r>
-          </a:p>
-          <a:p>
-            <a:r>
-              <a:t>встречается: номер телефона, адрес почты, и фраза вроде «передайте это</a:t>
-            </a:r>
-          </a:p>
-          <a:p>
-            <a:r>
-              <a:t>Ивану из бухгалтерии». Вопрос в зал: как максимально быстро и дёшево</a:t>
-            </a:r>
-          </a:p>
-          <a:p>
-            <a:r>
-              <a:t>очистить эти 40 гигабайт до пятницы? У кого есть мнение — что бы вы</a:t>
-            </a:r>
-          </a:p>
-          <a:p>
-            <a:r>
-              <a:t>предложили в первую очередь?</a:t>
+              <a:t>Зачитайте реплику коллеги, который готовит логи для подрядчика. Ключевое</a:t>
+            </a:r>
+          </a:p>
+          <a:p>
+            <a:r>
+              <a:t>для решения — не выделено особо: 40 ГБ логов за квартал, дедлайн пятница,</a:t>
+            </a:r>
+          </a:p>
+          <a:p>
+            <a:r>
+              <a:t>подрядчику нужна структура запросов/тайминги/ошибки, но не данные</a:t>
+            </a:r>
+          </a:p>
+          <a:p>
+            <a:r>
+              <a:t>конкретных людей, и в логах вперемешку встречаются телефон, email и фраза</a:t>
+            </a:r>
+          </a:p>
+          <a:p>
+            <a:r>
+              <a:t>вроде «передайте это Ивану из бухгалтерии». Спринт подрядчика — шум, к</a:t>
+            </a:r>
+          </a:p>
+          <a:p>
+            <a:r>
+              <a:t>решению задачи не относится. Пример строки</a:t>
+            </a:r>
+          </a:p>
+          <a:p>
+            <a:r>
+              <a:t>лога на слайде показывает именно этот разброс: номер телефона, адрес</a:t>
+            </a:r>
+          </a:p>
+          <a:p>
+            <a:r>
+              <a:t>почты, фраза с именем в свободном тексте. Вопрос в зал: как максимально</a:t>
+            </a:r>
+          </a:p>
+          <a:p>
+            <a:r>
+              <a:t>быстро и дёшево очистить эти 40 гигабайт до пятницы? У кого есть мнение —</a:t>
+            </a:r>
+          </a:p>
+          <a:p>
+            <a:r>
+              <a:t>что бы вы предложили в первую очередь?</a:t>
             </a:r>
           </a:p>
         </p:txBody>
@@ -9512,8 +9480,8 @@
         </p:nvSpPr>
         <p:spPr>
           <a:xfrm>
-            <a:off x="502920" y="411480"/>
-            <a:ext cx="11183112" cy="914400"/>
+            <a:off x="502920" y="228600"/>
+            <a:ext cx="11183112" cy="411480"/>
           </a:xfrm>
           <a:prstGeom prst="rect">
             <a:avLst/>
@@ -9532,7 +9500,7 @@
               </a:lnSpc>
             </a:pPr>
             <a:r>
-              <a:rPr sz="2800" b="1" i="0">
+              <a:rPr sz="2600" b="1" i="0">
                 <a:solidFill>
                   <a:srgbClr val="21295C"/>
                 </a:solidFill>
@@ -9551,12 +9519,12 @@
         </p:nvSpPr>
         <p:spPr>
           <a:xfrm>
-            <a:off x="502920" y="1005840"/>
-            <a:ext cx="11183112" cy="1234440"/>
+            <a:off x="502920" y="713232"/>
+            <a:ext cx="11183112" cy="2514600"/>
           </a:xfrm>
           <a:prstGeom prst="roundRect">
             <a:avLst>
-              <a:gd name="adj" fmla="val 24691"/>
+              <a:gd name="adj" fmla="val 12121"/>
             </a:avLst>
           </a:prstGeom>
           <a:solidFill>
@@ -9593,7 +9561,7 @@
         </p:blipFill>
         <p:spPr>
           <a:xfrm>
-            <a:off x="722376" y="1179576"/>
+            <a:off x="722376" y="886968"/>
             <a:ext cx="292608" cy="292608"/>
           </a:xfrm>
           <a:prstGeom prst="rect">
@@ -9609,8 +9577,8 @@
         </p:nvSpPr>
         <p:spPr>
           <a:xfrm>
-            <a:off x="722376" y="1517904"/>
-            <a:ext cx="10744200" cy="502920"/>
+            <a:off x="722376" y="1225296"/>
+            <a:ext cx="10744200" cy="1783080"/>
           </a:xfrm>
           <a:prstGeom prst="rect">
             <a:avLst/>
@@ -9629,13 +9597,13 @@
               </a:lnSpc>
             </a:pPr>
             <a:r>
-              <a:rPr sz="1600" b="0" i="1">
+              <a:rPr sz="1400" b="0" i="1">
                 <a:solidFill>
                   <a:srgbClr val="21295C"/>
                 </a:solidFill>
                 <a:latin typeface="Arial"/>
               </a:rPr>
-              <a:t>«Сделайте нам ИИ-помощника для операторов — подсказки по тикетам, поиск похожих обращений»</a:t>
+              <a:t>«Привет, давно хотели это обсудить с командой поддержки. Идея простая: сделать ИИ-помощника для операторов — подсказки ответов на тикеты, поиск похожих обращений в истории, чтобы не рыться каждый раз вручную. У нас на линии 12 операторов, поток около 300 тикетов в день, с явным пиком с 10:00 до 13:00 — после обеда обычно спокойнее. Руководитель поддержки, Света, давно жалуется, что новичков долго вводить в курс — сейчас на это уходит недели три, и это отдельная тема, надо бы отдельно посмотреть на онбординг. Если получится сделать помощника — было бы здорово успеть показать на квартальном ревью, но это не жёсткий дедлайн, скорее ориентир».</a:t>
             </a:r>
           </a:p>
         </p:txBody>
@@ -9648,71 +9616,12 @@
         </p:nvSpPr>
         <p:spPr>
           <a:xfrm>
-            <a:off x="502920" y="2423160"/>
-            <a:ext cx="3931920" cy="3611880"/>
+            <a:off x="502920" y="3410712"/>
+            <a:ext cx="11183112" cy="1005840"/>
           </a:xfrm>
           <a:prstGeom prst="roundRect">
             <a:avLst>
-              <a:gd name="adj" fmla="val 8438"/>
-            </a:avLst>
-          </a:prstGeom>
-          <a:solidFill>
-            <a:srgbClr val="F4F7FA"/>
-          </a:solidFill>
-          <a:ln w="20320">
-            <a:solidFill>
-              <a:srgbClr val="028090"/>
-            </a:solidFill>
-          </a:ln>
-          <a:effectLst/>
-        </p:spPr>
-        <p:txBody>
-          <a:bodyPr rtlCol="0" anchor="ctr"/>
-          <a:lstStyle/>
-          <a:p>
-            <a:pPr algn="ctr"/>
-          </a:p>
-        </p:txBody>
-      </p:sp>
-      <p:pic>
-        <p:nvPicPr>
-          <p:cNvPr id="7" name="Picture 6" descr="s11-support-headset-real.jpg"/>
-          <p:cNvPicPr>
-            <a:picLocks noChangeAspect="1"/>
-          </p:cNvPicPr>
-          <p:nvPr/>
-        </p:nvPicPr>
-        <p:blipFill>
-          <a:blip r:embed="rId3"/>
-          <a:srcRect t="16260" b="16260"/>
-          <a:stretch>
-            <a:fillRect/>
-          </a:stretch>
-        </p:blipFill>
-        <p:spPr>
-          <a:xfrm>
-            <a:off x="612648" y="2532888"/>
-            <a:ext cx="3712463" cy="3392424"/>
-          </a:xfrm>
-          <a:prstGeom prst="rect">
-            <a:avLst/>
-          </a:prstGeom>
-        </p:spPr>
-      </p:pic>
-      <p:sp>
-        <p:nvSpPr>
-          <p:cNvPr id="8" name="Rounded Rectangle 7"/>
-          <p:cNvSpPr/>
-          <p:nvPr/>
-        </p:nvSpPr>
-        <p:spPr>
-          <a:xfrm>
-            <a:off x="4709159" y="2423160"/>
-            <a:ext cx="6976872" cy="1508760"/>
-          </a:xfrm>
-          <a:prstGeom prst="roundRect">
-            <a:avLst>
-              <a:gd name="adj" fmla="val 20202"/>
+              <a:gd name="adj" fmla="val 25000"/>
             </a:avLst>
           </a:prstGeom>
           <a:solidFill>
@@ -9733,16 +9642,40 @@
           </a:p>
         </p:txBody>
       </p:sp>
-      <p:sp>
-        <p:nvSpPr>
-          <p:cNvPr id="9" name="TextBox 8"/>
+      <p:pic>
+        <p:nvPicPr>
+          <p:cNvPr id="7" name="Picture 6" descr="phone-065A82-96.png"/>
+          <p:cNvPicPr>
+            <a:picLocks noChangeAspect="1"/>
+          </p:cNvPicPr>
+          <p:nvPr/>
+        </p:nvPicPr>
+        <p:blipFill>
+          <a:blip r:embed="rId3"/>
+          <a:stretch>
+            <a:fillRect/>
+          </a:stretch>
+        </p:blipFill>
+        <p:spPr>
+          <a:xfrm>
+            <a:off x="822960" y="3616452"/>
+            <a:ext cx="594360" cy="594360"/>
+          </a:xfrm>
+          <a:prstGeom prst="rect">
+            <a:avLst/>
+          </a:prstGeom>
+        </p:spPr>
+      </p:pic>
+      <p:sp>
+        <p:nvSpPr>
+          <p:cNvPr id="8" name="TextBox 7"/>
           <p:cNvSpPr txBox="1"/>
           <p:nvPr/>
         </p:nvSpPr>
         <p:spPr>
           <a:xfrm>
-            <a:off x="4892040" y="2569464"/>
-            <a:ext cx="6611112" cy="1234440"/>
+            <a:off x="1691640" y="3410712"/>
+            <a:ext cx="9692640" cy="1005840"/>
           </a:xfrm>
           <a:prstGeom prst="rect">
             <a:avLst/>
@@ -9774,18 +9707,18 @@
       </p:sp>
       <p:sp>
         <p:nvSpPr>
-          <p:cNvPr id="10" name="Rounded Rectangle 9"/>
+          <p:cNvPr id="9" name="Rounded Rectangle 8"/>
           <p:cNvSpPr/>
           <p:nvPr/>
         </p:nvSpPr>
         <p:spPr>
           <a:xfrm>
-            <a:off x="4709159" y="4206240"/>
-            <a:ext cx="6976872" cy="1828800"/>
+            <a:off x="502920" y="4617720"/>
+            <a:ext cx="11183112" cy="2103120"/>
           </a:xfrm>
           <a:prstGeom prst="roundRect">
             <a:avLst>
-              <a:gd name="adj" fmla="val 16666"/>
+              <a:gd name="adj" fmla="val 14492"/>
             </a:avLst>
           </a:prstGeom>
           <a:solidFill>
@@ -9808,14 +9741,14 @@
       </p:sp>
       <p:sp>
         <p:nvSpPr>
-          <p:cNvPr id="11" name="TextBox 10"/>
+          <p:cNvPr id="10" name="TextBox 9"/>
           <p:cNvSpPr txBox="1"/>
           <p:nvPr/>
         </p:nvSpPr>
         <p:spPr>
           <a:xfrm>
-            <a:off x="4892040" y="4206240"/>
-            <a:ext cx="6611112" cy="1828800"/>
+            <a:off x="777240" y="4617720"/>
+            <a:ext cx="10607040" cy="2103120"/>
           </a:xfrm>
           <a:prstGeom prst="rect">
             <a:avLst/>
@@ -9834,7 +9767,7 @@
               </a:lnSpc>
             </a:pPr>
             <a:r>
-              <a:rPr sz="2400" b="1" i="0">
+              <a:rPr sz="2000" b="1" i="0">
                 <a:solidFill>
                   <a:srgbClr val="21295C"/>
                 </a:solidFill>
@@ -9879,8 +9812,8 @@
         </p:nvSpPr>
         <p:spPr>
           <a:xfrm>
-            <a:off x="502920" y="411480"/>
-            <a:ext cx="11183112" cy="914400"/>
+            <a:off x="502920" y="228600"/>
+            <a:ext cx="11183112" cy="411480"/>
           </a:xfrm>
           <a:prstGeom prst="rect">
             <a:avLst/>
@@ -9899,7 +9832,7 @@
               </a:lnSpc>
             </a:pPr>
             <a:r>
-              <a:rPr sz="2800" b="1" i="0">
+              <a:rPr sz="2600" b="1" i="0">
                 <a:solidFill>
                   <a:srgbClr val="21295C"/>
                 </a:solidFill>
@@ -9912,18 +9845,57 @@
       </p:sp>
       <p:sp>
         <p:nvSpPr>
-          <p:cNvPr id="3" name="Rounded Rectangle 2"/>
+          <p:cNvPr id="3" name="TextBox 2"/>
+          <p:cNvSpPr txBox="1"/>
+          <p:nvPr/>
+        </p:nvSpPr>
+        <p:spPr>
+          <a:xfrm>
+            <a:off x="502920" y="658368"/>
+            <a:ext cx="11183112" cy="256032"/>
+          </a:xfrm>
+          <a:prstGeom prst="rect">
+            <a:avLst/>
+          </a:prstGeom>
+          <a:noFill/>
+        </p:spPr>
+        <p:txBody>
+          <a:bodyPr wrap="square" lIns="0" rIns="0" tIns="0" bIns="0" anchor="t">
+            <a:spAutoFit/>
+          </a:bodyPr>
+          <a:lstStyle/>
+          <a:p>
+            <a:pPr algn="l">
+              <a:lnSpc>
+                <a:spcPct val="115000"/>
+              </a:lnSpc>
+            </a:pPr>
+            <a:r>
+              <a:rPr sz="1250" b="0" i="1">
+                <a:solidFill>
+                  <a:srgbClr val="6B7685"/>
+                </a:solidFill>
+                <a:latin typeface="Arial"/>
+              </a:rPr>
+              <a:t>ИТ-директор</a:t>
+            </a:r>
+          </a:p>
+        </p:txBody>
+      </p:sp>
+      <p:sp>
+        <p:nvSpPr>
+          <p:cNvPr id="4" name="Rounded Rectangle 3"/>
           <p:cNvSpPr/>
           <p:nvPr/>
         </p:nvSpPr>
         <p:spPr>
           <a:xfrm>
-            <a:off x="502920" y="960120"/>
-            <a:ext cx="11183112" cy="1051560"/>
+            <a:off x="502920" y="914400"/>
+            <a:ext cx="11183112" cy="2286000"/>
           </a:xfrm>
           <a:prstGeom prst="roundRect">
             <a:avLst>
-              <a:gd name="adj" fmla="val 25000"/>
+              <a:gd name="adj" fmla="val 13333"/>
             </a:avLst>
           </a:prstGeom>
           <a:solidFill>
@@ -9946,7 +9918,7 @@
       </p:sp>
       <p:pic>
         <p:nvPicPr>
-          <p:cNvPr id="4" name="Picture 3" descr="quote-1C7293-64.png"/>
+          <p:cNvPr id="5" name="Picture 4" descr="quote-1C7293-64.png"/>
           <p:cNvPicPr>
             <a:picLocks noChangeAspect="1"/>
           </p:cNvPicPr>
@@ -9960,7 +9932,7 @@
         </p:blipFill>
         <p:spPr>
           <a:xfrm>
-            <a:off x="722376" y="1133856"/>
+            <a:off x="722376" y="1088136"/>
             <a:ext cx="292608" cy="292608"/>
           </a:xfrm>
           <a:prstGeom prst="rect">
@@ -9970,14 +9942,14 @@
       </p:pic>
       <p:sp>
         <p:nvSpPr>
-          <p:cNvPr id="5" name="TextBox 4"/>
+          <p:cNvPr id="6" name="TextBox 5"/>
           <p:cNvSpPr txBox="1"/>
           <p:nvPr/>
         </p:nvSpPr>
         <p:spPr>
           <a:xfrm>
-            <a:off x="722376" y="1472184"/>
-            <a:ext cx="10287000" cy="320039"/>
+            <a:off x="722376" y="1426464"/>
+            <a:ext cx="10287000" cy="1554480"/>
           </a:xfrm>
           <a:prstGeom prst="rect">
             <a:avLst/>
@@ -9996,26 +9968,26 @@
               </a:lnSpc>
             </a:pPr>
             <a:r>
-              <a:rPr sz="1500" b="0" i="1">
+              <a:rPr sz="1400" b="0" i="1">
                 <a:solidFill>
                   <a:srgbClr val="21295C"/>
                 </a:solidFill>
                 <a:latin typeface="Arial"/>
               </a:rPr>
-              <a:t>«Открытого API нет, кастомизаций нет — вендор и на письма не отвечает»</a:t>
-            </a:r>
-          </a:p>
-        </p:txBody>
-      </p:sp>
-      <p:sp>
-        <p:nvSpPr>
-          <p:cNvPr id="6" name="Rounded Rectangle 5"/>
+              <a:t>«Слышал про идею с помощником для поддержки, хочу сразу обрисовать картину. У нас коробочный helpdesk, открытого API нет, кастомизаций нет — мы писали вендору ещё в марте с вопросом про интеграцию, ответа так и не получили. Систему купили 4 года назад, на ней же висят тикеты от HR и от фасилити-менеджмента, так что трогать её надо аккуратно. Контракт с вендором ещё на 2 года, продлевать раньше срока смысла нет. В следующем квартале, кстати, будем пересматривать весь ландшафт ИТ-систем — но это отдельный процесс, и вас туда пока звать рано».</a:t>
+            </a:r>
+          </a:p>
+        </p:txBody>
+      </p:sp>
+      <p:sp>
+        <p:nvSpPr>
+          <p:cNvPr id="7" name="Rounded Rectangle 6"/>
           <p:cNvSpPr/>
           <p:nvPr/>
         </p:nvSpPr>
         <p:spPr>
           <a:xfrm>
-            <a:off x="11009376" y="1133856"/>
+            <a:off x="11009376" y="1088136"/>
             <a:ext cx="457200" cy="457200"/>
           </a:xfrm>
           <a:prstGeom prst="roundRect">
@@ -10043,7 +10015,7 @@
       </p:sp>
       <p:pic>
         <p:nvPicPr>
-          <p:cNvPr id="7" name="Picture 6" descr="briefcase-028090-64.png"/>
+          <p:cNvPr id="8" name="Picture 7" descr="briefcase-028090-64.png"/>
           <p:cNvPicPr>
             <a:picLocks noChangeAspect="1"/>
           </p:cNvPicPr>
@@ -10057,7 +10029,7 @@
         </p:blipFill>
         <p:spPr>
           <a:xfrm>
-            <a:off x="11091672" y="1216152"/>
+            <a:off x="11091672" y="1170432"/>
             <a:ext cx="292608" cy="292608"/>
           </a:xfrm>
           <a:prstGeom prst="rect">
@@ -10067,18 +10039,115 @@
       </p:pic>
       <p:sp>
         <p:nvSpPr>
-          <p:cNvPr id="8" name="Rounded Rectangle 7"/>
+          <p:cNvPr id="9" name="Rounded Rectangle 8"/>
           <p:cNvSpPr/>
           <p:nvPr/>
         </p:nvSpPr>
         <p:spPr>
           <a:xfrm>
-            <a:off x="502920" y="2240280"/>
-            <a:ext cx="11183112" cy="777240"/>
+            <a:off x="502920" y="3383280"/>
+            <a:ext cx="11183112" cy="1005840"/>
           </a:xfrm>
           <a:prstGeom prst="roundRect">
             <a:avLst>
               <a:gd name="adj" fmla="val 25000"/>
+            </a:avLst>
+          </a:prstGeom>
+          <a:solidFill>
+            <a:srgbClr val="F4F7FA"/>
+          </a:solidFill>
+          <a:ln w="19050">
+            <a:solidFill>
+              <a:srgbClr val="1C7293"/>
+            </a:solidFill>
+          </a:ln>
+          <a:effectLst/>
+        </p:spPr>
+        <p:txBody>
+          <a:bodyPr rtlCol="0" anchor="ctr"/>
+          <a:lstStyle/>
+          <a:p>
+            <a:pPr algn="ctr"/>
+          </a:p>
+        </p:txBody>
+      </p:sp>
+      <p:pic>
+        <p:nvPicPr>
+          <p:cNvPr id="10" name="Picture 9" descr="lock-21295C-96.png"/>
+          <p:cNvPicPr>
+            <a:picLocks noChangeAspect="1"/>
+          </p:cNvPicPr>
+          <p:nvPr/>
+        </p:nvPicPr>
+        <p:blipFill>
+          <a:blip r:embed="rId4"/>
+          <a:stretch>
+            <a:fillRect/>
+          </a:stretch>
+        </p:blipFill>
+        <p:spPr>
+          <a:xfrm>
+            <a:off x="822960" y="3589020"/>
+            <a:ext cx="594360" cy="594360"/>
+          </a:xfrm>
+          <a:prstGeom prst="rect">
+            <a:avLst/>
+          </a:prstGeom>
+        </p:spPr>
+      </p:pic>
+      <p:sp>
+        <p:nvSpPr>
+          <p:cNvPr id="11" name="TextBox 10"/>
+          <p:cNvSpPr txBox="1"/>
+          <p:nvPr/>
+        </p:nvSpPr>
+        <p:spPr>
+          <a:xfrm>
+            <a:off x="1691640" y="3383280"/>
+            <a:ext cx="9692640" cy="1005840"/>
+          </a:xfrm>
+          <a:prstGeom prst="rect">
+            <a:avLst/>
+          </a:prstGeom>
+          <a:noFill/>
+        </p:spPr>
+        <p:txBody>
+          <a:bodyPr wrap="square" lIns="0" rIns="0" tIns="0" bIns="0" anchor="ctr">
+            <a:spAutoFit/>
+          </a:bodyPr>
+          <a:lstStyle/>
+          <a:p>
+            <a:pPr algn="l">
+              <a:lnSpc>
+                <a:spcPct val="130000"/>
+              </a:lnSpc>
+            </a:pPr>
+            <a:r>
+              <a:rPr sz="1550" b="0" i="1">
+                <a:solidFill>
+                  <a:srgbClr val="21295C"/>
+                </a:solidFill>
+                <a:latin typeface="Arial"/>
+              </a:rPr>
+              <a:t>Коробочный helpdesk 4 года без открытого API — контракт с вендором ещё на 2 года</a:t>
+            </a:r>
+          </a:p>
+        </p:txBody>
+      </p:sp>
+      <p:sp>
+        <p:nvSpPr>
+          <p:cNvPr id="12" name="Rounded Rectangle 11"/>
+          <p:cNvSpPr/>
+          <p:nvPr/>
+        </p:nvSpPr>
+        <p:spPr>
+          <a:xfrm>
+            <a:off x="502920" y="4590288"/>
+            <a:ext cx="11183112" cy="2130551"/>
+          </a:xfrm>
+          <a:prstGeom prst="roundRect">
+            <a:avLst>
+              <a:gd name="adj" fmla="val 14306"/>
             </a:avLst>
           </a:prstGeom>
           <a:solidFill>
@@ -10101,14 +10170,14 @@
       </p:sp>
       <p:sp>
         <p:nvSpPr>
-          <p:cNvPr id="9" name="TextBox 8"/>
+          <p:cNvPr id="13" name="TextBox 12"/>
           <p:cNvSpPr txBox="1"/>
           <p:nvPr/>
         </p:nvSpPr>
         <p:spPr>
           <a:xfrm>
-            <a:off x="777240" y="2240280"/>
-            <a:ext cx="10607040" cy="777240"/>
+            <a:off x="777240" y="4590288"/>
+            <a:ext cx="10607040" cy="2130551"/>
           </a:xfrm>
           <a:prstGeom prst="rect">
             <a:avLst/>
@@ -10127,151 +10196,13 @@
               </a:lnSpc>
             </a:pPr>
             <a:r>
-              <a:rPr sz="2400" b="1" i="0">
+              <a:rPr sz="2000" b="1" i="0">
                 <a:solidFill>
                   <a:srgbClr val="21295C"/>
                 </a:solidFill>
                 <a:latin typeface="Arial"/>
               </a:rPr>
               <a:t>Что делаем?</a:t>
-            </a:r>
-          </a:p>
-        </p:txBody>
-      </p:sp>
-      <p:sp>
-        <p:nvSpPr>
-          <p:cNvPr id="10" name="Rounded Rectangle 9"/>
-          <p:cNvSpPr/>
-          <p:nvPr/>
-        </p:nvSpPr>
-        <p:spPr>
-          <a:xfrm>
-            <a:off x="502920" y="3246120"/>
-            <a:ext cx="11183112" cy="3108960"/>
-          </a:xfrm>
-          <a:prstGeom prst="roundRect">
-            <a:avLst>
-              <a:gd name="adj" fmla="val 9803"/>
-            </a:avLst>
-          </a:prstGeom>
-          <a:solidFill>
-            <a:srgbClr val="F4F7FA"/>
-          </a:solidFill>
-          <a:ln w="19050">
-            <a:solidFill>
-              <a:srgbClr val="1C7293"/>
-            </a:solidFill>
-          </a:ln>
-          <a:effectLst/>
-        </p:spPr>
-        <p:txBody>
-          <a:bodyPr rtlCol="0" anchor="ctr"/>
-          <a:lstStyle/>
-          <a:p>
-            <a:pPr algn="ctr"/>
-          </a:p>
-        </p:txBody>
-      </p:sp>
-      <p:pic>
-        <p:nvPicPr>
-          <p:cNvPr id="11" name="Picture 10" descr="lock-21295C-96.png"/>
-          <p:cNvPicPr>
-            <a:picLocks noChangeAspect="1"/>
-          </p:cNvPicPr>
-          <p:nvPr/>
-        </p:nvPicPr>
-        <p:blipFill>
-          <a:blip r:embed="rId4"/>
-          <a:stretch>
-            <a:fillRect/>
-          </a:stretch>
-        </p:blipFill>
-        <p:spPr>
-          <a:xfrm>
-            <a:off x="777240" y="3566160"/>
-            <a:ext cx="777240" cy="777240"/>
-          </a:xfrm>
-          <a:prstGeom prst="rect">
-            <a:avLst/>
-          </a:prstGeom>
-        </p:spPr>
-      </p:pic>
-      <p:sp>
-        <p:nvSpPr>
-          <p:cNvPr id="12" name="TextBox 11"/>
-          <p:cNvSpPr txBox="1"/>
-          <p:nvPr/>
-        </p:nvSpPr>
-        <p:spPr>
-          <a:xfrm>
-            <a:off x="1783080" y="3566160"/>
-            <a:ext cx="9509760" cy="2560320"/>
-          </a:xfrm>
-          <a:prstGeom prst="rect">
-            <a:avLst/>
-          </a:prstGeom>
-          <a:noFill/>
-        </p:spPr>
-        <p:txBody>
-          <a:bodyPr wrap="square" lIns="0" rIns="0" tIns="0" bIns="0" anchor="t">
-            <a:spAutoFit/>
-          </a:bodyPr>
-          <a:lstStyle/>
-          <a:p>
-            <a:pPr algn="l">
-              <a:lnSpc>
-                <a:spcPct val="128000"/>
-              </a:lnSpc>
-              <a:spcAft>
-                <a:spcPts val="1200"/>
-              </a:spcAft>
-            </a:pPr>
-            <a:r>
-              <a:rPr sz="2000" b="1" i="0">
-                <a:solidFill>
-                  <a:srgbClr val="21295C"/>
-                </a:solidFill>
-                <a:latin typeface="Arial"/>
-              </a:rPr>
-              <a:t>Коробочный helpdesk — систему купили 4 года назад</a:t>
-            </a:r>
-          </a:p>
-          <a:p>
-            <a:pPr algn="l">
-              <a:lnSpc>
-                <a:spcPct val="135000"/>
-              </a:lnSpc>
-              <a:spcAft>
-                <a:spcPts val="1200"/>
-              </a:spcAft>
-            </a:pPr>
-            <a:r>
-              <a:rPr sz="1500" b="0" i="0">
-                <a:solidFill>
-                  <a:srgbClr val="6B7685"/>
-                </a:solidFill>
-                <a:latin typeface="Arial"/>
-              </a:rPr>
-              <a:t>На ней же тикеты HR и фасилити, контракт с вендором ещё на 2 года — нет открытого API, нет кастомизаций, вендор не отвечает даже на письма</a:t>
-            </a:r>
-          </a:p>
-          <a:p>
-            <a:pPr algn="l">
-              <a:lnSpc>
-                <a:spcPct val="130000"/>
-              </a:lnSpc>
-              <a:spcAft>
-                <a:spcPts val="0"/>
-              </a:spcAft>
-            </a:pPr>
-            <a:r>
-              <a:rPr sz="1300" b="0" i="1">
-                <a:solidFill>
-                  <a:srgbClr val="6B7685"/>
-                </a:solidFill>
-                <a:latin typeface="Arial"/>
-              </a:rPr>
-              <a:t>Компания написала вендору с вопросом об интеграции — ответа так и не получила</a:t>
             </a:r>
           </a:p>
         </p:txBody>
@@ -11075,8 +11006,8 @@
         </p:nvSpPr>
         <p:spPr>
           <a:xfrm>
-            <a:off x="502920" y="411480"/>
-            <a:ext cx="11183112" cy="914400"/>
+            <a:off x="502920" y="228600"/>
+            <a:ext cx="11183112" cy="411480"/>
           </a:xfrm>
           <a:prstGeom prst="rect">
             <a:avLst/>
@@ -11095,7 +11026,7 @@
               </a:lnSpc>
             </a:pPr>
             <a:r>
-              <a:rPr sz="2800" b="1" i="0">
+              <a:rPr sz="2600" b="1" i="0">
                 <a:solidFill>
                   <a:srgbClr val="21295C"/>
                 </a:solidFill>
@@ -11114,12 +11045,12 @@
         </p:nvSpPr>
         <p:spPr>
           <a:xfrm>
-            <a:off x="502920" y="1051560"/>
-            <a:ext cx="11183112" cy="1005840"/>
+            <a:off x="502920" y="713232"/>
+            <a:ext cx="11183112" cy="2606040"/>
           </a:xfrm>
           <a:prstGeom prst="roundRect">
             <a:avLst>
-              <a:gd name="adj" fmla="val 25000"/>
+              <a:gd name="adj" fmla="val 11695"/>
             </a:avLst>
           </a:prstGeom>
           <a:solidFill>
@@ -11156,7 +11087,7 @@
         </p:blipFill>
         <p:spPr>
           <a:xfrm>
-            <a:off x="722376" y="1225295"/>
+            <a:off x="722376" y="886968"/>
             <a:ext cx="292608" cy="292608"/>
           </a:xfrm>
           <a:prstGeom prst="rect">
@@ -11172,8 +11103,8 @@
         </p:nvSpPr>
         <p:spPr>
           <a:xfrm>
-            <a:off x="722376" y="1563624"/>
-            <a:ext cx="10744200" cy="274320"/>
+            <a:off x="722376" y="1225296"/>
+            <a:ext cx="10744200" cy="1874520"/>
           </a:xfrm>
           <a:prstGeom prst="rect">
             <a:avLst/>
@@ -11192,13 +11123,13 @@
               </a:lnSpc>
             </a:pPr>
             <a:r>
-              <a:rPr sz="1650" b="0" i="1">
+              <a:rPr sz="1350" b="0" i="1">
                 <a:solidFill>
                   <a:srgbClr val="21295C"/>
                 </a:solidFill>
                 <a:latin typeface="Arial"/>
               </a:rPr>
-              <a:t>«Маркетинг просит отдельный ИИ-сервис для генерации описаний товаров»</a:t>
+              <a:t>«Ребята, у нас на прошлой неделе руководитель был на конференции ритейла, увидел там у одного из конкурентов классный сервис для генерации описаний товаров — с виду прямо как отдельное приложение, зашёл, вбил характеристики, получил готовый текст под карточку. Хочет, чтобы у нас было что-то похожее, желательно к концу месяца, у нас как раз намечается демо для инвесторов. Каталог большой — около 12 000 товарных позиций, сейчас описания пишет один копирайтер на аутсорсе, по мере поступления новых товаров, и она, кстати, уже жаловалась, что не успевает и просила доплату за срочность. Ах да, отдельно нужно бы ещё обновить баннеры на главной странице сайта, но это к другому разговору».</a:t>
             </a:r>
           </a:p>
         </p:txBody>
@@ -11211,12 +11142,12 @@
         </p:nvSpPr>
         <p:spPr>
           <a:xfrm>
-            <a:off x="502920" y="2331720"/>
-            <a:ext cx="11183112" cy="2606040"/>
+            <a:off x="502920" y="3483864"/>
+            <a:ext cx="11183112" cy="960120"/>
           </a:xfrm>
           <a:prstGeom prst="roundRect">
             <a:avLst>
-              <a:gd name="adj" fmla="val 11695"/>
+              <a:gd name="adj" fmla="val 25000"/>
             </a:avLst>
           </a:prstGeom>
           <a:solidFill>
@@ -11253,72 +11184,24 @@
         </p:blipFill>
         <p:spPr>
           <a:xfrm>
-            <a:off x="868680" y="3131820"/>
-            <a:ext cx="1005840" cy="1005840"/>
+            <a:off x="822960" y="3666744"/>
+            <a:ext cx="594360" cy="594360"/>
           </a:xfrm>
           <a:prstGeom prst="rect">
             <a:avLst/>
           </a:prstGeom>
         </p:spPr>
       </p:pic>
-      <p:pic>
-        <p:nvPicPr>
-          <p:cNvPr id="8" name="Picture 7" descr="arrow-right-F0AB00-64.png"/>
-          <p:cNvPicPr>
-            <a:picLocks noChangeAspect="1"/>
-          </p:cNvPicPr>
-          <p:nvPr/>
-        </p:nvPicPr>
-        <p:blipFill>
-          <a:blip r:embed="rId4"/>
-          <a:stretch>
-            <a:fillRect/>
-          </a:stretch>
-        </p:blipFill>
-        <p:spPr>
-          <a:xfrm>
-            <a:off x="2148840" y="3360420"/>
-            <a:ext cx="548640" cy="548640"/>
-          </a:xfrm>
-          <a:prstGeom prst="rect">
-            <a:avLst/>
-          </a:prstGeom>
-        </p:spPr>
-      </p:pic>
-      <p:pic>
-        <p:nvPicPr>
-          <p:cNvPr id="9" name="Picture 8" descr="sparkles-065A82-96.png"/>
-          <p:cNvPicPr>
-            <a:picLocks noChangeAspect="1"/>
-          </p:cNvPicPr>
-          <p:nvPr/>
-        </p:nvPicPr>
-        <p:blipFill>
-          <a:blip r:embed="rId5"/>
-          <a:stretch>
-            <a:fillRect/>
-          </a:stretch>
-        </p:blipFill>
-        <p:spPr>
-          <a:xfrm>
-            <a:off x="2971800" y="3131820"/>
-            <a:ext cx="1005840" cy="1005840"/>
-          </a:xfrm>
-          <a:prstGeom prst="rect">
-            <a:avLst/>
-          </a:prstGeom>
-        </p:spPr>
-      </p:pic>
-      <p:sp>
-        <p:nvSpPr>
-          <p:cNvPr id="10" name="TextBox 9"/>
+      <p:sp>
+        <p:nvSpPr>
+          <p:cNvPr id="8" name="TextBox 7"/>
           <p:cNvSpPr txBox="1"/>
           <p:nvPr/>
         </p:nvSpPr>
         <p:spPr>
           <a:xfrm>
-            <a:off x="4297680" y="2903220"/>
-            <a:ext cx="6492240" cy="1463040"/>
+            <a:off x="1645920" y="3483864"/>
+            <a:ext cx="9692640" cy="960120"/>
           </a:xfrm>
           <a:prstGeom prst="rect">
             <a:avLst/>
@@ -11326,21 +11209,18 @@
           <a:noFill/>
         </p:spPr>
         <p:txBody>
-          <a:bodyPr wrap="square" lIns="0" rIns="0" tIns="0" bIns="0" anchor="t">
+          <a:bodyPr wrap="square" lIns="0" rIns="0" tIns="0" bIns="0" anchor="ctr">
             <a:spAutoFit/>
           </a:bodyPr>
           <a:lstStyle/>
           <a:p>
             <a:pPr algn="l">
               <a:lnSpc>
-                <a:spcPct val="130000"/>
+                <a:spcPct val="125000"/>
               </a:lnSpc>
-              <a:spcAft>
-                <a:spcPts val="1000"/>
-              </a:spcAft>
             </a:pPr>
             <a:r>
-              <a:rPr sz="1650" b="1" i="0">
+              <a:rPr sz="1450" b="0" i="1">
                 <a:solidFill>
                   <a:srgbClr val="21295C"/>
                 </a:solidFill>
@@ -11349,41 +11229,22 @@
               <a:t>12 000 товарных позиций, сейчас описания пишет один копирайтер на аутсорсе</a:t>
             </a:r>
           </a:p>
-          <a:p>
-            <a:pPr algn="l">
-              <a:lnSpc>
-                <a:spcPct val="130000"/>
-              </a:lnSpc>
-              <a:spcAft>
-                <a:spcPts val="0"/>
-              </a:spcAft>
-            </a:pPr>
-            <a:r>
-              <a:rPr sz="1400" b="0" i="0">
-                <a:solidFill>
-                  <a:srgbClr val="6B7685"/>
-                </a:solidFill>
-                <a:latin typeface="Arial"/>
-              </a:rPr>
-              <a:t>Новый отдельный инструмент: логин, вкладка, форма ввода характеристик товара</a:t>
-            </a:r>
-          </a:p>
-        </p:txBody>
-      </p:sp>
-      <p:sp>
-        <p:nvSpPr>
-          <p:cNvPr id="11" name="Rounded Rectangle 10"/>
+        </p:txBody>
+      </p:sp>
+      <p:sp>
+        <p:nvSpPr>
+          <p:cNvPr id="9" name="Rounded Rectangle 8"/>
           <p:cNvSpPr/>
           <p:nvPr/>
         </p:nvSpPr>
         <p:spPr>
           <a:xfrm>
-            <a:off x="502920" y="5212080"/>
-            <a:ext cx="11183112" cy="1325880"/>
+            <a:off x="502920" y="4626864"/>
+            <a:ext cx="11183112" cy="2093975"/>
           </a:xfrm>
           <a:prstGeom prst="roundRect">
             <a:avLst>
-              <a:gd name="adj" fmla="val 22988"/>
+              <a:gd name="adj" fmla="val 14556"/>
             </a:avLst>
           </a:prstGeom>
           <a:solidFill>
@@ -11406,14 +11267,14 @@
       </p:sp>
       <p:sp>
         <p:nvSpPr>
-          <p:cNvPr id="12" name="TextBox 11"/>
+          <p:cNvPr id="10" name="TextBox 9"/>
           <p:cNvSpPr txBox="1"/>
           <p:nvPr/>
         </p:nvSpPr>
         <p:spPr>
           <a:xfrm>
-            <a:off x="777240" y="5212080"/>
-            <a:ext cx="10607040" cy="1325880"/>
+            <a:off x="777240" y="4626864"/>
+            <a:ext cx="10607040" cy="2093975"/>
           </a:xfrm>
           <a:prstGeom prst="rect">
             <a:avLst/>
@@ -11432,7 +11293,7 @@
               </a:lnSpc>
             </a:pPr>
             <a:r>
-              <a:rPr sz="2200" b="1" i="0">
+              <a:rPr sz="2000" b="1" i="0">
                 <a:solidFill>
                   <a:srgbClr val="21295C"/>
                 </a:solidFill>
@@ -16605,8 +16466,8 @@
         </p:nvSpPr>
         <p:spPr>
           <a:xfrm>
-            <a:off x="502920" y="411480"/>
-            <a:ext cx="11183112" cy="914400"/>
+            <a:off x="502920" y="228600"/>
+            <a:ext cx="11183112" cy="411480"/>
           </a:xfrm>
           <a:prstGeom prst="rect">
             <a:avLst/>
@@ -16625,7 +16486,7 @@
               </a:lnSpc>
             </a:pPr>
             <a:r>
-              <a:rPr sz="2800" b="1" i="0">
+              <a:rPr sz="2600" b="1" i="0">
                 <a:solidFill>
                   <a:srgbClr val="21295C"/>
                 </a:solidFill>
@@ -16644,12 +16505,12 @@
         </p:nvSpPr>
         <p:spPr>
           <a:xfrm>
-            <a:off x="502920" y="1005840"/>
-            <a:ext cx="11183112" cy="1097280"/>
+            <a:off x="502920" y="713232"/>
+            <a:ext cx="11183112" cy="1828800"/>
           </a:xfrm>
           <a:prstGeom prst="roundRect">
             <a:avLst>
-              <a:gd name="adj" fmla="val 25000"/>
+              <a:gd name="adj" fmla="val 16666"/>
             </a:avLst>
           </a:prstGeom>
           <a:solidFill>
@@ -16686,7 +16547,7 @@
         </p:blipFill>
         <p:spPr>
           <a:xfrm>
-            <a:off x="722376" y="1179576"/>
+            <a:off x="722376" y="886968"/>
             <a:ext cx="292608" cy="292608"/>
           </a:xfrm>
           <a:prstGeom prst="rect">
@@ -16702,8 +16563,8 @@
         </p:nvSpPr>
         <p:spPr>
           <a:xfrm>
-            <a:off x="722376" y="1517904"/>
-            <a:ext cx="10744200" cy="365759"/>
+            <a:off x="722376" y="1225296"/>
+            <a:ext cx="10744200" cy="1097280"/>
           </a:xfrm>
           <a:prstGeom prst="rect">
             <a:avLst/>
@@ -16722,13 +16583,13 @@
               </a:lnSpc>
             </a:pPr>
             <a:r>
-              <a:rPr sz="1500" b="0" i="1">
+              <a:rPr sz="1450" b="0" i="1">
                 <a:solidFill>
                   <a:srgbClr val="21295C"/>
                 </a:solidFill>
                 <a:latin typeface="Arial"/>
               </a:rPr>
-              <a:t>«После каждого созвона транскрипт приходит письмом, нужен протокол: решения, поручения, сроки»</a:t>
+              <a:t>«Коллеги, у нас после каждого созвона Zoom кладёт транскрипт в письмо — я их складываю в папку, но руки не доходят. Протокол по-прежнему пишет Настя-проджект руками, минут по 30-40, а у неё и так спринт-отчёты и онбординг двух новых. Встреч штук 15 в неделю, часть на английском с подрядчиком. Можно из транскрипта автоматом делать протокол — решения, поручения, сроки? В идеале до конца квартала, у нас аудит процессов».</a:t>
             </a:r>
           </a:p>
         </p:txBody>
@@ -16741,12 +16602,12 @@
         </p:nvSpPr>
         <p:spPr>
           <a:xfrm>
-            <a:off x="502920" y="2331720"/>
-            <a:ext cx="6309360" cy="4206240"/>
+            <a:off x="502920" y="2724912"/>
+            <a:ext cx="3931920" cy="3520440"/>
           </a:xfrm>
           <a:prstGeom prst="roundRect">
             <a:avLst>
-              <a:gd name="adj" fmla="val 7246"/>
+              <a:gd name="adj" fmla="val 8658"/>
             </a:avLst>
           </a:prstGeom>
           <a:solidFill>
@@ -16777,15 +16638,15 @@
         </p:nvPicPr>
         <p:blipFill>
           <a:blip r:embed="rId3"/>
-          <a:srcRect t="945" b="945"/>
+          <a:srcRect l="12477" r="12477"/>
           <a:stretch>
             <a:fillRect/>
           </a:stretch>
         </p:blipFill>
         <p:spPr>
           <a:xfrm>
-            <a:off x="612648" y="2441448"/>
-            <a:ext cx="6089904" cy="3986783"/>
+            <a:off x="612648" y="2834640"/>
+            <a:ext cx="3712463" cy="3300984"/>
           </a:xfrm>
           <a:prstGeom prst="rect">
             <a:avLst/>
@@ -16800,12 +16661,12 @@
         </p:nvSpPr>
         <p:spPr>
           <a:xfrm>
-            <a:off x="7086600" y="2331720"/>
-            <a:ext cx="4599432" cy="2331720"/>
+            <a:off x="4709159" y="2724912"/>
+            <a:ext cx="6976872" cy="1600200"/>
           </a:xfrm>
           <a:prstGeom prst="roundRect">
             <a:avLst>
-              <a:gd name="adj" fmla="val 13071"/>
+              <a:gd name="adj" fmla="val 19047"/>
             </a:avLst>
           </a:prstGeom>
           <a:solidFill>
@@ -16834,8 +16695,8 @@
         </p:nvSpPr>
         <p:spPr>
           <a:xfrm>
-            <a:off x="7269480" y="2496312"/>
-            <a:ext cx="4233672" cy="2002536"/>
+            <a:off x="4892040" y="2871216"/>
+            <a:ext cx="6611112" cy="1307592"/>
           </a:xfrm>
           <a:prstGeom prst="rect">
             <a:avLst/>
@@ -16854,7 +16715,7 @@
               </a:lnSpc>
             </a:pPr>
             <a:r>
-              <a:rPr sz="1550" b="0" i="1">
+              <a:rPr sz="1500" b="0" i="1">
                 <a:solidFill>
                   <a:srgbClr val="21295C"/>
                 </a:solidFill>
@@ -16873,12 +16734,12 @@
         </p:nvSpPr>
         <p:spPr>
           <a:xfrm>
-            <a:off x="7086600" y="4937760"/>
-            <a:ext cx="4599432" cy="1600199"/>
+            <a:off x="4709159" y="4599432"/>
+            <a:ext cx="6976872" cy="1645920"/>
           </a:xfrm>
           <a:prstGeom prst="roundRect">
             <a:avLst>
-              <a:gd name="adj" fmla="val 19047"/>
+              <a:gd name="adj" fmla="val 18518"/>
             </a:avLst>
           </a:prstGeom>
           <a:solidFill>
@@ -16907,8 +16768,8 @@
         </p:nvSpPr>
         <p:spPr>
           <a:xfrm>
-            <a:off x="7269480" y="4937760"/>
-            <a:ext cx="4233672" cy="1600199"/>
+            <a:off x="4892040" y="4599432"/>
+            <a:ext cx="6611112" cy="1645920"/>
           </a:xfrm>
           <a:prstGeom prst="rect">
             <a:avLst/>
@@ -16927,7 +16788,7 @@
               </a:lnSpc>
             </a:pPr>
             <a:r>
-              <a:rPr sz="2000" b="1" i="0">
+              <a:rPr sz="1900" b="1" i="0">
                 <a:solidFill>
                   <a:srgbClr val="21295C"/>
                 </a:solidFill>
@@ -17592,8 +17453,8 @@
         </p:nvSpPr>
         <p:spPr>
           <a:xfrm>
-            <a:off x="502920" y="411480"/>
-            <a:ext cx="11183112" cy="914400"/>
+            <a:off x="502920" y="228600"/>
+            <a:ext cx="11183112" cy="411480"/>
           </a:xfrm>
           <a:prstGeom prst="rect">
             <a:avLst/>
@@ -17612,7 +17473,7 @@
               </a:lnSpc>
             </a:pPr>
             <a:r>
-              <a:rPr sz="2800" b="1" i="0">
+              <a:rPr sz="2600" b="1" i="0">
                 <a:solidFill>
                   <a:srgbClr val="21295C"/>
                 </a:solidFill>
@@ -17631,12 +17492,12 @@
         </p:nvSpPr>
         <p:spPr>
           <a:xfrm>
-            <a:off x="502920" y="1051560"/>
-            <a:ext cx="11183112" cy="1097280"/>
+            <a:off x="502920" y="713232"/>
+            <a:ext cx="11183112" cy="2377440"/>
           </a:xfrm>
           <a:prstGeom prst="roundRect">
             <a:avLst>
-              <a:gd name="adj" fmla="val 25000"/>
+              <a:gd name="adj" fmla="val 12820"/>
             </a:avLst>
           </a:prstGeom>
           <a:solidFill>
@@ -17673,7 +17534,7 @@
         </p:blipFill>
         <p:spPr>
           <a:xfrm>
-            <a:off x="722376" y="1225295"/>
+            <a:off x="722376" y="886968"/>
             <a:ext cx="292608" cy="292608"/>
           </a:xfrm>
           <a:prstGeom prst="rect">
@@ -17689,8 +17550,8 @@
         </p:nvSpPr>
         <p:spPr>
           <a:xfrm>
-            <a:off x="722376" y="1563624"/>
-            <a:ext cx="10744200" cy="365759"/>
+            <a:off x="722376" y="1225296"/>
+            <a:ext cx="10744200" cy="1645920"/>
           </a:xfrm>
           <a:prstGeom prst="rect">
             <a:avLst/>
@@ -17709,13 +17570,13 @@
               </a:lnSpc>
             </a:pPr>
             <a:r>
-              <a:rPr sz="1550" b="0" i="1">
+              <a:rPr sz="1400" b="0" i="1">
                 <a:solidFill>
                   <a:srgbClr val="21295C"/>
                 </a:solidFill>
                 <a:latin typeface="Arial"/>
               </a:rPr>
-              <a:t>«На планёрке спросили: что мы решали по подрядчику X в мае?»</a:t>
+              <a:t>«Народ, было на планёрке сегодня — уже неловко даже пересказывать. Обсуждали бюджет на следующий квартал, и тут кто-то из финансов спрашивает: „А что мы вообще решали по подрядчику X ещё в мае, у нас там были какие-то договорённости про скидку?“ И повисла пауза — никто с ходу не вспомнил, в каком это было протоколе. Протоколы у нас копятся в общей папке на диске, названы более-менее по датам, но искать по ним руками — то ещё удовольствие, особенно если помнишь только примерную тему, а не точную дату созвона. Кстати, по ходу дела там же обсуждали ещё отпускной график на лето, но это уже другая история, не по делу».</a:t>
             </a:r>
           </a:p>
         </p:txBody>
@@ -17728,12 +17589,12 @@
         </p:nvSpPr>
         <p:spPr>
           <a:xfrm>
-            <a:off x="502920" y="2514600"/>
-            <a:ext cx="11183112" cy="1417320"/>
+            <a:off x="502920" y="3273552"/>
+            <a:ext cx="11183112" cy="1005840"/>
           </a:xfrm>
           <a:prstGeom prst="roundRect">
             <a:avLst>
-              <a:gd name="adj" fmla="val 21505"/>
+              <a:gd name="adj" fmla="val 25000"/>
             </a:avLst>
           </a:prstGeom>
           <a:solidFill>
@@ -17770,8 +17631,8 @@
         </p:blipFill>
         <p:spPr>
           <a:xfrm>
-            <a:off x="868680" y="2811780"/>
-            <a:ext cx="822960" cy="822960"/>
+            <a:off x="822960" y="3479292"/>
+            <a:ext cx="594360" cy="594360"/>
           </a:xfrm>
           <a:prstGeom prst="rect">
             <a:avLst/>
@@ -17786,8 +17647,8 @@
         </p:nvSpPr>
         <p:spPr>
           <a:xfrm>
-            <a:off x="1965960" y="2514600"/>
-            <a:ext cx="9326880" cy="1417320"/>
+            <a:off x="1691640" y="3273552"/>
+            <a:ext cx="9692640" cy="1005840"/>
           </a:xfrm>
           <a:prstGeom prst="rect">
             <a:avLst/>
@@ -17806,7 +17667,7 @@
               </a:lnSpc>
             </a:pPr>
             <a:r>
-              <a:rPr sz="1600" b="0" i="1">
+              <a:rPr sz="1500" b="0" i="1">
                 <a:solidFill>
                   <a:srgbClr val="21295C"/>
                 </a:solidFill>
@@ -17825,12 +17686,12 @@
         </p:nvSpPr>
         <p:spPr>
           <a:xfrm>
-            <a:off x="502920" y="4206240"/>
-            <a:ext cx="11183112" cy="1051560"/>
+            <a:off x="502920" y="4462272"/>
+            <a:ext cx="11183112" cy="2258568"/>
           </a:xfrm>
           <a:prstGeom prst="roundRect">
             <a:avLst>
-              <a:gd name="adj" fmla="val 25000"/>
+              <a:gd name="adj" fmla="val 13495"/>
             </a:avLst>
           </a:prstGeom>
           <a:solidFill>
@@ -17859,8 +17720,8 @@
         </p:nvSpPr>
         <p:spPr>
           <a:xfrm>
-            <a:off x="777240" y="4206240"/>
-            <a:ext cx="10607040" cy="1051560"/>
+            <a:off x="777240" y="4462272"/>
+            <a:ext cx="10607040" cy="2258568"/>
           </a:xfrm>
           <a:prstGeom prst="rect">
             <a:avLst/>
@@ -17879,7 +17740,7 @@
               </a:lnSpc>
             </a:pPr>
             <a:r>
-              <a:rPr sz="2400" b="1" i="0">
+              <a:rPr sz="2000" b="1" i="0">
                 <a:solidFill>
                   <a:srgbClr val="21295C"/>
                 </a:solidFill>
@@ -19057,8 +18918,8 @@
         </p:nvSpPr>
         <p:spPr>
           <a:xfrm>
-            <a:off x="502920" y="411480"/>
-            <a:ext cx="11183112" cy="914400"/>
+            <a:off x="502920" y="228600"/>
+            <a:ext cx="11183112" cy="411480"/>
           </a:xfrm>
           <a:prstGeom prst="rect">
             <a:avLst/>
@@ -19077,7 +18938,7 @@
               </a:lnSpc>
             </a:pPr>
             <a:r>
-              <a:rPr sz="2800" b="1" i="0">
+              <a:rPr sz="2600" b="1" i="0">
                 <a:solidFill>
                   <a:srgbClr val="21295C"/>
                 </a:solidFill>
@@ -19096,12 +18957,12 @@
         </p:nvSpPr>
         <p:spPr>
           <a:xfrm>
-            <a:off x="502920" y="1051560"/>
-            <a:ext cx="11183112" cy="1097280"/>
+            <a:off x="502920" y="713232"/>
+            <a:ext cx="11183112" cy="2514600"/>
           </a:xfrm>
           <a:prstGeom prst="roundRect">
             <a:avLst>
-              <a:gd name="adj" fmla="val 25000"/>
+              <a:gd name="adj" fmla="val 12121"/>
             </a:avLst>
           </a:prstGeom>
           <a:solidFill>
@@ -19138,7 +18999,7 @@
         </p:blipFill>
         <p:spPr>
           <a:xfrm>
-            <a:off x="722376" y="1225295"/>
+            <a:off x="722376" y="886968"/>
             <a:ext cx="292608" cy="292608"/>
           </a:xfrm>
           <a:prstGeom prst="rect">
@@ -19154,8 +19015,8 @@
         </p:nvSpPr>
         <p:spPr>
           <a:xfrm>
-            <a:off x="722376" y="1563624"/>
-            <a:ext cx="10744200" cy="365759"/>
+            <a:off x="722376" y="1225296"/>
+            <a:ext cx="10744200" cy="1783080"/>
           </a:xfrm>
           <a:prstGeom prst="rect">
             <a:avLst/>
@@ -19174,13 +19035,13 @@
               </a:lnSpc>
             </a:pPr>
             <a:r>
-              <a:rPr sz="1550" b="0" i="1">
+              <a:rPr sz="1400" b="0" i="1">
                 <a:solidFill>
                   <a:srgbClr val="21295C"/>
                 </a:solidFill>
                 <a:latin typeface="Arial"/>
               </a:rPr>
-              <a:t>«Поручения из протоколов мы всё равно руками переносим в таск-трекер...»</a:t>
+              <a:t>«Слушайте, спасибо большое за поиск по протоколам, реально экономит время, особенно перед ретро. Но вот что заметила: поручения из протоколов мы всё равно руками переносим в таск-трекер — открываем протокол, читаем, что там нашла система, и одно за другим заводим карточки, проставляем исполнителя и срок. Причём я специально прошлась по майским протоколам вчера вечером, и получилось, что примерно половина поручений так и висит без исполнителя — просто руки не дошли перенести. Отдельно ещё хотела спросить, можно ли поменять цвет тегов в самом таск-трекере, а то команда путается в приоритетах, но это, наверное, вопрос не к вам, а к админу инструмента».</a:t>
             </a:r>
           </a:p>
         </p:txBody>
@@ -19193,12 +19054,12 @@
         </p:nvSpPr>
         <p:spPr>
           <a:xfrm>
-            <a:off x="502920" y="2423160"/>
-            <a:ext cx="11183112" cy="1280160"/>
+            <a:off x="502920" y="3392424"/>
+            <a:ext cx="11183112" cy="1005840"/>
           </a:xfrm>
           <a:prstGeom prst="roundRect">
             <a:avLst>
-              <a:gd name="adj" fmla="val 23809"/>
+              <a:gd name="adj" fmla="val 25000"/>
             </a:avLst>
           </a:prstGeom>
           <a:solidFill>
@@ -19235,8 +19096,8 @@
         </p:blipFill>
         <p:spPr>
           <a:xfrm>
-            <a:off x="868680" y="2743200"/>
-            <a:ext cx="640080" cy="640080"/>
+            <a:off x="822960" y="3598164"/>
+            <a:ext cx="594360" cy="594360"/>
           </a:xfrm>
           <a:prstGeom prst="rect">
             <a:avLst/>
@@ -19251,8 +19112,8 @@
         </p:nvSpPr>
         <p:spPr>
           <a:xfrm>
-            <a:off x="1828800" y="2423160"/>
-            <a:ext cx="9418320" cy="1280160"/>
+            <a:off x="1691640" y="3392424"/>
+            <a:ext cx="9692640" cy="1005840"/>
           </a:xfrm>
           <a:prstGeom prst="rect">
             <a:avLst/>
@@ -19267,11 +19128,11 @@
           <a:p>
             <a:pPr algn="l">
               <a:lnSpc>
-                <a:spcPct val="128000"/>
+                <a:spcPct val="125000"/>
               </a:lnSpc>
             </a:pPr>
             <a:r>
-              <a:rPr sz="1450" b="0" i="1">
+              <a:rPr sz="1400" b="0" i="1">
                 <a:solidFill>
                   <a:srgbClr val="21295C"/>
                 </a:solidFill>
@@ -19290,12 +19151,12 @@
         </p:nvSpPr>
         <p:spPr>
           <a:xfrm>
-            <a:off x="502920" y="3977639"/>
-            <a:ext cx="11183112" cy="777240"/>
+            <a:off x="502920" y="4581144"/>
+            <a:ext cx="11183112" cy="2139695"/>
           </a:xfrm>
           <a:prstGeom prst="roundRect">
             <a:avLst>
-              <a:gd name="adj" fmla="val 25000"/>
+              <a:gd name="adj" fmla="val 14245"/>
             </a:avLst>
           </a:prstGeom>
           <a:solidFill>
@@ -19324,8 +19185,8 @@
         </p:nvSpPr>
         <p:spPr>
           <a:xfrm>
-            <a:off x="777240" y="3977639"/>
-            <a:ext cx="10607040" cy="777240"/>
+            <a:off x="777240" y="4581144"/>
+            <a:ext cx="10607040" cy="2139695"/>
           </a:xfrm>
           <a:prstGeom prst="rect">
             <a:avLst/>
@@ -19344,7 +19205,7 @@
               </a:lnSpc>
             </a:pPr>
             <a:r>
-              <a:rPr sz="2200" b="1" i="0">
+              <a:rPr sz="1900" b="1" i="0">
                 <a:solidFill>
                   <a:srgbClr val="21295C"/>
                 </a:solidFill>
@@ -21035,8 +20896,8 @@
         </p:nvSpPr>
         <p:spPr>
           <a:xfrm>
-            <a:off x="502920" y="411480"/>
-            <a:ext cx="11183112" cy="914400"/>
+            <a:off x="502920" y="228600"/>
+            <a:ext cx="11183112" cy="411480"/>
           </a:xfrm>
           <a:prstGeom prst="rect">
             <a:avLst/>
@@ -21055,7 +20916,7 @@
               </a:lnSpc>
             </a:pPr>
             <a:r>
-              <a:rPr sz="2700" b="1" i="0">
+              <a:rPr sz="2500" b="1" i="0">
                 <a:solidFill>
                   <a:srgbClr val="21295C"/>
                 </a:solidFill>
@@ -21074,12 +20935,12 @@
         </p:nvSpPr>
         <p:spPr>
           <a:xfrm>
-            <a:off x="502920" y="1051560"/>
-            <a:ext cx="11183112" cy="960120"/>
+            <a:off x="502920" y="685800"/>
+            <a:ext cx="11183112" cy="2468880"/>
           </a:xfrm>
           <a:prstGeom prst="roundRect">
             <a:avLst>
-              <a:gd name="adj" fmla="val 25000"/>
+              <a:gd name="adj" fmla="val 12345"/>
             </a:avLst>
           </a:prstGeom>
           <a:solidFill>
@@ -21116,7 +20977,7 @@
         </p:blipFill>
         <p:spPr>
           <a:xfrm>
-            <a:off x="722376" y="1225295"/>
+            <a:off x="722376" y="859536"/>
             <a:ext cx="292608" cy="292608"/>
           </a:xfrm>
           <a:prstGeom prst="rect">
@@ -21132,8 +20993,8 @@
         </p:nvSpPr>
         <p:spPr>
           <a:xfrm>
-            <a:off x="722376" y="1563624"/>
-            <a:ext cx="10744200" cy="228600"/>
+            <a:off x="722376" y="1197864"/>
+            <a:ext cx="10744200" cy="1737360"/>
           </a:xfrm>
           <a:prstGeom prst="rect">
             <a:avLst/>
@@ -21152,13 +21013,13 @@
               </a:lnSpc>
             </a:pPr>
             <a:r>
-              <a:rPr sz="1550" b="0" i="1">
+              <a:rPr sz="1400" b="0" i="1">
                 <a:solidFill>
                   <a:srgbClr val="21295C"/>
                 </a:solidFill>
                 <a:latin typeface="Arial"/>
               </a:rPr>
-              <a:t>«Нужен еженедельный дайджест по рабочим чатам и почте команды»</a:t>
+              <a:t>«Привет, обсуждали на планёрке — хотим еженедельный дайджест по рабочим чатам и почте команды: что обсуждали, что решили за неделю, коротко, одним сообщением, чтобы не перечитывать всю переписку заново по вечерам в пятницу. Нужен по пятницам к 17:00 — чтобы руководитель успел прочитать перед выходными, а не разгребал всё в понедельник утром вперемешку с новой почтой. Источников несколько: рабочий чат команды и почта, надо свести в одно связное сообщение, а не просто склеить куски подряд. Кстати, отдельно от этого — хотели ещё обсудить, стоит ли переезжать с текущего чата на другой мессенджер, но это дело не срочное, как-нибудь в другой раз».</a:t>
             </a:r>
           </a:p>
         </p:txBody>
@@ -21171,12 +21032,12 @@
         </p:nvSpPr>
         <p:spPr>
           <a:xfrm>
-            <a:off x="502920" y="2331720"/>
-            <a:ext cx="11183112" cy="2606040"/>
+            <a:off x="502920" y="3319272"/>
+            <a:ext cx="11183112" cy="1005840"/>
           </a:xfrm>
           <a:prstGeom prst="roundRect">
             <a:avLst>
-              <a:gd name="adj" fmla="val 11695"/>
+              <a:gd name="adj" fmla="val 25000"/>
             </a:avLst>
           </a:prstGeom>
           <a:solidFill>
@@ -21213,8 +21074,8 @@
         </p:blipFill>
         <p:spPr>
           <a:xfrm>
-            <a:off x="868680" y="2971800"/>
-            <a:ext cx="822960" cy="822960"/>
+            <a:off x="822960" y="3525012"/>
+            <a:ext cx="594360" cy="594360"/>
           </a:xfrm>
           <a:prstGeom prst="rect">
             <a:avLst/>
@@ -21237,72 +21098,24 @@
         </p:blipFill>
         <p:spPr>
           <a:xfrm>
-            <a:off x="2148840" y="2971800"/>
-            <a:ext cx="822960" cy="822960"/>
+            <a:off x="1600200" y="3525012"/>
+            <a:ext cx="594360" cy="594360"/>
           </a:xfrm>
           <a:prstGeom prst="rect">
             <a:avLst/>
           </a:prstGeom>
         </p:spPr>
       </p:pic>
-      <p:pic>
-        <p:nvPicPr>
-          <p:cNvPr id="9" name="Picture 8" descr="arrow-right-F0AB00-64.png"/>
-          <p:cNvPicPr>
-            <a:picLocks noChangeAspect="1"/>
-          </p:cNvPicPr>
-          <p:nvPr/>
-        </p:nvPicPr>
-        <p:blipFill>
-          <a:blip r:embed="rId5"/>
-          <a:stretch>
-            <a:fillRect/>
-          </a:stretch>
-        </p:blipFill>
-        <p:spPr>
-          <a:xfrm>
-            <a:off x="3291840" y="3154679"/>
-            <a:ext cx="502920" cy="502920"/>
-          </a:xfrm>
-          <a:prstGeom prst="rect">
-            <a:avLst/>
-          </a:prstGeom>
-        </p:spPr>
-      </p:pic>
-      <p:pic>
-        <p:nvPicPr>
-          <p:cNvPr id="10" name="Picture 9" descr="file-text-065A82-96.png"/>
-          <p:cNvPicPr>
-            <a:picLocks noChangeAspect="1"/>
-          </p:cNvPicPr>
-          <p:nvPr/>
-        </p:nvPicPr>
-        <p:blipFill>
-          <a:blip r:embed="rId6"/>
-          <a:stretch>
-            <a:fillRect/>
-          </a:stretch>
-        </p:blipFill>
-        <p:spPr>
-          <a:xfrm>
-            <a:off x="4114800" y="2971800"/>
-            <a:ext cx="822960" cy="822960"/>
-          </a:xfrm>
-          <a:prstGeom prst="rect">
-            <a:avLst/>
-          </a:prstGeom>
-        </p:spPr>
-      </p:pic>
-      <p:sp>
-        <p:nvSpPr>
-          <p:cNvPr id="11" name="TextBox 10"/>
+      <p:sp>
+        <p:nvSpPr>
+          <p:cNvPr id="9" name="TextBox 8"/>
           <p:cNvSpPr txBox="1"/>
           <p:nvPr/>
         </p:nvSpPr>
         <p:spPr>
           <a:xfrm>
-            <a:off x="5349240" y="2903220"/>
-            <a:ext cx="5577840" cy="1463040"/>
+            <a:off x="2514600" y="3319272"/>
+            <a:ext cx="8869680" cy="1005840"/>
           </a:xfrm>
           <a:prstGeom prst="rect">
             <a:avLst/>
@@ -21310,7 +21123,7 @@
           <a:noFill/>
         </p:spPr>
         <p:txBody>
-          <a:bodyPr wrap="square" lIns="0" rIns="0" tIns="0" bIns="0" anchor="t">
+          <a:bodyPr wrap="square" lIns="0" rIns="0" tIns="0" bIns="0" anchor="ctr">
             <a:spAutoFit/>
           </a:bodyPr>
           <a:lstStyle/>
@@ -21319,55 +21132,33 @@
               <a:lnSpc>
                 <a:spcPct val="125000"/>
               </a:lnSpc>
-              <a:spcAft>
-                <a:spcPts val="1000"/>
-              </a:spcAft>
             </a:pPr>
             <a:r>
-              <a:rPr sz="1750" b="1" i="0">
+              <a:rPr sz="1500" b="0" i="1">
                 <a:solidFill>
                   <a:srgbClr val="21295C"/>
                 </a:solidFill>
                 <a:latin typeface="Arial"/>
               </a:rPr>
-              <a:t>Что обсуждали, что решили за неделю</a:t>
-            </a:r>
-          </a:p>
-          <a:p>
-            <a:pPr algn="l">
-              <a:lnSpc>
-                <a:spcPct val="128000"/>
-              </a:lnSpc>
-              <a:spcAft>
-                <a:spcPts val="0"/>
-              </a:spcAft>
-            </a:pPr>
-            <a:r>
-              <a:rPr sz="1450" b="0" i="0">
-                <a:solidFill>
-                  <a:srgbClr val="6B7685"/>
-                </a:solidFill>
-                <a:latin typeface="Arial"/>
-              </a:rPr>
-              <a:t>Дайджест нужен по пятницам, к 17:00</a:t>
-            </a:r>
-          </a:p>
-        </p:txBody>
-      </p:sp>
-      <p:sp>
-        <p:nvSpPr>
-          <p:cNvPr id="12" name="Rounded Rectangle 11"/>
+              <a:t>Из чата и почты — одно связное сообщение, по пятницам к 17:00</a:t>
+            </a:r>
+          </a:p>
+        </p:txBody>
+      </p:sp>
+      <p:sp>
+        <p:nvSpPr>
+          <p:cNvPr id="10" name="Rounded Rectangle 9"/>
           <p:cNvSpPr/>
           <p:nvPr/>
         </p:nvSpPr>
         <p:spPr>
           <a:xfrm>
-            <a:off x="502920" y="5212080"/>
-            <a:ext cx="11183112" cy="1325880"/>
+            <a:off x="502920" y="4507992"/>
+            <a:ext cx="11183112" cy="2212847"/>
           </a:xfrm>
           <a:prstGeom prst="roundRect">
             <a:avLst>
-              <a:gd name="adj" fmla="val 22988"/>
+              <a:gd name="adj" fmla="val 13774"/>
             </a:avLst>
           </a:prstGeom>
           <a:solidFill>
@@ -21390,14 +21181,14 @@
       </p:sp>
       <p:sp>
         <p:nvSpPr>
-          <p:cNvPr id="13" name="TextBox 12"/>
+          <p:cNvPr id="11" name="TextBox 10"/>
           <p:cNvSpPr txBox="1"/>
           <p:nvPr/>
         </p:nvSpPr>
         <p:spPr>
           <a:xfrm>
-            <a:off x="777240" y="5212080"/>
-            <a:ext cx="10607040" cy="1325880"/>
+            <a:off x="777240" y="4507992"/>
+            <a:ext cx="10607040" cy="2212847"/>
           </a:xfrm>
           <a:prstGeom prst="rect">
             <a:avLst/>
@@ -21416,7 +21207,7 @@
               </a:lnSpc>
             </a:pPr>
             <a:r>
-              <a:rPr sz="2200" b="1" i="0">
+              <a:rPr sz="2000" b="1" i="0">
                 <a:solidFill>
                   <a:srgbClr val="21295C"/>
                 </a:solidFill>
@@ -22938,8 +22729,8 @@
         </p:nvSpPr>
         <p:spPr>
           <a:xfrm>
-            <a:off x="502920" y="411480"/>
-            <a:ext cx="11183112" cy="914400"/>
+            <a:off x="502920" y="228600"/>
+            <a:ext cx="11183112" cy="411480"/>
           </a:xfrm>
           <a:prstGeom prst="rect">
             <a:avLst/>
@@ -22958,7 +22749,7 @@
               </a:lnSpc>
             </a:pPr>
             <a:r>
-              <a:rPr sz="2800" b="1" i="0">
+              <a:rPr sz="2600" b="1" i="0">
                 <a:solidFill>
                   <a:srgbClr val="21295C"/>
                 </a:solidFill>
@@ -22977,12 +22768,12 @@
         </p:nvSpPr>
         <p:spPr>
           <a:xfrm>
-            <a:off x="502920" y="1005840"/>
-            <a:ext cx="11183112" cy="1188720"/>
+            <a:off x="502920" y="713232"/>
+            <a:ext cx="11183112" cy="2377440"/>
           </a:xfrm>
           <a:prstGeom prst="roundRect">
             <a:avLst>
-              <a:gd name="adj" fmla="val 25000"/>
+              <a:gd name="adj" fmla="val 12820"/>
             </a:avLst>
           </a:prstGeom>
           <a:solidFill>
@@ -23019,7 +22810,7 @@
         </p:blipFill>
         <p:spPr>
           <a:xfrm>
-            <a:off x="722376" y="1179576"/>
+            <a:off x="722376" y="886968"/>
             <a:ext cx="292608" cy="292608"/>
           </a:xfrm>
           <a:prstGeom prst="rect">
@@ -23035,8 +22826,8 @@
         </p:nvSpPr>
         <p:spPr>
           <a:xfrm>
-            <a:off x="722376" y="1517904"/>
-            <a:ext cx="10287000" cy="457200"/>
+            <a:off x="722376" y="1225296"/>
+            <a:ext cx="10287000" cy="1645920"/>
           </a:xfrm>
           <a:prstGeom prst="rect">
             <a:avLst/>
@@ -23055,13 +22846,13 @@
               </a:lnSpc>
             </a:pPr>
             <a:r>
-              <a:rPr sz="1550" b="0" i="1">
+              <a:rPr sz="1400" b="0" i="1">
                 <a:solidFill>
                   <a:srgbClr val="21295C"/>
                 </a:solidFill>
                 <a:latin typeface="Arial"/>
               </a:rPr>
-              <a:t>«Хочу карточку по каждому звонку — потребность, возражения, договорённости»</a:t>
+              <a:t>«Привет! Тут у нас родилась идея на стратегической сессии — хочу по каждому звонку менеджера получать карточку: какая потребность у клиента, какие возражения прозвучали, какие договорённости достигли. А то перед следующим звонком с тем же клиентом менеджеры перематывают запись туда-сюда, ищут, на чём остановились в прошлый раз. В отделе у меня 8 менеджеров, у каждого по 15-20 звонков в день, записи сейчас просто лежат в телефонии, никуда не выгружаются. Вся история клиента у нас в CRM, но её тоже давно пора почистить от дублей контактов — но это отдельная головная боль, обсудим как-нибудь потом».</a:t>
             </a:r>
           </a:p>
         </p:txBody>
@@ -23074,7 +22865,7 @@
         </p:nvSpPr>
         <p:spPr>
           <a:xfrm>
-            <a:off x="11009376" y="1179576"/>
+            <a:off x="11009376" y="886968"/>
             <a:ext cx="457200" cy="457200"/>
           </a:xfrm>
           <a:prstGeom prst="roundRect">
@@ -23116,7 +22907,7 @@
         </p:blipFill>
         <p:spPr>
           <a:xfrm>
-            <a:off x="11091672" y="1261872"/>
+            <a:off x="11091672" y="969264"/>
             <a:ext cx="292608" cy="292608"/>
           </a:xfrm>
           <a:prstGeom prst="rect">
@@ -23132,71 +22923,12 @@
         </p:nvSpPr>
         <p:spPr>
           <a:xfrm>
-            <a:off x="502920" y="2377440"/>
-            <a:ext cx="4206240" cy="3611880"/>
+            <a:off x="502920" y="3273552"/>
+            <a:ext cx="11183112" cy="1005840"/>
           </a:xfrm>
           <a:prstGeom prst="roundRect">
             <a:avLst>
-              <a:gd name="adj" fmla="val 8438"/>
-            </a:avLst>
-          </a:prstGeom>
-          <a:solidFill>
-            <a:srgbClr val="F4F7FA"/>
-          </a:solidFill>
-          <a:ln w="20320">
-            <a:solidFill>
-              <a:srgbClr val="028090"/>
-            </a:solidFill>
-          </a:ln>
-          <a:effectLst/>
-        </p:spPr>
-        <p:txBody>
-          <a:bodyPr rtlCol="0" anchor="ctr"/>
-          <a:lstStyle/>
-          <a:p>
-            <a:pPr algn="ctr"/>
-          </a:p>
-        </p:txBody>
-      </p:sp>
-      <p:pic>
-        <p:nvPicPr>
-          <p:cNvPr id="9" name="Picture 8" descr="s29-office-phonecall-real.jpg"/>
-          <p:cNvPicPr>
-            <a:picLocks noChangeAspect="1"/>
-          </p:cNvPicPr>
-          <p:nvPr/>
-        </p:nvPicPr>
-        <p:blipFill>
-          <a:blip r:embed="rId4"/>
-          <a:srcRect l="5930" r="5930"/>
-          <a:stretch>
-            <a:fillRect/>
-          </a:stretch>
-        </p:blipFill>
-        <p:spPr>
-          <a:xfrm>
-            <a:off x="612648" y="2487168"/>
-            <a:ext cx="3986783" cy="3392424"/>
-          </a:xfrm>
-          <a:prstGeom prst="rect">
-            <a:avLst/>
-          </a:prstGeom>
-        </p:spPr>
-      </p:pic>
-      <p:sp>
-        <p:nvSpPr>
-          <p:cNvPr id="10" name="Rounded Rectangle 9"/>
-          <p:cNvSpPr/>
-          <p:nvPr/>
-        </p:nvSpPr>
-        <p:spPr>
-          <a:xfrm>
-            <a:off x="4983479" y="2377440"/>
-            <a:ext cx="6702552" cy="1691640"/>
-          </a:xfrm>
-          <a:prstGeom prst="roundRect">
-            <a:avLst>
-              <a:gd name="adj" fmla="val 18018"/>
+              <a:gd name="adj" fmla="val 25000"/>
             </a:avLst>
           </a:prstGeom>
           <a:solidFill>
@@ -23217,16 +22949,40 @@
           </a:p>
         </p:txBody>
       </p:sp>
-      <p:sp>
-        <p:nvSpPr>
-          <p:cNvPr id="11" name="TextBox 10"/>
+      <p:pic>
+        <p:nvPicPr>
+          <p:cNvPr id="9" name="Picture 8" descr="phone-065A82-96.png"/>
+          <p:cNvPicPr>
+            <a:picLocks noChangeAspect="1"/>
+          </p:cNvPicPr>
+          <p:nvPr/>
+        </p:nvPicPr>
+        <p:blipFill>
+          <a:blip r:embed="rId4"/>
+          <a:stretch>
+            <a:fillRect/>
+          </a:stretch>
+        </p:blipFill>
+        <p:spPr>
+          <a:xfrm>
+            <a:off x="822960" y="3479292"/>
+            <a:ext cx="594360" cy="594360"/>
+          </a:xfrm>
+          <a:prstGeom prst="rect">
+            <a:avLst/>
+          </a:prstGeom>
+        </p:spPr>
+      </p:pic>
+      <p:sp>
+        <p:nvSpPr>
+          <p:cNvPr id="10" name="TextBox 9"/>
           <p:cNvSpPr txBox="1"/>
           <p:nvPr/>
         </p:nvSpPr>
         <p:spPr>
           <a:xfrm>
-            <a:off x="5166359" y="2523744"/>
-            <a:ext cx="6336792" cy="1417320"/>
+            <a:off x="1691640" y="3273552"/>
+            <a:ext cx="9692640" cy="1005840"/>
           </a:xfrm>
           <a:prstGeom prst="rect">
             <a:avLst/>
@@ -23245,7 +23001,7 @@
               </a:lnSpc>
             </a:pPr>
             <a:r>
-              <a:rPr sz="1500" b="0" i="1">
+              <a:rPr sz="1550" b="0" i="1">
                 <a:solidFill>
                   <a:srgbClr val="21295C"/>
                 </a:solidFill>
@@ -23258,18 +23014,18 @@
       </p:sp>
       <p:sp>
         <p:nvSpPr>
-          <p:cNvPr id="12" name="Rounded Rectangle 11"/>
+          <p:cNvPr id="11" name="Rounded Rectangle 10"/>
           <p:cNvSpPr/>
           <p:nvPr/>
         </p:nvSpPr>
         <p:spPr>
           <a:xfrm>
-            <a:off x="4983479" y="4343400"/>
-            <a:ext cx="6702552" cy="1645920"/>
+            <a:off x="502920" y="4462272"/>
+            <a:ext cx="11183112" cy="2258568"/>
           </a:xfrm>
           <a:prstGeom prst="roundRect">
             <a:avLst>
-              <a:gd name="adj" fmla="val 18518"/>
+              <a:gd name="adj" fmla="val 13495"/>
             </a:avLst>
           </a:prstGeom>
           <a:solidFill>
@@ -23292,14 +23048,14 @@
       </p:sp>
       <p:sp>
         <p:nvSpPr>
-          <p:cNvPr id="13" name="TextBox 12"/>
+          <p:cNvPr id="12" name="TextBox 11"/>
           <p:cNvSpPr txBox="1"/>
           <p:nvPr/>
         </p:nvSpPr>
         <p:spPr>
           <a:xfrm>
-            <a:off x="5166359" y="4343400"/>
-            <a:ext cx="6336792" cy="1645920"/>
+            <a:off x="777240" y="4462272"/>
+            <a:ext cx="10607040" cy="2258568"/>
           </a:xfrm>
           <a:prstGeom prst="rect">
             <a:avLst/>
@@ -24187,8 +23943,8 @@
         </p:nvSpPr>
         <p:spPr>
           <a:xfrm>
-            <a:off x="502920" y="411480"/>
-            <a:ext cx="11183112" cy="914400"/>
+            <a:off x="502920" y="228600"/>
+            <a:ext cx="11183112" cy="411480"/>
           </a:xfrm>
           <a:prstGeom prst="rect">
             <a:avLst/>
@@ -24207,7 +23963,7 @@
               </a:lnSpc>
             </a:pPr>
             <a:r>
-              <a:rPr sz="2800" b="1" i="0">
+              <a:rPr sz="2600" b="1" i="0">
                 <a:solidFill>
                   <a:srgbClr val="21295C"/>
                 </a:solidFill>
@@ -24226,12 +23982,12 @@
         </p:nvSpPr>
         <p:spPr>
           <a:xfrm>
-            <a:off x="502920" y="1371600"/>
-            <a:ext cx="5454396" cy="2286000"/>
+            <a:off x="502920" y="777240"/>
+            <a:ext cx="5454396" cy="4434840"/>
           </a:xfrm>
           <a:prstGeom prst="roundRect">
             <a:avLst>
-              <a:gd name="adj" fmla="val 13333"/>
+              <a:gd name="adj" fmla="val 6872"/>
             </a:avLst>
           </a:prstGeom>
           <a:solidFill>
@@ -24268,7 +24024,7 @@
         </p:blipFill>
         <p:spPr>
           <a:xfrm>
-            <a:off x="722376" y="1545336"/>
+            <a:off x="722376" y="950975"/>
             <a:ext cx="292608" cy="292608"/>
           </a:xfrm>
           <a:prstGeom prst="rect">
@@ -24284,8 +24040,8 @@
         </p:nvSpPr>
         <p:spPr>
           <a:xfrm>
-            <a:off x="722376" y="1883664"/>
-            <a:ext cx="4558283" cy="1554480"/>
+            <a:off x="722376" y="1289304"/>
+            <a:ext cx="4558283" cy="3703319"/>
           </a:xfrm>
           <a:prstGeom prst="rect">
             <a:avLst/>
@@ -24304,13 +24060,13 @@
               </a:lnSpc>
             </a:pPr>
             <a:r>
-              <a:rPr sz="1600" b="0" i="1">
+              <a:rPr sz="1300" b="0" i="1">
                 <a:solidFill>
                   <a:srgbClr val="21295C"/>
                 </a:solidFill>
                 <a:latin typeface="Arial"/>
               </a:rPr>
-              <a:t>«GPU-сервера у нас нет, и бюджета на него в этом году нет»</a:t>
+              <a:t>«Коллеги, разговор случился на еженедельном созвоне по бюджету — туда же, кстати, пригласили и юриста, который на прошлой неделе смотрел демо прототипа. Хочу сразу обозначить ограничение по инфраструктуре: GPU-сервера у нас нет, и бюджета на него в этом году тоже нет — приоритеты на квартал уже утверждены финансовым директором, туда попали миграция на новую почтовую систему и обновление парка ноутбуков в поддержке. Если модель тяжёлая, придётся идти через облачный API, но там свои вопросы по данным, мы их уже обсуждали. В следующем году, может, вернёмся к разговору про свой сервер, но не сейчас».</a:t>
             </a:r>
           </a:p>
         </p:txBody>
@@ -24323,7 +24079,7 @@
         </p:nvSpPr>
         <p:spPr>
           <a:xfrm>
-            <a:off x="5280659" y="1545336"/>
+            <a:off x="5280659" y="950975"/>
             <a:ext cx="457200" cy="457200"/>
           </a:xfrm>
           <a:prstGeom prst="roundRect">
@@ -24365,7 +24121,7 @@
         </p:blipFill>
         <p:spPr>
           <a:xfrm>
-            <a:off x="5362955" y="1627632"/>
+            <a:off x="5362955" y="1033271"/>
             <a:ext cx="292608" cy="292608"/>
           </a:xfrm>
           <a:prstGeom prst="rect">
@@ -24381,8 +24137,8 @@
         </p:nvSpPr>
         <p:spPr>
           <a:xfrm>
-            <a:off x="722376" y="3291840"/>
-            <a:ext cx="5015483" cy="274320"/>
+            <a:off x="722376" y="4919471"/>
+            <a:ext cx="5015483" cy="256032"/>
           </a:xfrm>
           <a:prstGeom prst="rect">
             <a:avLst/>
@@ -24420,12 +24176,12 @@
         </p:nvSpPr>
         <p:spPr>
           <a:xfrm>
-            <a:off x="6231636" y="1371600"/>
-            <a:ext cx="5454396" cy="2286000"/>
+            <a:off x="6231636" y="777240"/>
+            <a:ext cx="5454396" cy="4434840"/>
           </a:xfrm>
           <a:prstGeom prst="roundRect">
             <a:avLst>
-              <a:gd name="adj" fmla="val 13333"/>
+              <a:gd name="adj" fmla="val 6872"/>
             </a:avLst>
           </a:prstGeom>
           <a:solidFill>
@@ -24462,7 +24218,7 @@
         </p:blipFill>
         <p:spPr>
           <a:xfrm>
-            <a:off x="6451092" y="1545336"/>
+            <a:off x="6451092" y="950975"/>
             <a:ext cx="292608" cy="292608"/>
           </a:xfrm>
           <a:prstGeom prst="rect">
@@ -24478,8 +24234,8 @@
         </p:nvSpPr>
         <p:spPr>
           <a:xfrm>
-            <a:off x="6451092" y="1883664"/>
-            <a:ext cx="4558283" cy="1554480"/>
+            <a:off x="6451092" y="1289304"/>
+            <a:ext cx="4558283" cy="3703319"/>
           </a:xfrm>
           <a:prstGeom prst="rect">
             <a:avLst/>
@@ -24498,13 +24254,13 @@
               </a:lnSpc>
             </a:pPr>
             <a:r>
-              <a:rPr sz="1600" b="0" i="1">
+              <a:rPr sz="1300" b="0" i="1">
                 <a:solidFill>
                   <a:srgbClr val="21295C"/>
                 </a:solidFill>
                 <a:latin typeface="Arial"/>
               </a:rPr>
-              <a:t>«Мне не беседа нужна — пять полей в CRM по каждому звонку»</a:t>
+              <a:t>«Меня, честно говоря, весь этот разговор про модели и облака не очень касается — я не технарь. Мне для работы нужно простое: пять полей в CRM по каждому звонку — потребность, возражения, договорённости, следующий шаг, оценка вероятности сделки. Не пересказ разговора целиком, не анализ тона голоса менеджера, ничего такого. Просто эти пять полей должны заполняться сами, чтобы я видел их у себя в отчёте по отделу, который я и так каждый понедельник собираю руками из заметок ребят».</a:t>
             </a:r>
           </a:p>
         </p:txBody>
@@ -24517,7 +24273,7 @@
         </p:nvSpPr>
         <p:spPr>
           <a:xfrm>
-            <a:off x="11009376" y="1545336"/>
+            <a:off x="11009376" y="950975"/>
             <a:ext cx="457200" cy="457200"/>
           </a:xfrm>
           <a:prstGeom prst="roundRect">
@@ -24559,7 +24315,7 @@
         </p:blipFill>
         <p:spPr>
           <a:xfrm>
-            <a:off x="11091672" y="1627632"/>
+            <a:off x="11091672" y="1033271"/>
             <a:ext cx="292608" cy="292608"/>
           </a:xfrm>
           <a:prstGeom prst="rect">
@@ -24575,8 +24331,8 @@
         </p:nvSpPr>
         <p:spPr>
           <a:xfrm>
-            <a:off x="6451092" y="3291840"/>
-            <a:ext cx="5015483" cy="274320"/>
+            <a:off x="6451092" y="4919471"/>
+            <a:ext cx="5015483" cy="256032"/>
           </a:xfrm>
           <a:prstGeom prst="rect">
             <a:avLst/>
@@ -24614,12 +24370,12 @@
         </p:nvSpPr>
         <p:spPr>
           <a:xfrm>
-            <a:off x="502920" y="3931920"/>
-            <a:ext cx="11183112" cy="822960"/>
+            <a:off x="502920" y="5376671"/>
+            <a:ext cx="11183112" cy="1344168"/>
           </a:xfrm>
           <a:prstGeom prst="roundRect">
             <a:avLst>
-              <a:gd name="adj" fmla="val 25000"/>
+              <a:gd name="adj" fmla="val 22675"/>
             </a:avLst>
           </a:prstGeom>
           <a:solidFill>
@@ -24648,8 +24404,8 @@
         </p:nvSpPr>
         <p:spPr>
           <a:xfrm>
-            <a:off x="777240" y="3931920"/>
-            <a:ext cx="10607040" cy="822960"/>
+            <a:off x="777240" y="5376671"/>
+            <a:ext cx="10607040" cy="1344168"/>
           </a:xfrm>
           <a:prstGeom prst="rect">
             <a:avLst/>
@@ -24668,7 +24424,7 @@
               </a:lnSpc>
             </a:pPr>
             <a:r>
-              <a:rPr sz="2200" b="1" i="0">
+              <a:rPr sz="2000" b="1" i="0">
                 <a:solidFill>
                   <a:srgbClr val="21295C"/>
                 </a:solidFill>
@@ -28633,8 +28389,8 @@
         </p:nvSpPr>
         <p:spPr>
           <a:xfrm>
-            <a:off x="502920" y="320040"/>
-            <a:ext cx="11183112" cy="502920"/>
+            <a:off x="502920" y="228600"/>
+            <a:ext cx="11183112" cy="457200"/>
           </a:xfrm>
           <a:prstGeom prst="rect">
             <a:avLst/>
@@ -28653,7 +28409,7 @@
               </a:lnSpc>
             </a:pPr>
             <a:r>
-              <a:rPr sz="2700" b="1" i="0">
+              <a:rPr sz="2600" b="1" i="0">
                 <a:solidFill>
                   <a:srgbClr val="21295C"/>
                 </a:solidFill>
@@ -28666,18 +28422,57 @@
       </p:sp>
       <p:sp>
         <p:nvSpPr>
-          <p:cNvPr id="3" name="Rounded Rectangle 2"/>
+          <p:cNvPr id="3" name="TextBox 2"/>
+          <p:cNvSpPr txBox="1"/>
+          <p:nvPr/>
+        </p:nvSpPr>
+        <p:spPr>
+          <a:xfrm>
+            <a:off x="502920" y="658368"/>
+            <a:ext cx="11183112" cy="256032"/>
+          </a:xfrm>
+          <a:prstGeom prst="rect">
+            <a:avLst/>
+          </a:prstGeom>
+          <a:noFill/>
+        </p:spPr>
+        <p:txBody>
+          <a:bodyPr wrap="square" lIns="0" rIns="0" tIns="0" bIns="0" anchor="t">
+            <a:spAutoFit/>
+          </a:bodyPr>
+          <a:lstStyle/>
+          <a:p>
+            <a:pPr algn="l">
+              <a:lnSpc>
+                <a:spcPct val="115000"/>
+              </a:lnSpc>
+            </a:pPr>
+            <a:r>
+              <a:rPr sz="1250" b="0" i="1">
+                <a:solidFill>
+                  <a:srgbClr val="6B7685"/>
+                </a:solidFill>
+                <a:latin typeface="Arial"/>
+              </a:rPr>
+              <a:t>Марина, и.о. продакта по фин.процессам</a:t>
+            </a:r>
+          </a:p>
+        </p:txBody>
+      </p:sp>
+      <p:sp>
+        <p:nvSpPr>
+          <p:cNvPr id="4" name="Rounded Rectangle 3"/>
           <p:cNvSpPr/>
           <p:nvPr/>
         </p:nvSpPr>
         <p:spPr>
           <a:xfrm>
-            <a:off x="502920" y="868680"/>
-            <a:ext cx="11183112" cy="868680"/>
+            <a:off x="502920" y="914400"/>
+            <a:ext cx="11183112" cy="2331720"/>
           </a:xfrm>
           <a:prstGeom prst="roundRect">
             <a:avLst>
-              <a:gd name="adj" fmla="val 25000"/>
+              <a:gd name="adj" fmla="val 13071"/>
             </a:avLst>
           </a:prstGeom>
           <a:solidFill>
@@ -28700,7 +28495,7 @@
       </p:sp>
       <p:pic>
         <p:nvPicPr>
-          <p:cNvPr id="4" name="Picture 3" descr="quote-1C7293-64.png"/>
+          <p:cNvPr id="5" name="Picture 4" descr="quote-1C7293-64.png"/>
           <p:cNvPicPr>
             <a:picLocks noChangeAspect="1"/>
           </p:cNvPicPr>
@@ -28714,7 +28509,7 @@
         </p:blipFill>
         <p:spPr>
           <a:xfrm>
-            <a:off x="722376" y="1042415"/>
+            <a:off x="722376" y="1088136"/>
             <a:ext cx="292608" cy="292608"/>
           </a:xfrm>
           <a:prstGeom prst="rect">
@@ -28724,14 +28519,14 @@
       </p:pic>
       <p:sp>
         <p:nvSpPr>
-          <p:cNvPr id="5" name="TextBox 4"/>
+          <p:cNvPr id="6" name="TextBox 5"/>
           <p:cNvSpPr txBox="1"/>
           <p:nvPr/>
         </p:nvSpPr>
         <p:spPr>
           <a:xfrm>
-            <a:off x="722376" y="1380744"/>
-            <a:ext cx="10744200" cy="137159"/>
+            <a:off x="722376" y="1426464"/>
+            <a:ext cx="10744200" cy="1600199"/>
           </a:xfrm>
           <a:prstGeom prst="rect">
             <a:avLst/>
@@ -28750,31 +28545,31 @@
               </a:lnSpc>
             </a:pPr>
             <a:r>
-              <a:rPr sz="1400" b="0" i="1">
+              <a:rPr sz="1450" b="0" i="1">
                 <a:solidFill>
                   <a:srgbClr val="21295C"/>
                 </a:solidFill>
                 <a:latin typeface="Arial"/>
               </a:rPr>
-              <a:t>«Три человека, около 400 накладных в месяц, всё руками в 1С — можно автоматом?»</a:t>
-            </a:r>
-          </a:p>
-        </p:txBody>
-      </p:sp>
-      <p:sp>
-        <p:nvSpPr>
-          <p:cNvPr id="6" name="Rounded Rectangle 5"/>
+              <a:t>«Привет! Пишет Марина, временно за продакта по фин.процессам, пока Олег в отпуске. Бухгалтерия реально тонет: три человека руками забивают накладные поставщиков в 1С, около 400 штук в месяц, к концу квартала завал и ошибки в суммах. Приложила два примера накладных за прошлую неделю — форматы вроде одинаковые. Можно это как-то автоматом сделать? Заодно спроси у Димы, когда освободится после релиза мобилки — хотела обсудить с ним ещё и склад, но это отдельная история. По срокам — прикидка хотя бы до пятницы была бы супер, у нас на этой неделе ревью бюджета».</a:t>
+            </a:r>
+          </a:p>
+        </p:txBody>
+      </p:sp>
+      <p:sp>
+        <p:nvSpPr>
+          <p:cNvPr id="7" name="Rounded Rectangle 6"/>
           <p:cNvSpPr/>
           <p:nvPr/>
         </p:nvSpPr>
         <p:spPr>
           <a:xfrm>
-            <a:off x="502920" y="1828800"/>
-            <a:ext cx="11183112" cy="1417320"/>
+            <a:off x="502920" y="3429000"/>
+            <a:ext cx="3593592" cy="1965960"/>
           </a:xfrm>
           <a:prstGeom prst="roundRect">
             <a:avLst>
-              <a:gd name="adj" fmla="val 21505"/>
+              <a:gd name="adj" fmla="val 15503"/>
             </a:avLst>
           </a:prstGeom>
           <a:solidFill>
@@ -28795,45 +28590,903 @@
           </a:p>
         </p:txBody>
       </p:sp>
-      <p:pic>
-        <p:nvPicPr>
-          <p:cNvPr id="7" name="Picture 6" descr="s04-documents-pile-real.jpg"/>
-          <p:cNvPicPr>
-            <a:picLocks noChangeAspect="1"/>
-          </p:cNvPicPr>
-          <p:nvPr/>
-        </p:nvPicPr>
-        <p:blipFill>
-          <a:blip r:embed="rId3"/>
-          <a:srcRect t="42519" b="42519"/>
-          <a:stretch>
-            <a:fillRect/>
-          </a:stretch>
-        </p:blipFill>
-        <p:spPr>
-          <a:xfrm>
-            <a:off x="594360" y="1920240"/>
-            <a:ext cx="11000232" cy="1234440"/>
-          </a:xfrm>
-          <a:prstGeom prst="rect">
-            <a:avLst/>
-          </a:prstGeom>
-        </p:spPr>
-      </p:pic>
-      <p:sp>
-        <p:nvSpPr>
-          <p:cNvPr id="8" name="Rounded Rectangle 7"/>
+      <p:sp>
+        <p:nvSpPr>
+          <p:cNvPr id="8" name="TextBox 7"/>
+          <p:cNvSpPr txBox="1"/>
+          <p:nvPr/>
+        </p:nvSpPr>
+        <p:spPr>
+          <a:xfrm>
+            <a:off x="649224" y="3520440"/>
+            <a:ext cx="3300984" cy="310896"/>
+          </a:xfrm>
+          <a:prstGeom prst="rect">
+            <a:avLst/>
+          </a:prstGeom>
+          <a:noFill/>
+        </p:spPr>
+        <p:txBody>
+          <a:bodyPr wrap="square" lIns="0" rIns="0" tIns="0" bIns="0" anchor="t">
+            <a:spAutoFit/>
+          </a:bodyPr>
+          <a:lstStyle/>
+          <a:p>
+            <a:pPr algn="l">
+              <a:lnSpc>
+                <a:spcPct val="105000"/>
+              </a:lnSpc>
+            </a:pPr>
+            <a:r>
+              <a:rPr sz="1200" b="1" i="0">
+                <a:solidFill>
+                  <a:srgbClr val="065A82"/>
+                </a:solidFill>
+                <a:latin typeface="Arial"/>
+              </a:rPr>
+              <a:t>Документ поставщика A</a:t>
+            </a:r>
+          </a:p>
+        </p:txBody>
+      </p:sp>
+      <p:sp>
+        <p:nvSpPr>
+          <p:cNvPr id="9" name="Rectangle 8"/>
           <p:cNvSpPr/>
           <p:nvPr/>
         </p:nvSpPr>
         <p:spPr>
           <a:xfrm>
-            <a:off x="502920" y="3447288"/>
-            <a:ext cx="3593592" cy="2423160"/>
+            <a:off x="649224" y="3867912"/>
+            <a:ext cx="788670" cy="301752"/>
+          </a:xfrm>
+          <a:prstGeom prst="rect">
+            <a:avLst/>
+          </a:prstGeom>
+          <a:solidFill>
+            <a:srgbClr val="065A82"/>
+          </a:solidFill>
+          <a:ln>
+            <a:noFill/>
+          </a:ln>
+          <a:effectLst/>
+        </p:spPr>
+        <p:txBody>
+          <a:bodyPr rtlCol="0" anchor="ctr"/>
+          <a:lstStyle/>
+          <a:p>
+            <a:pPr algn="ctr"/>
+          </a:p>
+        </p:txBody>
+      </p:sp>
+      <p:sp>
+        <p:nvSpPr>
+          <p:cNvPr id="10" name="TextBox 9"/>
+          <p:cNvSpPr txBox="1"/>
+          <p:nvPr/>
+        </p:nvSpPr>
+        <p:spPr>
+          <a:xfrm>
+            <a:off x="649224" y="3867912"/>
+            <a:ext cx="788670" cy="301752"/>
+          </a:xfrm>
+          <a:prstGeom prst="rect">
+            <a:avLst/>
+          </a:prstGeom>
+          <a:noFill/>
+        </p:spPr>
+        <p:txBody>
+          <a:bodyPr wrap="square" lIns="0" rIns="0" tIns="0" bIns="0" anchor="ctr">
+            <a:spAutoFit/>
+          </a:bodyPr>
+          <a:lstStyle/>
+          <a:p>
+            <a:pPr algn="ctr">
+              <a:lnSpc>
+                <a:spcPct val="95000"/>
+              </a:lnSpc>
+            </a:pPr>
+            <a:r>
+              <a:rPr sz="850" b="1" i="0">
+                <a:solidFill>
+                  <a:srgbClr val="FFFFFF"/>
+                </a:solidFill>
+                <a:latin typeface="Arial"/>
+              </a:rPr>
+              <a:t>Дата</a:t>
+            </a:r>
+          </a:p>
+        </p:txBody>
+      </p:sp>
+      <p:sp>
+        <p:nvSpPr>
+          <p:cNvPr id="11" name="Rectangle 10"/>
+          <p:cNvSpPr/>
+          <p:nvPr/>
+        </p:nvSpPr>
+        <p:spPr>
+          <a:xfrm>
+            <a:off x="1474470" y="3867912"/>
+            <a:ext cx="788670" cy="301752"/>
+          </a:xfrm>
+          <a:prstGeom prst="rect">
+            <a:avLst/>
+          </a:prstGeom>
+          <a:solidFill>
+            <a:srgbClr val="065A82"/>
+          </a:solidFill>
+          <a:ln>
+            <a:noFill/>
+          </a:ln>
+          <a:effectLst/>
+        </p:spPr>
+        <p:txBody>
+          <a:bodyPr rtlCol="0" anchor="ctr"/>
+          <a:lstStyle/>
+          <a:p>
+            <a:pPr algn="ctr"/>
+          </a:p>
+        </p:txBody>
+      </p:sp>
+      <p:sp>
+        <p:nvSpPr>
+          <p:cNvPr id="12" name="TextBox 11"/>
+          <p:cNvSpPr txBox="1"/>
+          <p:nvPr/>
+        </p:nvSpPr>
+        <p:spPr>
+          <a:xfrm>
+            <a:off x="1474470" y="3867912"/>
+            <a:ext cx="788670" cy="301752"/>
+          </a:xfrm>
+          <a:prstGeom prst="rect">
+            <a:avLst/>
+          </a:prstGeom>
+          <a:noFill/>
+        </p:spPr>
+        <p:txBody>
+          <a:bodyPr wrap="square" lIns="0" rIns="0" tIns="0" bIns="0" anchor="ctr">
+            <a:spAutoFit/>
+          </a:bodyPr>
+          <a:lstStyle/>
+          <a:p>
+            <a:pPr algn="ctr">
+              <a:lnSpc>
+                <a:spcPct val="95000"/>
+              </a:lnSpc>
+            </a:pPr>
+            <a:r>
+              <a:rPr sz="850" b="1" i="0">
+                <a:solidFill>
+                  <a:srgbClr val="FFFFFF"/>
+                </a:solidFill>
+                <a:latin typeface="Arial"/>
+              </a:rPr>
+              <a:t>№ накл.</a:t>
+            </a:r>
+          </a:p>
+        </p:txBody>
+      </p:sp>
+      <p:sp>
+        <p:nvSpPr>
+          <p:cNvPr id="13" name="Rectangle 12"/>
+          <p:cNvSpPr/>
+          <p:nvPr/>
+        </p:nvSpPr>
+        <p:spPr>
+          <a:xfrm>
+            <a:off x="2299716" y="3867912"/>
+            <a:ext cx="788670" cy="301752"/>
+          </a:xfrm>
+          <a:prstGeom prst="rect">
+            <a:avLst/>
+          </a:prstGeom>
+          <a:solidFill>
+            <a:srgbClr val="065A82"/>
+          </a:solidFill>
+          <a:ln>
+            <a:noFill/>
+          </a:ln>
+          <a:effectLst/>
+        </p:spPr>
+        <p:txBody>
+          <a:bodyPr rtlCol="0" anchor="ctr"/>
+          <a:lstStyle/>
+          <a:p>
+            <a:pPr algn="ctr"/>
+          </a:p>
+        </p:txBody>
+      </p:sp>
+      <p:sp>
+        <p:nvSpPr>
+          <p:cNvPr id="14" name="TextBox 13"/>
+          <p:cNvSpPr txBox="1"/>
+          <p:nvPr/>
+        </p:nvSpPr>
+        <p:spPr>
+          <a:xfrm>
+            <a:off x="2299716" y="3867912"/>
+            <a:ext cx="788670" cy="301752"/>
+          </a:xfrm>
+          <a:prstGeom prst="rect">
+            <a:avLst/>
+          </a:prstGeom>
+          <a:noFill/>
+        </p:spPr>
+        <p:txBody>
+          <a:bodyPr wrap="square" lIns="0" rIns="0" tIns="0" bIns="0" anchor="ctr">
+            <a:spAutoFit/>
+          </a:bodyPr>
+          <a:lstStyle/>
+          <a:p>
+            <a:pPr algn="ctr">
+              <a:lnSpc>
+                <a:spcPct val="95000"/>
+              </a:lnSpc>
+            </a:pPr>
+            <a:r>
+              <a:rPr sz="850" b="1" i="0">
+                <a:solidFill>
+                  <a:srgbClr val="FFFFFF"/>
+                </a:solidFill>
+                <a:latin typeface="Arial"/>
+              </a:rPr>
+              <a:t>Позиция</a:t>
+            </a:r>
+          </a:p>
+        </p:txBody>
+      </p:sp>
+      <p:sp>
+        <p:nvSpPr>
+          <p:cNvPr id="15" name="Rectangle 14"/>
+          <p:cNvSpPr/>
+          <p:nvPr/>
+        </p:nvSpPr>
+        <p:spPr>
+          <a:xfrm>
+            <a:off x="3124962" y="3867912"/>
+            <a:ext cx="788670" cy="301752"/>
+          </a:xfrm>
+          <a:prstGeom prst="rect">
+            <a:avLst/>
+          </a:prstGeom>
+          <a:solidFill>
+            <a:srgbClr val="065A82"/>
+          </a:solidFill>
+          <a:ln>
+            <a:noFill/>
+          </a:ln>
+          <a:effectLst/>
+        </p:spPr>
+        <p:txBody>
+          <a:bodyPr rtlCol="0" anchor="ctr"/>
+          <a:lstStyle/>
+          <a:p>
+            <a:pPr algn="ctr"/>
+          </a:p>
+        </p:txBody>
+      </p:sp>
+      <p:sp>
+        <p:nvSpPr>
+          <p:cNvPr id="16" name="TextBox 15"/>
+          <p:cNvSpPr txBox="1"/>
+          <p:nvPr/>
+        </p:nvSpPr>
+        <p:spPr>
+          <a:xfrm>
+            <a:off x="3124962" y="3867912"/>
+            <a:ext cx="788670" cy="301752"/>
+          </a:xfrm>
+          <a:prstGeom prst="rect">
+            <a:avLst/>
+          </a:prstGeom>
+          <a:noFill/>
+        </p:spPr>
+        <p:txBody>
+          <a:bodyPr wrap="square" lIns="0" rIns="0" tIns="0" bIns="0" anchor="ctr">
+            <a:spAutoFit/>
+          </a:bodyPr>
+          <a:lstStyle/>
+          <a:p>
+            <a:pPr algn="ctr">
+              <a:lnSpc>
+                <a:spcPct val="95000"/>
+              </a:lnSpc>
+            </a:pPr>
+            <a:r>
+              <a:rPr sz="850" b="1" i="0">
+                <a:solidFill>
+                  <a:srgbClr val="FFFFFF"/>
+                </a:solidFill>
+                <a:latin typeface="Arial"/>
+              </a:rPr>
+              <a:t>Сумма</a:t>
+            </a:r>
+          </a:p>
+        </p:txBody>
+      </p:sp>
+      <p:sp>
+        <p:nvSpPr>
+          <p:cNvPr id="17" name="Rectangle 16"/>
+          <p:cNvSpPr/>
+          <p:nvPr/>
+        </p:nvSpPr>
+        <p:spPr>
+          <a:xfrm>
+            <a:off x="649224" y="4192524"/>
+            <a:ext cx="788670" cy="301752"/>
+          </a:xfrm>
+          <a:prstGeom prst="rect">
+            <a:avLst/>
+          </a:prstGeom>
+          <a:solidFill>
+            <a:srgbClr val="F4F7FA"/>
+          </a:solidFill>
+          <a:ln w="8890">
+            <a:solidFill>
+              <a:srgbClr val="E5EAF0"/>
+            </a:solidFill>
+          </a:ln>
+          <a:effectLst/>
+        </p:spPr>
+        <p:txBody>
+          <a:bodyPr rtlCol="0" anchor="ctr"/>
+          <a:lstStyle/>
+          <a:p>
+            <a:pPr algn="ctr"/>
+          </a:p>
+        </p:txBody>
+      </p:sp>
+      <p:sp>
+        <p:nvSpPr>
+          <p:cNvPr id="18" name="TextBox 17"/>
+          <p:cNvSpPr txBox="1"/>
+          <p:nvPr/>
+        </p:nvSpPr>
+        <p:spPr>
+          <a:xfrm>
+            <a:off x="649224" y="4192524"/>
+            <a:ext cx="788670" cy="301752"/>
+          </a:xfrm>
+          <a:prstGeom prst="rect">
+            <a:avLst/>
+          </a:prstGeom>
+          <a:noFill/>
+        </p:spPr>
+        <p:txBody>
+          <a:bodyPr wrap="square" lIns="0" rIns="0" tIns="0" bIns="0" anchor="ctr">
+            <a:spAutoFit/>
+          </a:bodyPr>
+          <a:lstStyle/>
+          <a:p>
+            <a:pPr algn="ctr">
+              <a:lnSpc>
+                <a:spcPct val="115000"/>
+              </a:lnSpc>
+            </a:pPr>
+            <a:r>
+              <a:rPr sz="850" b="0" i="0">
+                <a:solidFill>
+                  <a:srgbClr val="6B7685"/>
+                </a:solidFill>
+                <a:latin typeface="Arial"/>
+              </a:rPr>
+              <a:t>24.03.2026</a:t>
+            </a:r>
+          </a:p>
+        </p:txBody>
+      </p:sp>
+      <p:sp>
+        <p:nvSpPr>
+          <p:cNvPr id="19" name="Rectangle 18"/>
+          <p:cNvSpPr/>
+          <p:nvPr/>
+        </p:nvSpPr>
+        <p:spPr>
+          <a:xfrm>
+            <a:off x="1474470" y="4192524"/>
+            <a:ext cx="788670" cy="301752"/>
+          </a:xfrm>
+          <a:prstGeom prst="rect">
+            <a:avLst/>
+          </a:prstGeom>
+          <a:solidFill>
+            <a:srgbClr val="F4F7FA"/>
+          </a:solidFill>
+          <a:ln w="8890">
+            <a:solidFill>
+              <a:srgbClr val="E5EAF0"/>
+            </a:solidFill>
+          </a:ln>
+          <a:effectLst/>
+        </p:spPr>
+        <p:txBody>
+          <a:bodyPr rtlCol="0" anchor="ctr"/>
+          <a:lstStyle/>
+          <a:p>
+            <a:pPr algn="ctr"/>
+          </a:p>
+        </p:txBody>
+      </p:sp>
+      <p:sp>
+        <p:nvSpPr>
+          <p:cNvPr id="20" name="TextBox 19"/>
+          <p:cNvSpPr txBox="1"/>
+          <p:nvPr/>
+        </p:nvSpPr>
+        <p:spPr>
+          <a:xfrm>
+            <a:off x="1474470" y="4192524"/>
+            <a:ext cx="788670" cy="301752"/>
+          </a:xfrm>
+          <a:prstGeom prst="rect">
+            <a:avLst/>
+          </a:prstGeom>
+          <a:noFill/>
+        </p:spPr>
+        <p:txBody>
+          <a:bodyPr wrap="square" lIns="0" rIns="0" tIns="0" bIns="0" anchor="ctr">
+            <a:spAutoFit/>
+          </a:bodyPr>
+          <a:lstStyle/>
+          <a:p>
+            <a:pPr algn="ctr">
+              <a:lnSpc>
+                <a:spcPct val="115000"/>
+              </a:lnSpc>
+            </a:pPr>
+            <a:r>
+              <a:rPr sz="850" b="0" i="0">
+                <a:solidFill>
+                  <a:srgbClr val="6B7685"/>
+                </a:solidFill>
+                <a:latin typeface="Arial"/>
+              </a:rPr>
+              <a:t>—</a:t>
+            </a:r>
+          </a:p>
+        </p:txBody>
+      </p:sp>
+      <p:sp>
+        <p:nvSpPr>
+          <p:cNvPr id="21" name="Rectangle 20"/>
+          <p:cNvSpPr/>
+          <p:nvPr/>
+        </p:nvSpPr>
+        <p:spPr>
+          <a:xfrm>
+            <a:off x="2299716" y="4192524"/>
+            <a:ext cx="788670" cy="301752"/>
+          </a:xfrm>
+          <a:prstGeom prst="rect">
+            <a:avLst/>
+          </a:prstGeom>
+          <a:solidFill>
+            <a:srgbClr val="F4F7FA"/>
+          </a:solidFill>
+          <a:ln w="8890">
+            <a:solidFill>
+              <a:srgbClr val="E5EAF0"/>
+            </a:solidFill>
+          </a:ln>
+          <a:effectLst/>
+        </p:spPr>
+        <p:txBody>
+          <a:bodyPr rtlCol="0" anchor="ctr"/>
+          <a:lstStyle/>
+          <a:p>
+            <a:pPr algn="ctr"/>
+          </a:p>
+        </p:txBody>
+      </p:sp>
+      <p:sp>
+        <p:nvSpPr>
+          <p:cNvPr id="22" name="TextBox 21"/>
+          <p:cNvSpPr txBox="1"/>
+          <p:nvPr/>
+        </p:nvSpPr>
+        <p:spPr>
+          <a:xfrm>
+            <a:off x="2299716" y="4192524"/>
+            <a:ext cx="788670" cy="301752"/>
+          </a:xfrm>
+          <a:prstGeom prst="rect">
+            <a:avLst/>
+          </a:prstGeom>
+          <a:noFill/>
+        </p:spPr>
+        <p:txBody>
+          <a:bodyPr wrap="square" lIns="0" rIns="0" tIns="0" bIns="0" anchor="ctr">
+            <a:spAutoFit/>
+          </a:bodyPr>
+          <a:lstStyle/>
+          <a:p>
+            <a:pPr algn="ctr">
+              <a:lnSpc>
+                <a:spcPct val="115000"/>
+              </a:lnSpc>
+            </a:pPr>
+            <a:r>
+              <a:rPr sz="850" b="0" i="0">
+                <a:solidFill>
+                  <a:srgbClr val="6B7685"/>
+                </a:solidFill>
+                <a:latin typeface="Arial"/>
+              </a:rPr>
+              <a:t>—</a:t>
+            </a:r>
+          </a:p>
+        </p:txBody>
+      </p:sp>
+      <p:sp>
+        <p:nvSpPr>
+          <p:cNvPr id="23" name="Rectangle 22"/>
+          <p:cNvSpPr/>
+          <p:nvPr/>
+        </p:nvSpPr>
+        <p:spPr>
+          <a:xfrm>
+            <a:off x="3124962" y="4192524"/>
+            <a:ext cx="788670" cy="301752"/>
+          </a:xfrm>
+          <a:prstGeom prst="rect">
+            <a:avLst/>
+          </a:prstGeom>
+          <a:solidFill>
+            <a:srgbClr val="F4F7FA"/>
+          </a:solidFill>
+          <a:ln w="8890">
+            <a:solidFill>
+              <a:srgbClr val="E5EAF0"/>
+            </a:solidFill>
+          </a:ln>
+          <a:effectLst/>
+        </p:spPr>
+        <p:txBody>
+          <a:bodyPr rtlCol="0" anchor="ctr"/>
+          <a:lstStyle/>
+          <a:p>
+            <a:pPr algn="ctr"/>
+          </a:p>
+        </p:txBody>
+      </p:sp>
+      <p:sp>
+        <p:nvSpPr>
+          <p:cNvPr id="24" name="TextBox 23"/>
+          <p:cNvSpPr txBox="1"/>
+          <p:nvPr/>
+        </p:nvSpPr>
+        <p:spPr>
+          <a:xfrm>
+            <a:off x="3124962" y="4192524"/>
+            <a:ext cx="788670" cy="301752"/>
+          </a:xfrm>
+          <a:prstGeom prst="rect">
+            <a:avLst/>
+          </a:prstGeom>
+          <a:noFill/>
+        </p:spPr>
+        <p:txBody>
+          <a:bodyPr wrap="square" lIns="0" rIns="0" tIns="0" bIns="0" anchor="ctr">
+            <a:spAutoFit/>
+          </a:bodyPr>
+          <a:lstStyle/>
+          <a:p>
+            <a:pPr algn="ctr">
+              <a:lnSpc>
+                <a:spcPct val="115000"/>
+              </a:lnSpc>
+            </a:pPr>
+            <a:r>
+              <a:rPr sz="850" b="0" i="0">
+                <a:solidFill>
+                  <a:srgbClr val="6B7685"/>
+                </a:solidFill>
+                <a:latin typeface="Arial"/>
+              </a:rPr>
+              <a:t>—</a:t>
+            </a:r>
+          </a:p>
+        </p:txBody>
+      </p:sp>
+      <p:sp>
+        <p:nvSpPr>
+          <p:cNvPr id="25" name="Rectangle 24"/>
+          <p:cNvSpPr/>
+          <p:nvPr/>
+        </p:nvSpPr>
+        <p:spPr>
+          <a:xfrm>
+            <a:off x="649224" y="4517136"/>
+            <a:ext cx="788670" cy="301752"/>
+          </a:xfrm>
+          <a:prstGeom prst="rect">
+            <a:avLst/>
+          </a:prstGeom>
+          <a:solidFill>
+            <a:srgbClr val="F4F7FA"/>
+          </a:solidFill>
+          <a:ln w="8890">
+            <a:solidFill>
+              <a:srgbClr val="E5EAF0"/>
+            </a:solidFill>
+          </a:ln>
+          <a:effectLst/>
+        </p:spPr>
+        <p:txBody>
+          <a:bodyPr rtlCol="0" anchor="ctr"/>
+          <a:lstStyle/>
+          <a:p>
+            <a:pPr algn="ctr"/>
+          </a:p>
+        </p:txBody>
+      </p:sp>
+      <p:sp>
+        <p:nvSpPr>
+          <p:cNvPr id="26" name="TextBox 25"/>
+          <p:cNvSpPr txBox="1"/>
+          <p:nvPr/>
+        </p:nvSpPr>
+        <p:spPr>
+          <a:xfrm>
+            <a:off x="649224" y="4517136"/>
+            <a:ext cx="788670" cy="301752"/>
+          </a:xfrm>
+          <a:prstGeom prst="rect">
+            <a:avLst/>
+          </a:prstGeom>
+          <a:noFill/>
+        </p:spPr>
+        <p:txBody>
+          <a:bodyPr wrap="square" lIns="0" rIns="0" tIns="0" bIns="0" anchor="ctr">
+            <a:spAutoFit/>
+          </a:bodyPr>
+          <a:lstStyle/>
+          <a:p>
+            <a:pPr algn="ctr">
+              <a:lnSpc>
+                <a:spcPct val="115000"/>
+              </a:lnSpc>
+            </a:pPr>
+            <a:r>
+              <a:rPr sz="850" b="0" i="0">
+                <a:solidFill>
+                  <a:srgbClr val="6B7685"/>
+                </a:solidFill>
+                <a:latin typeface="Arial"/>
+              </a:rPr>
+              <a:t>—</a:t>
+            </a:r>
+          </a:p>
+        </p:txBody>
+      </p:sp>
+      <p:sp>
+        <p:nvSpPr>
+          <p:cNvPr id="27" name="Rectangle 26"/>
+          <p:cNvSpPr/>
+          <p:nvPr/>
+        </p:nvSpPr>
+        <p:spPr>
+          <a:xfrm>
+            <a:off x="1474470" y="4517136"/>
+            <a:ext cx="788670" cy="301752"/>
+          </a:xfrm>
+          <a:prstGeom prst="rect">
+            <a:avLst/>
+          </a:prstGeom>
+          <a:solidFill>
+            <a:srgbClr val="F4F7FA"/>
+          </a:solidFill>
+          <a:ln w="8890">
+            <a:solidFill>
+              <a:srgbClr val="E5EAF0"/>
+            </a:solidFill>
+          </a:ln>
+          <a:effectLst/>
+        </p:spPr>
+        <p:txBody>
+          <a:bodyPr rtlCol="0" anchor="ctr"/>
+          <a:lstStyle/>
+          <a:p>
+            <a:pPr algn="ctr"/>
+          </a:p>
+        </p:txBody>
+      </p:sp>
+      <p:sp>
+        <p:nvSpPr>
+          <p:cNvPr id="28" name="TextBox 27"/>
+          <p:cNvSpPr txBox="1"/>
+          <p:nvPr/>
+        </p:nvSpPr>
+        <p:spPr>
+          <a:xfrm>
+            <a:off x="1474470" y="4517136"/>
+            <a:ext cx="788670" cy="301752"/>
+          </a:xfrm>
+          <a:prstGeom prst="rect">
+            <a:avLst/>
+          </a:prstGeom>
+          <a:noFill/>
+        </p:spPr>
+        <p:txBody>
+          <a:bodyPr wrap="square" lIns="0" rIns="0" tIns="0" bIns="0" anchor="ctr">
+            <a:spAutoFit/>
+          </a:bodyPr>
+          <a:lstStyle/>
+          <a:p>
+            <a:pPr algn="ctr">
+              <a:lnSpc>
+                <a:spcPct val="115000"/>
+              </a:lnSpc>
+            </a:pPr>
+            <a:r>
+              <a:rPr sz="850" b="0" i="0">
+                <a:solidFill>
+                  <a:srgbClr val="6B7685"/>
+                </a:solidFill>
+                <a:latin typeface="Arial"/>
+              </a:rPr>
+              <a:t>—</a:t>
+            </a:r>
+          </a:p>
+        </p:txBody>
+      </p:sp>
+      <p:sp>
+        <p:nvSpPr>
+          <p:cNvPr id="29" name="Rectangle 28"/>
+          <p:cNvSpPr/>
+          <p:nvPr/>
+        </p:nvSpPr>
+        <p:spPr>
+          <a:xfrm>
+            <a:off x="2299716" y="4517136"/>
+            <a:ext cx="788670" cy="301752"/>
+          </a:xfrm>
+          <a:prstGeom prst="rect">
+            <a:avLst/>
+          </a:prstGeom>
+          <a:solidFill>
+            <a:srgbClr val="F4F7FA"/>
+          </a:solidFill>
+          <a:ln w="8890">
+            <a:solidFill>
+              <a:srgbClr val="E5EAF0"/>
+            </a:solidFill>
+          </a:ln>
+          <a:effectLst/>
+        </p:spPr>
+        <p:txBody>
+          <a:bodyPr rtlCol="0" anchor="ctr"/>
+          <a:lstStyle/>
+          <a:p>
+            <a:pPr algn="ctr"/>
+          </a:p>
+        </p:txBody>
+      </p:sp>
+      <p:sp>
+        <p:nvSpPr>
+          <p:cNvPr id="30" name="TextBox 29"/>
+          <p:cNvSpPr txBox="1"/>
+          <p:nvPr/>
+        </p:nvSpPr>
+        <p:spPr>
+          <a:xfrm>
+            <a:off x="2299716" y="4517136"/>
+            <a:ext cx="788670" cy="301752"/>
+          </a:xfrm>
+          <a:prstGeom prst="rect">
+            <a:avLst/>
+          </a:prstGeom>
+          <a:noFill/>
+        </p:spPr>
+        <p:txBody>
+          <a:bodyPr wrap="square" lIns="0" rIns="0" tIns="0" bIns="0" anchor="ctr">
+            <a:spAutoFit/>
+          </a:bodyPr>
+          <a:lstStyle/>
+          <a:p>
+            <a:pPr algn="ctr">
+              <a:lnSpc>
+                <a:spcPct val="115000"/>
+              </a:lnSpc>
+            </a:pPr>
+            <a:r>
+              <a:rPr sz="850" b="0" i="0">
+                <a:solidFill>
+                  <a:srgbClr val="6B7685"/>
+                </a:solidFill>
+                <a:latin typeface="Arial"/>
+              </a:rPr>
+              <a:t>—</a:t>
+            </a:r>
+          </a:p>
+        </p:txBody>
+      </p:sp>
+      <p:sp>
+        <p:nvSpPr>
+          <p:cNvPr id="31" name="Rectangle 30"/>
+          <p:cNvSpPr/>
+          <p:nvPr/>
+        </p:nvSpPr>
+        <p:spPr>
+          <a:xfrm>
+            <a:off x="3124962" y="4517136"/>
+            <a:ext cx="788670" cy="301752"/>
+          </a:xfrm>
+          <a:prstGeom prst="rect">
+            <a:avLst/>
+          </a:prstGeom>
+          <a:solidFill>
+            <a:srgbClr val="F4F7FA"/>
+          </a:solidFill>
+          <a:ln w="8890">
+            <a:solidFill>
+              <a:srgbClr val="E5EAF0"/>
+            </a:solidFill>
+          </a:ln>
+          <a:effectLst/>
+        </p:spPr>
+        <p:txBody>
+          <a:bodyPr rtlCol="0" anchor="ctr"/>
+          <a:lstStyle/>
+          <a:p>
+            <a:pPr algn="ctr"/>
+          </a:p>
+        </p:txBody>
+      </p:sp>
+      <p:sp>
+        <p:nvSpPr>
+          <p:cNvPr id="32" name="TextBox 31"/>
+          <p:cNvSpPr txBox="1"/>
+          <p:nvPr/>
+        </p:nvSpPr>
+        <p:spPr>
+          <a:xfrm>
+            <a:off x="3124962" y="4517136"/>
+            <a:ext cx="788670" cy="301752"/>
+          </a:xfrm>
+          <a:prstGeom prst="rect">
+            <a:avLst/>
+          </a:prstGeom>
+          <a:noFill/>
+        </p:spPr>
+        <p:txBody>
+          <a:bodyPr wrap="square" lIns="0" rIns="0" tIns="0" bIns="0" anchor="ctr">
+            <a:spAutoFit/>
+          </a:bodyPr>
+          <a:lstStyle/>
+          <a:p>
+            <a:pPr algn="ctr">
+              <a:lnSpc>
+                <a:spcPct val="115000"/>
+              </a:lnSpc>
+            </a:pPr>
+            <a:r>
+              <a:rPr sz="850" b="0" i="0">
+                <a:solidFill>
+                  <a:srgbClr val="6B7685"/>
+                </a:solidFill>
+                <a:latin typeface="Arial"/>
+              </a:rPr>
+              <a:t>—</a:t>
+            </a:r>
+          </a:p>
+        </p:txBody>
+      </p:sp>
+      <p:sp>
+        <p:nvSpPr>
+          <p:cNvPr id="33" name="Rounded Rectangle 32"/>
+          <p:cNvSpPr/>
+          <p:nvPr/>
+        </p:nvSpPr>
+        <p:spPr>
+          <a:xfrm>
+            <a:off x="4297680" y="3429000"/>
+            <a:ext cx="3593592" cy="1965960"/>
           </a:xfrm>
           <a:prstGeom prst="roundRect">
             <a:avLst>
-              <a:gd name="adj" fmla="val 12578"/>
+              <a:gd name="adj" fmla="val 15503"/>
             </a:avLst>
           </a:prstGeom>
           <a:solidFill>
@@ -28856,14 +29509,14 @@
       </p:sp>
       <p:sp>
         <p:nvSpPr>
-          <p:cNvPr id="9" name="TextBox 8"/>
+          <p:cNvPr id="34" name="TextBox 33"/>
           <p:cNvSpPr txBox="1"/>
           <p:nvPr/>
         </p:nvSpPr>
         <p:spPr>
           <a:xfrm>
-            <a:off x="649224" y="3557016"/>
-            <a:ext cx="3300984" cy="365760"/>
+            <a:off x="4443984" y="3520440"/>
+            <a:ext cx="3300984" cy="310896"/>
           </a:xfrm>
           <a:prstGeom prst="rect">
             <a:avLst/>
@@ -28878,31 +29531,31 @@
           <a:p>
             <a:pPr algn="l">
               <a:lnSpc>
-                <a:spcPct val="110000"/>
+                <a:spcPct val="105000"/>
               </a:lnSpc>
             </a:pPr>
             <a:r>
-              <a:rPr sz="1250" b="1" i="0">
+              <a:rPr sz="1200" b="1" i="0">
                 <a:solidFill>
                   <a:srgbClr val="065A82"/>
                 </a:solidFill>
                 <a:latin typeface="Arial"/>
               </a:rPr>
-              <a:t>Документ поставщика A</a:t>
-            </a:r>
-          </a:p>
-        </p:txBody>
-      </p:sp>
-      <p:sp>
-        <p:nvSpPr>
-          <p:cNvPr id="10" name="Rectangle 9"/>
+              <a:t>Документ поставщика Б</a:t>
+            </a:r>
+          </a:p>
+        </p:txBody>
+      </p:sp>
+      <p:sp>
+        <p:nvSpPr>
+          <p:cNvPr id="35" name="Rectangle 34"/>
           <p:cNvSpPr/>
           <p:nvPr/>
         </p:nvSpPr>
         <p:spPr>
           <a:xfrm>
-            <a:off x="649224" y="3977639"/>
-            <a:ext cx="788670" cy="365760"/>
+            <a:off x="4443984" y="3867912"/>
+            <a:ext cx="788670" cy="301752"/>
           </a:xfrm>
           <a:prstGeom prst="rect">
             <a:avLst/>
@@ -28925,14 +29578,14 @@
       </p:sp>
       <p:sp>
         <p:nvSpPr>
-          <p:cNvPr id="11" name="TextBox 10"/>
+          <p:cNvPr id="36" name="TextBox 35"/>
           <p:cNvSpPr txBox="1"/>
           <p:nvPr/>
         </p:nvSpPr>
         <p:spPr>
           <a:xfrm>
-            <a:off x="649224" y="3977639"/>
-            <a:ext cx="788670" cy="365760"/>
+            <a:off x="4443984" y="3867912"/>
+            <a:ext cx="788670" cy="301752"/>
           </a:xfrm>
           <a:prstGeom prst="rect">
             <a:avLst/>
@@ -28964,14 +29617,14 @@
       </p:sp>
       <p:sp>
         <p:nvSpPr>
-          <p:cNvPr id="12" name="Rectangle 11"/>
+          <p:cNvPr id="37" name="Rectangle 36"/>
           <p:cNvSpPr/>
           <p:nvPr/>
         </p:nvSpPr>
         <p:spPr>
           <a:xfrm>
-            <a:off x="1474470" y="3977639"/>
-            <a:ext cx="788670" cy="365760"/>
+            <a:off x="5269230" y="3867912"/>
+            <a:ext cx="788670" cy="301752"/>
           </a:xfrm>
           <a:prstGeom prst="rect">
             <a:avLst/>
@@ -28994,14 +29647,14 @@
       </p:sp>
       <p:sp>
         <p:nvSpPr>
-          <p:cNvPr id="13" name="TextBox 12"/>
+          <p:cNvPr id="38" name="TextBox 37"/>
           <p:cNvSpPr txBox="1"/>
           <p:nvPr/>
         </p:nvSpPr>
         <p:spPr>
           <a:xfrm>
-            <a:off x="1474470" y="3977639"/>
-            <a:ext cx="788670" cy="365760"/>
+            <a:off x="5269230" y="3867912"/>
+            <a:ext cx="788670" cy="301752"/>
           </a:xfrm>
           <a:prstGeom prst="rect">
             <a:avLst/>
@@ -29033,14 +29686,14 @@
       </p:sp>
       <p:sp>
         <p:nvSpPr>
-          <p:cNvPr id="14" name="Rectangle 13"/>
+          <p:cNvPr id="39" name="Rectangle 38"/>
           <p:cNvSpPr/>
           <p:nvPr/>
         </p:nvSpPr>
         <p:spPr>
           <a:xfrm>
-            <a:off x="2299716" y="3977639"/>
-            <a:ext cx="788670" cy="365760"/>
+            <a:off x="6094476" y="3867912"/>
+            <a:ext cx="788670" cy="301752"/>
           </a:xfrm>
           <a:prstGeom prst="rect">
             <a:avLst/>
@@ -29063,14 +29716,14 @@
       </p:sp>
       <p:sp>
         <p:nvSpPr>
-          <p:cNvPr id="15" name="TextBox 14"/>
+          <p:cNvPr id="40" name="TextBox 39"/>
           <p:cNvSpPr txBox="1"/>
           <p:nvPr/>
         </p:nvSpPr>
         <p:spPr>
           <a:xfrm>
-            <a:off x="2299716" y="3977639"/>
-            <a:ext cx="788670" cy="365760"/>
+            <a:off x="6094476" y="3867912"/>
+            <a:ext cx="788670" cy="301752"/>
           </a:xfrm>
           <a:prstGeom prst="rect">
             <a:avLst/>
@@ -29102,14 +29755,14 @@
       </p:sp>
       <p:sp>
         <p:nvSpPr>
-          <p:cNvPr id="16" name="Rectangle 15"/>
+          <p:cNvPr id="41" name="Rectangle 40"/>
           <p:cNvSpPr/>
           <p:nvPr/>
         </p:nvSpPr>
         <p:spPr>
           <a:xfrm>
-            <a:off x="3124962" y="3977639"/>
-            <a:ext cx="788670" cy="365760"/>
+            <a:off x="6919722" y="3867912"/>
+            <a:ext cx="788670" cy="301752"/>
           </a:xfrm>
           <a:prstGeom prst="rect">
             <a:avLst/>
@@ -29132,14 +29785,14 @@
       </p:sp>
       <p:sp>
         <p:nvSpPr>
-          <p:cNvPr id="17" name="TextBox 16"/>
+          <p:cNvPr id="42" name="TextBox 41"/>
           <p:cNvSpPr txBox="1"/>
           <p:nvPr/>
         </p:nvSpPr>
         <p:spPr>
           <a:xfrm>
-            <a:off x="3124962" y="3977639"/>
-            <a:ext cx="788670" cy="365760"/>
+            <a:off x="6919722" y="3867912"/>
+            <a:ext cx="788670" cy="301752"/>
           </a:xfrm>
           <a:prstGeom prst="rect">
             <a:avLst/>
@@ -29171,14 +29824,14 @@
       </p:sp>
       <p:sp>
         <p:nvSpPr>
-          <p:cNvPr id="18" name="Rectangle 17"/>
+          <p:cNvPr id="43" name="Rectangle 42"/>
           <p:cNvSpPr/>
           <p:nvPr/>
         </p:nvSpPr>
         <p:spPr>
           <a:xfrm>
-            <a:off x="649224" y="4370832"/>
-            <a:ext cx="788670" cy="365760"/>
+            <a:off x="4443984" y="4192524"/>
+            <a:ext cx="788670" cy="301752"/>
           </a:xfrm>
           <a:prstGeom prst="rect">
             <a:avLst/>
@@ -29203,14 +29856,14 @@
       </p:sp>
       <p:sp>
         <p:nvSpPr>
-          <p:cNvPr id="19" name="TextBox 18"/>
+          <p:cNvPr id="44" name="TextBox 43"/>
           <p:cNvSpPr txBox="1"/>
           <p:nvPr/>
         </p:nvSpPr>
         <p:spPr>
           <a:xfrm>
-            <a:off x="649224" y="4370832"/>
-            <a:ext cx="788670" cy="365760"/>
+            <a:off x="4443984" y="4192524"/>
+            <a:ext cx="788670" cy="301752"/>
           </a:xfrm>
           <a:prstGeom prst="rect">
             <a:avLst/>
@@ -29242,14 +29895,14 @@
       </p:sp>
       <p:sp>
         <p:nvSpPr>
-          <p:cNvPr id="20" name="Rectangle 19"/>
+          <p:cNvPr id="45" name="Rectangle 44"/>
           <p:cNvSpPr/>
           <p:nvPr/>
         </p:nvSpPr>
         <p:spPr>
           <a:xfrm>
-            <a:off x="1474470" y="4370832"/>
-            <a:ext cx="788670" cy="365760"/>
+            <a:off x="5269230" y="4192524"/>
+            <a:ext cx="788670" cy="301752"/>
           </a:xfrm>
           <a:prstGeom prst="rect">
             <a:avLst/>
@@ -29274,14 +29927,14 @@
       </p:sp>
       <p:sp>
         <p:nvSpPr>
-          <p:cNvPr id="21" name="TextBox 20"/>
+          <p:cNvPr id="46" name="TextBox 45"/>
           <p:cNvSpPr txBox="1"/>
           <p:nvPr/>
         </p:nvSpPr>
         <p:spPr>
           <a:xfrm>
-            <a:off x="1474470" y="4370832"/>
-            <a:ext cx="788670" cy="365760"/>
+            <a:off x="5269230" y="4192524"/>
+            <a:ext cx="788670" cy="301752"/>
           </a:xfrm>
           <a:prstGeom prst="rect">
             <a:avLst/>
@@ -29313,14 +29966,14 @@
       </p:sp>
       <p:sp>
         <p:nvSpPr>
-          <p:cNvPr id="22" name="Rectangle 21"/>
+          <p:cNvPr id="47" name="Rectangle 46"/>
           <p:cNvSpPr/>
           <p:nvPr/>
         </p:nvSpPr>
         <p:spPr>
           <a:xfrm>
-            <a:off x="2299716" y="4370832"/>
-            <a:ext cx="788670" cy="365760"/>
+            <a:off x="6094476" y="4192524"/>
+            <a:ext cx="788670" cy="301752"/>
           </a:xfrm>
           <a:prstGeom prst="rect">
             <a:avLst/>
@@ -29345,14 +29998,14 @@
       </p:sp>
       <p:sp>
         <p:nvSpPr>
-          <p:cNvPr id="23" name="TextBox 22"/>
+          <p:cNvPr id="48" name="TextBox 47"/>
           <p:cNvSpPr txBox="1"/>
           <p:nvPr/>
         </p:nvSpPr>
         <p:spPr>
           <a:xfrm>
-            <a:off x="2299716" y="4370832"/>
-            <a:ext cx="788670" cy="365760"/>
+            <a:off x="6094476" y="4192524"/>
+            <a:ext cx="788670" cy="301752"/>
           </a:xfrm>
           <a:prstGeom prst="rect">
             <a:avLst/>
@@ -29384,14 +30037,14 @@
       </p:sp>
       <p:sp>
         <p:nvSpPr>
-          <p:cNvPr id="24" name="Rectangle 23"/>
+          <p:cNvPr id="49" name="Rectangle 48"/>
           <p:cNvSpPr/>
           <p:nvPr/>
         </p:nvSpPr>
         <p:spPr>
           <a:xfrm>
-            <a:off x="3124962" y="4370832"/>
-            <a:ext cx="788670" cy="365760"/>
+            <a:off x="6919722" y="4192524"/>
+            <a:ext cx="788670" cy="301752"/>
           </a:xfrm>
           <a:prstGeom prst="rect">
             <a:avLst/>
@@ -29416,14 +30069,14 @@
       </p:sp>
       <p:sp>
         <p:nvSpPr>
-          <p:cNvPr id="25" name="TextBox 24"/>
+          <p:cNvPr id="50" name="TextBox 49"/>
           <p:cNvSpPr txBox="1"/>
           <p:nvPr/>
         </p:nvSpPr>
         <p:spPr>
           <a:xfrm>
-            <a:off x="3124962" y="4370832"/>
-            <a:ext cx="788670" cy="365760"/>
+            <a:off x="6919722" y="4192524"/>
+            <a:ext cx="788670" cy="301752"/>
           </a:xfrm>
           <a:prstGeom prst="rect">
             <a:avLst/>
@@ -29455,14 +30108,14 @@
       </p:sp>
       <p:sp>
         <p:nvSpPr>
-          <p:cNvPr id="26" name="Rectangle 25"/>
+          <p:cNvPr id="51" name="Rectangle 50"/>
           <p:cNvSpPr/>
           <p:nvPr/>
         </p:nvSpPr>
         <p:spPr>
           <a:xfrm>
-            <a:off x="649224" y="4764023"/>
-            <a:ext cx="788670" cy="365760"/>
+            <a:off x="4443984" y="4517136"/>
+            <a:ext cx="788670" cy="301752"/>
           </a:xfrm>
           <a:prstGeom prst="rect">
             <a:avLst/>
@@ -29487,14 +30140,14 @@
       </p:sp>
       <p:sp>
         <p:nvSpPr>
-          <p:cNvPr id="27" name="TextBox 26"/>
+          <p:cNvPr id="52" name="TextBox 51"/>
           <p:cNvSpPr txBox="1"/>
           <p:nvPr/>
         </p:nvSpPr>
         <p:spPr>
           <a:xfrm>
-            <a:off x="649224" y="4764023"/>
-            <a:ext cx="788670" cy="365760"/>
+            <a:off x="4443984" y="4517136"/>
+            <a:ext cx="788670" cy="301752"/>
           </a:xfrm>
           <a:prstGeom prst="rect">
             <a:avLst/>
@@ -29526,14 +30179,14 @@
       </p:sp>
       <p:sp>
         <p:nvSpPr>
-          <p:cNvPr id="28" name="Rectangle 27"/>
+          <p:cNvPr id="53" name="Rectangle 52"/>
           <p:cNvSpPr/>
           <p:nvPr/>
         </p:nvSpPr>
         <p:spPr>
           <a:xfrm>
-            <a:off x="1474470" y="4764023"/>
-            <a:ext cx="788670" cy="365760"/>
+            <a:off x="5269230" y="4517136"/>
+            <a:ext cx="788670" cy="301752"/>
           </a:xfrm>
           <a:prstGeom prst="rect">
             <a:avLst/>
@@ -29558,14 +30211,14 @@
       </p:sp>
       <p:sp>
         <p:nvSpPr>
-          <p:cNvPr id="29" name="TextBox 28"/>
+          <p:cNvPr id="54" name="TextBox 53"/>
           <p:cNvSpPr txBox="1"/>
           <p:nvPr/>
         </p:nvSpPr>
         <p:spPr>
           <a:xfrm>
-            <a:off x="1474470" y="4764023"/>
-            <a:ext cx="788670" cy="365760"/>
+            <a:off x="5269230" y="4517136"/>
+            <a:ext cx="788670" cy="301752"/>
           </a:xfrm>
           <a:prstGeom prst="rect">
             <a:avLst/>
@@ -29597,14 +30250,14 @@
       </p:sp>
       <p:sp>
         <p:nvSpPr>
-          <p:cNvPr id="30" name="Rectangle 29"/>
+          <p:cNvPr id="55" name="Rectangle 54"/>
           <p:cNvSpPr/>
           <p:nvPr/>
         </p:nvSpPr>
         <p:spPr>
           <a:xfrm>
-            <a:off x="2299716" y="4764023"/>
-            <a:ext cx="788670" cy="365760"/>
+            <a:off x="6094476" y="4517136"/>
+            <a:ext cx="788670" cy="301752"/>
           </a:xfrm>
           <a:prstGeom prst="rect">
             <a:avLst/>
@@ -29629,14 +30282,14 @@
       </p:sp>
       <p:sp>
         <p:nvSpPr>
-          <p:cNvPr id="31" name="TextBox 30"/>
+          <p:cNvPr id="56" name="TextBox 55"/>
           <p:cNvSpPr txBox="1"/>
           <p:nvPr/>
         </p:nvSpPr>
         <p:spPr>
           <a:xfrm>
-            <a:off x="2299716" y="4764023"/>
-            <a:ext cx="788670" cy="365760"/>
+            <a:off x="6094476" y="4517136"/>
+            <a:ext cx="788670" cy="301752"/>
           </a:xfrm>
           <a:prstGeom prst="rect">
             <a:avLst/>
@@ -29668,14 +30321,14 @@
       </p:sp>
       <p:sp>
         <p:nvSpPr>
-          <p:cNvPr id="32" name="Rectangle 31"/>
+          <p:cNvPr id="57" name="Rectangle 56"/>
           <p:cNvSpPr/>
           <p:nvPr/>
         </p:nvSpPr>
         <p:spPr>
           <a:xfrm>
-            <a:off x="3124962" y="4764023"/>
-            <a:ext cx="788670" cy="365760"/>
+            <a:off x="6919722" y="4517136"/>
+            <a:ext cx="788670" cy="301752"/>
           </a:xfrm>
           <a:prstGeom prst="rect">
             <a:avLst/>
@@ -29700,14 +30353,14 @@
       </p:sp>
       <p:sp>
         <p:nvSpPr>
-          <p:cNvPr id="33" name="TextBox 32"/>
+          <p:cNvPr id="58" name="TextBox 57"/>
           <p:cNvSpPr txBox="1"/>
           <p:nvPr/>
         </p:nvSpPr>
         <p:spPr>
           <a:xfrm>
-            <a:off x="3124962" y="4764023"/>
-            <a:ext cx="788670" cy="365760"/>
+            <a:off x="6919722" y="4517136"/>
+            <a:ext cx="788670" cy="301752"/>
           </a:xfrm>
           <a:prstGeom prst="rect">
             <a:avLst/>
@@ -29739,26 +30392,26 @@
       </p:sp>
       <p:sp>
         <p:nvSpPr>
-          <p:cNvPr id="34" name="Rounded Rectangle 33"/>
+          <p:cNvPr id="59" name="Rounded Rectangle 58"/>
           <p:cNvSpPr/>
           <p:nvPr/>
         </p:nvSpPr>
         <p:spPr>
           <a:xfrm>
-            <a:off x="4297680" y="3447288"/>
-            <a:ext cx="3593592" cy="2423160"/>
+            <a:off x="8092440" y="3429000"/>
+            <a:ext cx="3593592" cy="1965960"/>
           </a:xfrm>
           <a:prstGeom prst="roundRect">
             <a:avLst>
-              <a:gd name="adj" fmla="val 12578"/>
+              <a:gd name="adj" fmla="val 15503"/>
             </a:avLst>
           </a:prstGeom>
           <a:solidFill>
             <a:srgbClr val="F4F7FA"/>
           </a:solidFill>
-          <a:ln w="19050">
+          <a:ln w="22860">
             <a:solidFill>
-              <a:srgbClr val="1C7293"/>
+              <a:srgbClr val="F0AB00"/>
             </a:solidFill>
           </a:ln>
           <a:effectLst/>
@@ -29773,14 +30426,14 @@
       </p:sp>
       <p:sp>
         <p:nvSpPr>
-          <p:cNvPr id="35" name="TextBox 34"/>
+          <p:cNvPr id="60" name="TextBox 59"/>
           <p:cNvSpPr txBox="1"/>
           <p:nvPr/>
         </p:nvSpPr>
         <p:spPr>
           <a:xfrm>
-            <a:off x="4443984" y="3557016"/>
-            <a:ext cx="3300984" cy="365760"/>
+            <a:off x="8238744" y="3520440"/>
+            <a:ext cx="3300984" cy="310896"/>
           </a:xfrm>
           <a:prstGeom prst="rect">
             <a:avLst/>
@@ -29795,37 +30448,37 @@
           <a:p>
             <a:pPr algn="l">
               <a:lnSpc>
-                <a:spcPct val="110000"/>
+                <a:spcPct val="105000"/>
               </a:lnSpc>
             </a:pPr>
             <a:r>
-              <a:rPr sz="1250" b="1" i="0">
-                <a:solidFill>
-                  <a:srgbClr val="065A82"/>
-                </a:solidFill>
-                <a:latin typeface="Arial"/>
-              </a:rPr>
-              <a:t>Документ поставщика Б</a:t>
-            </a:r>
-          </a:p>
-        </p:txBody>
-      </p:sp>
-      <p:sp>
-        <p:nvSpPr>
-          <p:cNvPr id="36" name="Rectangle 35"/>
+              <a:rPr sz="1200" b="1" i="0">
+                <a:solidFill>
+                  <a:srgbClr val="21295C"/>
+                </a:solidFill>
+                <a:latin typeface="Arial"/>
+              </a:rPr>
+              <a:t>Целевая таблица в 1С</a:t>
+            </a:r>
+          </a:p>
+        </p:txBody>
+      </p:sp>
+      <p:sp>
+        <p:nvSpPr>
+          <p:cNvPr id="61" name="Rectangle 60"/>
           <p:cNvSpPr/>
           <p:nvPr/>
         </p:nvSpPr>
         <p:spPr>
           <a:xfrm>
-            <a:off x="4443984" y="3977639"/>
-            <a:ext cx="788670" cy="365760"/>
+            <a:off x="8238744" y="3867912"/>
+            <a:ext cx="788670" cy="301752"/>
           </a:xfrm>
           <a:prstGeom prst="rect">
             <a:avLst/>
           </a:prstGeom>
           <a:solidFill>
-            <a:srgbClr val="065A82"/>
+            <a:srgbClr val="F0AB00"/>
           </a:solidFill>
           <a:ln>
             <a:noFill/>
@@ -29842,14 +30495,14 @@
       </p:sp>
       <p:sp>
         <p:nvSpPr>
-          <p:cNvPr id="37" name="TextBox 36"/>
+          <p:cNvPr id="62" name="TextBox 61"/>
           <p:cNvSpPr txBox="1"/>
           <p:nvPr/>
         </p:nvSpPr>
         <p:spPr>
           <a:xfrm>
-            <a:off x="4443984" y="3977639"/>
-            <a:ext cx="788670" cy="365760"/>
+            <a:off x="8238744" y="3867912"/>
+            <a:ext cx="788670" cy="301752"/>
           </a:xfrm>
           <a:prstGeom prst="rect">
             <a:avLst/>
@@ -29870,7 +30523,7 @@
             <a:r>
               <a:rPr sz="850" b="1" i="0">
                 <a:solidFill>
-                  <a:srgbClr val="FFFFFF"/>
+                  <a:srgbClr val="21295C"/>
                 </a:solidFill>
                 <a:latin typeface="Arial"/>
               </a:rPr>
@@ -29881,20 +30534,20 @@
       </p:sp>
       <p:sp>
         <p:nvSpPr>
-          <p:cNvPr id="38" name="Rectangle 37"/>
+          <p:cNvPr id="63" name="Rectangle 62"/>
           <p:cNvSpPr/>
           <p:nvPr/>
         </p:nvSpPr>
         <p:spPr>
           <a:xfrm>
-            <a:off x="5269230" y="3977639"/>
-            <a:ext cx="788670" cy="365760"/>
+            <a:off x="9063990" y="3867912"/>
+            <a:ext cx="788670" cy="301752"/>
           </a:xfrm>
           <a:prstGeom prst="rect">
             <a:avLst/>
           </a:prstGeom>
           <a:solidFill>
-            <a:srgbClr val="065A82"/>
+            <a:srgbClr val="F0AB00"/>
           </a:solidFill>
           <a:ln>
             <a:noFill/>
@@ -29911,14 +30564,14 @@
       </p:sp>
       <p:sp>
         <p:nvSpPr>
-          <p:cNvPr id="39" name="TextBox 38"/>
+          <p:cNvPr id="64" name="TextBox 63"/>
           <p:cNvSpPr txBox="1"/>
           <p:nvPr/>
         </p:nvSpPr>
         <p:spPr>
           <a:xfrm>
-            <a:off x="5269230" y="3977639"/>
-            <a:ext cx="788670" cy="365760"/>
+            <a:off x="9063990" y="3867912"/>
+            <a:ext cx="788670" cy="301752"/>
           </a:xfrm>
           <a:prstGeom prst="rect">
             <a:avLst/>
@@ -29939,31 +30592,31 @@
             <a:r>
               <a:rPr sz="850" b="1" i="0">
                 <a:solidFill>
-                  <a:srgbClr val="FFFFFF"/>
-                </a:solidFill>
-                <a:latin typeface="Arial"/>
-              </a:rPr>
-              <a:t>№ накл.</a:t>
-            </a:r>
-          </a:p>
-        </p:txBody>
-      </p:sp>
-      <p:sp>
-        <p:nvSpPr>
-          <p:cNvPr id="40" name="Rectangle 39"/>
+                  <a:srgbClr val="21295C"/>
+                </a:solidFill>
+                <a:latin typeface="Arial"/>
+              </a:rPr>
+              <a:t>№ накладной</a:t>
+            </a:r>
+          </a:p>
+        </p:txBody>
+      </p:sp>
+      <p:sp>
+        <p:nvSpPr>
+          <p:cNvPr id="65" name="Rectangle 64"/>
           <p:cNvSpPr/>
           <p:nvPr/>
         </p:nvSpPr>
         <p:spPr>
           <a:xfrm>
-            <a:off x="6094476" y="3977639"/>
-            <a:ext cx="788670" cy="365760"/>
+            <a:off x="9889236" y="3867912"/>
+            <a:ext cx="788670" cy="301752"/>
           </a:xfrm>
           <a:prstGeom prst="rect">
             <a:avLst/>
           </a:prstGeom>
           <a:solidFill>
-            <a:srgbClr val="065A82"/>
+            <a:srgbClr val="F0AB00"/>
           </a:solidFill>
           <a:ln>
             <a:noFill/>
@@ -29980,14 +30633,14 @@
       </p:sp>
       <p:sp>
         <p:nvSpPr>
-          <p:cNvPr id="41" name="TextBox 40"/>
+          <p:cNvPr id="66" name="TextBox 65"/>
           <p:cNvSpPr txBox="1"/>
           <p:nvPr/>
         </p:nvSpPr>
         <p:spPr>
           <a:xfrm>
-            <a:off x="6094476" y="3977639"/>
-            <a:ext cx="788670" cy="365760"/>
+            <a:off x="9889236" y="3867912"/>
+            <a:ext cx="788670" cy="301752"/>
           </a:xfrm>
           <a:prstGeom prst="rect">
             <a:avLst/>
@@ -30008,7 +30661,7 @@
             <a:r>
               <a:rPr sz="850" b="1" i="0">
                 <a:solidFill>
-                  <a:srgbClr val="FFFFFF"/>
+                  <a:srgbClr val="21295C"/>
                 </a:solidFill>
                 <a:latin typeface="Arial"/>
               </a:rPr>
@@ -30019,20 +30672,20 @@
       </p:sp>
       <p:sp>
         <p:nvSpPr>
-          <p:cNvPr id="42" name="Rectangle 41"/>
+          <p:cNvPr id="67" name="Rectangle 66"/>
           <p:cNvSpPr/>
           <p:nvPr/>
         </p:nvSpPr>
         <p:spPr>
           <a:xfrm>
-            <a:off x="6919722" y="3977639"/>
-            <a:ext cx="788670" cy="365760"/>
+            <a:off x="10714482" y="3867912"/>
+            <a:ext cx="788670" cy="301752"/>
           </a:xfrm>
           <a:prstGeom prst="rect">
             <a:avLst/>
           </a:prstGeom>
           <a:solidFill>
-            <a:srgbClr val="065A82"/>
+            <a:srgbClr val="F0AB00"/>
           </a:solidFill>
           <a:ln>
             <a:noFill/>
@@ -30049,14 +30702,14 @@
       </p:sp>
       <p:sp>
         <p:nvSpPr>
-          <p:cNvPr id="43" name="TextBox 42"/>
+          <p:cNvPr id="68" name="TextBox 67"/>
           <p:cNvSpPr txBox="1"/>
           <p:nvPr/>
         </p:nvSpPr>
         <p:spPr>
           <a:xfrm>
-            <a:off x="6919722" y="3977639"/>
-            <a:ext cx="788670" cy="365760"/>
+            <a:off x="10714482" y="3867912"/>
+            <a:ext cx="788670" cy="301752"/>
           </a:xfrm>
           <a:prstGeom prst="rect">
             <a:avLst/>
@@ -30077,7 +30730,7 @@
             <a:r>
               <a:rPr sz="850" b="1" i="0">
                 <a:solidFill>
-                  <a:srgbClr val="FFFFFF"/>
+                  <a:srgbClr val="21295C"/>
                 </a:solidFill>
                 <a:latin typeface="Arial"/>
               </a:rPr>
@@ -30088,14 +30741,14 @@
       </p:sp>
       <p:sp>
         <p:nvSpPr>
-          <p:cNvPr id="44" name="Rectangle 43"/>
+          <p:cNvPr id="69" name="Rectangle 68"/>
           <p:cNvSpPr/>
           <p:nvPr/>
         </p:nvSpPr>
         <p:spPr>
           <a:xfrm>
-            <a:off x="4443984" y="4370832"/>
-            <a:ext cx="788670" cy="365760"/>
+            <a:off x="8238744" y="4192524"/>
+            <a:ext cx="788670" cy="301752"/>
           </a:xfrm>
           <a:prstGeom prst="rect">
             <a:avLst/>
@@ -30120,14 +30773,14 @@
       </p:sp>
       <p:sp>
         <p:nvSpPr>
-          <p:cNvPr id="45" name="TextBox 44"/>
+          <p:cNvPr id="70" name="TextBox 69"/>
           <p:cNvSpPr txBox="1"/>
           <p:nvPr/>
         </p:nvSpPr>
         <p:spPr>
           <a:xfrm>
-            <a:off x="4443984" y="4370832"/>
-            <a:ext cx="788670" cy="365760"/>
+            <a:off x="8238744" y="4192524"/>
+            <a:ext cx="788670" cy="301752"/>
           </a:xfrm>
           <a:prstGeom prst="rect">
             <a:avLst/>
@@ -30159,14 +30812,14 @@
       </p:sp>
       <p:sp>
         <p:nvSpPr>
-          <p:cNvPr id="46" name="Rectangle 45"/>
+          <p:cNvPr id="71" name="Rectangle 70"/>
           <p:cNvSpPr/>
           <p:nvPr/>
         </p:nvSpPr>
         <p:spPr>
           <a:xfrm>
-            <a:off x="5269230" y="4370832"/>
-            <a:ext cx="788670" cy="365760"/>
+            <a:off x="9063990" y="4192524"/>
+            <a:ext cx="788670" cy="301752"/>
           </a:xfrm>
           <a:prstGeom prst="rect">
             <a:avLst/>
@@ -30191,14 +30844,14 @@
       </p:sp>
       <p:sp>
         <p:nvSpPr>
-          <p:cNvPr id="47" name="TextBox 46"/>
+          <p:cNvPr id="72" name="TextBox 71"/>
           <p:cNvSpPr txBox="1"/>
           <p:nvPr/>
         </p:nvSpPr>
         <p:spPr>
           <a:xfrm>
-            <a:off x="5269230" y="4370832"/>
-            <a:ext cx="788670" cy="365760"/>
+            <a:off x="9063990" y="4192524"/>
+            <a:ext cx="788670" cy="301752"/>
           </a:xfrm>
           <a:prstGeom prst="rect">
             <a:avLst/>
@@ -30230,14 +30883,14 @@
       </p:sp>
       <p:sp>
         <p:nvSpPr>
-          <p:cNvPr id="48" name="Rectangle 47"/>
+          <p:cNvPr id="73" name="Rectangle 72"/>
           <p:cNvSpPr/>
           <p:nvPr/>
         </p:nvSpPr>
         <p:spPr>
           <a:xfrm>
-            <a:off x="6094476" y="4370832"/>
-            <a:ext cx="788670" cy="365760"/>
+            <a:off x="9889236" y="4192524"/>
+            <a:ext cx="788670" cy="301752"/>
           </a:xfrm>
           <a:prstGeom prst="rect">
             <a:avLst/>
@@ -30262,14 +30915,14 @@
       </p:sp>
       <p:sp>
         <p:nvSpPr>
-          <p:cNvPr id="49" name="TextBox 48"/>
+          <p:cNvPr id="74" name="TextBox 73"/>
           <p:cNvSpPr txBox="1"/>
           <p:nvPr/>
         </p:nvSpPr>
         <p:spPr>
           <a:xfrm>
-            <a:off x="6094476" y="4370832"/>
-            <a:ext cx="788670" cy="365760"/>
+            <a:off x="9889236" y="4192524"/>
+            <a:ext cx="788670" cy="301752"/>
           </a:xfrm>
           <a:prstGeom prst="rect">
             <a:avLst/>
@@ -30301,14 +30954,14 @@
       </p:sp>
       <p:sp>
         <p:nvSpPr>
-          <p:cNvPr id="50" name="Rectangle 49"/>
+          <p:cNvPr id="75" name="Rectangle 74"/>
           <p:cNvSpPr/>
           <p:nvPr/>
         </p:nvSpPr>
         <p:spPr>
           <a:xfrm>
-            <a:off x="6919722" y="4370832"/>
-            <a:ext cx="788670" cy="365760"/>
+            <a:off x="10714482" y="4192524"/>
+            <a:ext cx="788670" cy="301752"/>
           </a:xfrm>
           <a:prstGeom prst="rect">
             <a:avLst/>
@@ -30333,14 +30986,14 @@
       </p:sp>
       <p:sp>
         <p:nvSpPr>
-          <p:cNvPr id="51" name="TextBox 50"/>
+          <p:cNvPr id="76" name="TextBox 75"/>
           <p:cNvSpPr txBox="1"/>
           <p:nvPr/>
         </p:nvSpPr>
         <p:spPr>
           <a:xfrm>
-            <a:off x="6919722" y="4370832"/>
-            <a:ext cx="788670" cy="365760"/>
+            <a:off x="10714482" y="4192524"/>
+            <a:ext cx="788670" cy="301752"/>
           </a:xfrm>
           <a:prstGeom prst="rect">
             <a:avLst/>
@@ -30372,14 +31025,14 @@
       </p:sp>
       <p:sp>
         <p:nvSpPr>
-          <p:cNvPr id="52" name="Rectangle 51"/>
+          <p:cNvPr id="77" name="Rectangle 76"/>
           <p:cNvSpPr/>
           <p:nvPr/>
         </p:nvSpPr>
         <p:spPr>
           <a:xfrm>
-            <a:off x="4443984" y="4764023"/>
-            <a:ext cx="788670" cy="365760"/>
+            <a:off x="8238744" y="4517136"/>
+            <a:ext cx="788670" cy="301752"/>
           </a:xfrm>
           <a:prstGeom prst="rect">
             <a:avLst/>
@@ -30404,14 +31057,14 @@
       </p:sp>
       <p:sp>
         <p:nvSpPr>
-          <p:cNvPr id="53" name="TextBox 52"/>
+          <p:cNvPr id="78" name="TextBox 77"/>
           <p:cNvSpPr txBox="1"/>
           <p:nvPr/>
         </p:nvSpPr>
         <p:spPr>
           <a:xfrm>
-            <a:off x="4443984" y="4764023"/>
-            <a:ext cx="788670" cy="365760"/>
+            <a:off x="8238744" y="4517136"/>
+            <a:ext cx="788670" cy="301752"/>
           </a:xfrm>
           <a:prstGeom prst="rect">
             <a:avLst/>
@@ -30443,14 +31096,14 @@
       </p:sp>
       <p:sp>
         <p:nvSpPr>
-          <p:cNvPr id="54" name="Rectangle 53"/>
+          <p:cNvPr id="79" name="Rectangle 78"/>
           <p:cNvSpPr/>
           <p:nvPr/>
         </p:nvSpPr>
         <p:spPr>
           <a:xfrm>
-            <a:off x="5269230" y="4764023"/>
-            <a:ext cx="788670" cy="365760"/>
+            <a:off x="9063990" y="4517136"/>
+            <a:ext cx="788670" cy="301752"/>
           </a:xfrm>
           <a:prstGeom prst="rect">
             <a:avLst/>
@@ -30475,14 +31128,14 @@
       </p:sp>
       <p:sp>
         <p:nvSpPr>
-          <p:cNvPr id="55" name="TextBox 54"/>
+          <p:cNvPr id="80" name="TextBox 79"/>
           <p:cNvSpPr txBox="1"/>
           <p:nvPr/>
         </p:nvSpPr>
         <p:spPr>
           <a:xfrm>
-            <a:off x="5269230" y="4764023"/>
-            <a:ext cx="788670" cy="365760"/>
+            <a:off x="9063990" y="4517136"/>
+            <a:ext cx="788670" cy="301752"/>
           </a:xfrm>
           <a:prstGeom prst="rect">
             <a:avLst/>
@@ -30514,14 +31167,14 @@
       </p:sp>
       <p:sp>
         <p:nvSpPr>
-          <p:cNvPr id="56" name="Rectangle 55"/>
+          <p:cNvPr id="81" name="Rectangle 80"/>
           <p:cNvSpPr/>
           <p:nvPr/>
         </p:nvSpPr>
         <p:spPr>
           <a:xfrm>
-            <a:off x="6094476" y="4764023"/>
-            <a:ext cx="788670" cy="365760"/>
+            <a:off x="9889236" y="4517136"/>
+            <a:ext cx="788670" cy="301752"/>
           </a:xfrm>
           <a:prstGeom prst="rect">
             <a:avLst/>
@@ -30546,14 +31199,14 @@
       </p:sp>
       <p:sp>
         <p:nvSpPr>
-          <p:cNvPr id="57" name="TextBox 56"/>
+          <p:cNvPr id="82" name="TextBox 81"/>
           <p:cNvSpPr txBox="1"/>
           <p:nvPr/>
         </p:nvSpPr>
         <p:spPr>
           <a:xfrm>
-            <a:off x="6094476" y="4764023"/>
-            <a:ext cx="788670" cy="365760"/>
+            <a:off x="9889236" y="4517136"/>
+            <a:ext cx="788670" cy="301752"/>
           </a:xfrm>
           <a:prstGeom prst="rect">
             <a:avLst/>
@@ -30585,14 +31238,14 @@
       </p:sp>
       <p:sp>
         <p:nvSpPr>
-          <p:cNvPr id="58" name="Rectangle 57"/>
+          <p:cNvPr id="83" name="Rectangle 82"/>
           <p:cNvSpPr/>
           <p:nvPr/>
         </p:nvSpPr>
         <p:spPr>
           <a:xfrm>
-            <a:off x="6919722" y="4764023"/>
-            <a:ext cx="788670" cy="365760"/>
+            <a:off x="10714482" y="4517136"/>
+            <a:ext cx="788670" cy="301752"/>
           </a:xfrm>
           <a:prstGeom prst="rect">
             <a:avLst/>
@@ -30617,14 +31270,14 @@
       </p:sp>
       <p:sp>
         <p:nvSpPr>
-          <p:cNvPr id="59" name="TextBox 58"/>
+          <p:cNvPr id="84" name="TextBox 83"/>
           <p:cNvSpPr txBox="1"/>
           <p:nvPr/>
         </p:nvSpPr>
         <p:spPr>
           <a:xfrm>
-            <a:off x="6919722" y="4764023"/>
-            <a:ext cx="788670" cy="365760"/>
+            <a:off x="10714482" y="4517136"/>
+            <a:ext cx="788670" cy="301752"/>
           </a:xfrm>
           <a:prstGeom prst="rect">
             <a:avLst/>
@@ -30656,931 +31309,14 @@
       </p:sp>
       <p:sp>
         <p:nvSpPr>
-          <p:cNvPr id="60" name="Rounded Rectangle 59"/>
+          <p:cNvPr id="85" name="Rounded Rectangle 84"/>
           <p:cNvSpPr/>
           <p:nvPr/>
         </p:nvSpPr>
         <p:spPr>
           <a:xfrm>
-            <a:off x="8092440" y="3447288"/>
-            <a:ext cx="3593592" cy="2423160"/>
-          </a:xfrm>
-          <a:prstGeom prst="roundRect">
-            <a:avLst>
-              <a:gd name="adj" fmla="val 12578"/>
-            </a:avLst>
-          </a:prstGeom>
-          <a:solidFill>
-            <a:srgbClr val="F4F7FA"/>
-          </a:solidFill>
-          <a:ln w="22860">
-            <a:solidFill>
-              <a:srgbClr val="F0AB00"/>
-            </a:solidFill>
-          </a:ln>
-          <a:effectLst/>
-        </p:spPr>
-        <p:txBody>
-          <a:bodyPr rtlCol="0" anchor="ctr"/>
-          <a:lstStyle/>
-          <a:p>
-            <a:pPr algn="ctr"/>
-          </a:p>
-        </p:txBody>
-      </p:sp>
-      <p:sp>
-        <p:nvSpPr>
-          <p:cNvPr id="61" name="TextBox 60"/>
-          <p:cNvSpPr txBox="1"/>
-          <p:nvPr/>
-        </p:nvSpPr>
-        <p:spPr>
-          <a:xfrm>
-            <a:off x="8238744" y="3557016"/>
-            <a:ext cx="3300984" cy="365760"/>
-          </a:xfrm>
-          <a:prstGeom prst="rect">
-            <a:avLst/>
-          </a:prstGeom>
-          <a:noFill/>
-        </p:spPr>
-        <p:txBody>
-          <a:bodyPr wrap="square" lIns="0" rIns="0" tIns="0" bIns="0" anchor="t">
-            <a:spAutoFit/>
-          </a:bodyPr>
-          <a:lstStyle/>
-          <a:p>
-            <a:pPr algn="l">
-              <a:lnSpc>
-                <a:spcPct val="110000"/>
-              </a:lnSpc>
-            </a:pPr>
-            <a:r>
-              <a:rPr sz="1250" b="1" i="0">
-                <a:solidFill>
-                  <a:srgbClr val="21295C"/>
-                </a:solidFill>
-                <a:latin typeface="Arial"/>
-              </a:rPr>
-              <a:t>Целевая таблица в 1С</a:t>
-            </a:r>
-          </a:p>
-        </p:txBody>
-      </p:sp>
-      <p:sp>
-        <p:nvSpPr>
-          <p:cNvPr id="62" name="Rectangle 61"/>
-          <p:cNvSpPr/>
-          <p:nvPr/>
-        </p:nvSpPr>
-        <p:spPr>
-          <a:xfrm>
-            <a:off x="8238744" y="3977639"/>
-            <a:ext cx="788670" cy="365760"/>
-          </a:xfrm>
-          <a:prstGeom prst="rect">
-            <a:avLst/>
-          </a:prstGeom>
-          <a:solidFill>
-            <a:srgbClr val="F0AB00"/>
-          </a:solidFill>
-          <a:ln>
-            <a:noFill/>
-          </a:ln>
-          <a:effectLst/>
-        </p:spPr>
-        <p:txBody>
-          <a:bodyPr rtlCol="0" anchor="ctr"/>
-          <a:lstStyle/>
-          <a:p>
-            <a:pPr algn="ctr"/>
-          </a:p>
-        </p:txBody>
-      </p:sp>
-      <p:sp>
-        <p:nvSpPr>
-          <p:cNvPr id="63" name="TextBox 62"/>
-          <p:cNvSpPr txBox="1"/>
-          <p:nvPr/>
-        </p:nvSpPr>
-        <p:spPr>
-          <a:xfrm>
-            <a:off x="8238744" y="3977639"/>
-            <a:ext cx="788670" cy="365760"/>
-          </a:xfrm>
-          <a:prstGeom prst="rect">
-            <a:avLst/>
-          </a:prstGeom>
-          <a:noFill/>
-        </p:spPr>
-        <p:txBody>
-          <a:bodyPr wrap="square" lIns="0" rIns="0" tIns="0" bIns="0" anchor="ctr">
-            <a:spAutoFit/>
-          </a:bodyPr>
-          <a:lstStyle/>
-          <a:p>
-            <a:pPr algn="ctr">
-              <a:lnSpc>
-                <a:spcPct val="95000"/>
-              </a:lnSpc>
-            </a:pPr>
-            <a:r>
-              <a:rPr sz="850" b="1" i="0">
-                <a:solidFill>
-                  <a:srgbClr val="21295C"/>
-                </a:solidFill>
-                <a:latin typeface="Arial"/>
-              </a:rPr>
-              <a:t>Дата</a:t>
-            </a:r>
-          </a:p>
-        </p:txBody>
-      </p:sp>
-      <p:sp>
-        <p:nvSpPr>
-          <p:cNvPr id="64" name="Rectangle 63"/>
-          <p:cNvSpPr/>
-          <p:nvPr/>
-        </p:nvSpPr>
-        <p:spPr>
-          <a:xfrm>
-            <a:off x="9063990" y="3977639"/>
-            <a:ext cx="788670" cy="365760"/>
-          </a:xfrm>
-          <a:prstGeom prst="rect">
-            <a:avLst/>
-          </a:prstGeom>
-          <a:solidFill>
-            <a:srgbClr val="F0AB00"/>
-          </a:solidFill>
-          <a:ln>
-            <a:noFill/>
-          </a:ln>
-          <a:effectLst/>
-        </p:spPr>
-        <p:txBody>
-          <a:bodyPr rtlCol="0" anchor="ctr"/>
-          <a:lstStyle/>
-          <a:p>
-            <a:pPr algn="ctr"/>
-          </a:p>
-        </p:txBody>
-      </p:sp>
-      <p:sp>
-        <p:nvSpPr>
-          <p:cNvPr id="65" name="TextBox 64"/>
-          <p:cNvSpPr txBox="1"/>
-          <p:nvPr/>
-        </p:nvSpPr>
-        <p:spPr>
-          <a:xfrm>
-            <a:off x="9063990" y="3977639"/>
-            <a:ext cx="788670" cy="365760"/>
-          </a:xfrm>
-          <a:prstGeom prst="rect">
-            <a:avLst/>
-          </a:prstGeom>
-          <a:noFill/>
-        </p:spPr>
-        <p:txBody>
-          <a:bodyPr wrap="square" lIns="0" rIns="0" tIns="0" bIns="0" anchor="ctr">
-            <a:spAutoFit/>
-          </a:bodyPr>
-          <a:lstStyle/>
-          <a:p>
-            <a:pPr algn="ctr">
-              <a:lnSpc>
-                <a:spcPct val="95000"/>
-              </a:lnSpc>
-            </a:pPr>
-            <a:r>
-              <a:rPr sz="850" b="1" i="0">
-                <a:solidFill>
-                  <a:srgbClr val="21295C"/>
-                </a:solidFill>
-                <a:latin typeface="Arial"/>
-              </a:rPr>
-              <a:t>№ накладной</a:t>
-            </a:r>
-          </a:p>
-        </p:txBody>
-      </p:sp>
-      <p:sp>
-        <p:nvSpPr>
-          <p:cNvPr id="66" name="Rectangle 65"/>
-          <p:cNvSpPr/>
-          <p:nvPr/>
-        </p:nvSpPr>
-        <p:spPr>
-          <a:xfrm>
-            <a:off x="9889236" y="3977639"/>
-            <a:ext cx="788670" cy="365760"/>
-          </a:xfrm>
-          <a:prstGeom prst="rect">
-            <a:avLst/>
-          </a:prstGeom>
-          <a:solidFill>
-            <a:srgbClr val="F0AB00"/>
-          </a:solidFill>
-          <a:ln>
-            <a:noFill/>
-          </a:ln>
-          <a:effectLst/>
-        </p:spPr>
-        <p:txBody>
-          <a:bodyPr rtlCol="0" anchor="ctr"/>
-          <a:lstStyle/>
-          <a:p>
-            <a:pPr algn="ctr"/>
-          </a:p>
-        </p:txBody>
-      </p:sp>
-      <p:sp>
-        <p:nvSpPr>
-          <p:cNvPr id="67" name="TextBox 66"/>
-          <p:cNvSpPr txBox="1"/>
-          <p:nvPr/>
-        </p:nvSpPr>
-        <p:spPr>
-          <a:xfrm>
-            <a:off x="9889236" y="3977639"/>
-            <a:ext cx="788670" cy="365760"/>
-          </a:xfrm>
-          <a:prstGeom prst="rect">
-            <a:avLst/>
-          </a:prstGeom>
-          <a:noFill/>
-        </p:spPr>
-        <p:txBody>
-          <a:bodyPr wrap="square" lIns="0" rIns="0" tIns="0" bIns="0" anchor="ctr">
-            <a:spAutoFit/>
-          </a:bodyPr>
-          <a:lstStyle/>
-          <a:p>
-            <a:pPr algn="ctr">
-              <a:lnSpc>
-                <a:spcPct val="95000"/>
-              </a:lnSpc>
-            </a:pPr>
-            <a:r>
-              <a:rPr sz="850" b="1" i="0">
-                <a:solidFill>
-                  <a:srgbClr val="21295C"/>
-                </a:solidFill>
-                <a:latin typeface="Arial"/>
-              </a:rPr>
-              <a:t>Позиция</a:t>
-            </a:r>
-          </a:p>
-        </p:txBody>
-      </p:sp>
-      <p:sp>
-        <p:nvSpPr>
-          <p:cNvPr id="68" name="Rectangle 67"/>
-          <p:cNvSpPr/>
-          <p:nvPr/>
-        </p:nvSpPr>
-        <p:spPr>
-          <a:xfrm>
-            <a:off x="10714482" y="3977639"/>
-            <a:ext cx="788670" cy="365760"/>
-          </a:xfrm>
-          <a:prstGeom prst="rect">
-            <a:avLst/>
-          </a:prstGeom>
-          <a:solidFill>
-            <a:srgbClr val="F0AB00"/>
-          </a:solidFill>
-          <a:ln>
-            <a:noFill/>
-          </a:ln>
-          <a:effectLst/>
-        </p:spPr>
-        <p:txBody>
-          <a:bodyPr rtlCol="0" anchor="ctr"/>
-          <a:lstStyle/>
-          <a:p>
-            <a:pPr algn="ctr"/>
-          </a:p>
-        </p:txBody>
-      </p:sp>
-      <p:sp>
-        <p:nvSpPr>
-          <p:cNvPr id="69" name="TextBox 68"/>
-          <p:cNvSpPr txBox="1"/>
-          <p:nvPr/>
-        </p:nvSpPr>
-        <p:spPr>
-          <a:xfrm>
-            <a:off x="10714482" y="3977639"/>
-            <a:ext cx="788670" cy="365760"/>
-          </a:xfrm>
-          <a:prstGeom prst="rect">
-            <a:avLst/>
-          </a:prstGeom>
-          <a:noFill/>
-        </p:spPr>
-        <p:txBody>
-          <a:bodyPr wrap="square" lIns="0" rIns="0" tIns="0" bIns="0" anchor="ctr">
-            <a:spAutoFit/>
-          </a:bodyPr>
-          <a:lstStyle/>
-          <a:p>
-            <a:pPr algn="ctr">
-              <a:lnSpc>
-                <a:spcPct val="95000"/>
-              </a:lnSpc>
-            </a:pPr>
-            <a:r>
-              <a:rPr sz="850" b="1" i="0">
-                <a:solidFill>
-                  <a:srgbClr val="21295C"/>
-                </a:solidFill>
-                <a:latin typeface="Arial"/>
-              </a:rPr>
-              <a:t>Сумма</a:t>
-            </a:r>
-          </a:p>
-        </p:txBody>
-      </p:sp>
-      <p:sp>
-        <p:nvSpPr>
-          <p:cNvPr id="70" name="Rectangle 69"/>
-          <p:cNvSpPr/>
-          <p:nvPr/>
-        </p:nvSpPr>
-        <p:spPr>
-          <a:xfrm>
-            <a:off x="8238744" y="4370832"/>
-            <a:ext cx="788670" cy="365760"/>
-          </a:xfrm>
-          <a:prstGeom prst="rect">
-            <a:avLst/>
-          </a:prstGeom>
-          <a:solidFill>
-            <a:srgbClr val="F4F7FA"/>
-          </a:solidFill>
-          <a:ln w="8890">
-            <a:solidFill>
-              <a:srgbClr val="E5EAF0"/>
-            </a:solidFill>
-          </a:ln>
-          <a:effectLst/>
-        </p:spPr>
-        <p:txBody>
-          <a:bodyPr rtlCol="0" anchor="ctr"/>
-          <a:lstStyle/>
-          <a:p>
-            <a:pPr algn="ctr"/>
-          </a:p>
-        </p:txBody>
-      </p:sp>
-      <p:sp>
-        <p:nvSpPr>
-          <p:cNvPr id="71" name="TextBox 70"/>
-          <p:cNvSpPr txBox="1"/>
-          <p:nvPr/>
-        </p:nvSpPr>
-        <p:spPr>
-          <a:xfrm>
-            <a:off x="8238744" y="4370832"/>
-            <a:ext cx="788670" cy="365760"/>
-          </a:xfrm>
-          <a:prstGeom prst="rect">
-            <a:avLst/>
-          </a:prstGeom>
-          <a:noFill/>
-        </p:spPr>
-        <p:txBody>
-          <a:bodyPr wrap="square" lIns="0" rIns="0" tIns="0" bIns="0" anchor="ctr">
-            <a:spAutoFit/>
-          </a:bodyPr>
-          <a:lstStyle/>
-          <a:p>
-            <a:pPr algn="ctr">
-              <a:lnSpc>
-                <a:spcPct val="115000"/>
-              </a:lnSpc>
-            </a:pPr>
-            <a:r>
-              <a:rPr sz="850" b="0" i="0">
-                <a:solidFill>
-                  <a:srgbClr val="6B7685"/>
-                </a:solidFill>
-                <a:latin typeface="Arial"/>
-              </a:rPr>
-              <a:t>24.03.2026</a:t>
-            </a:r>
-          </a:p>
-        </p:txBody>
-      </p:sp>
-      <p:sp>
-        <p:nvSpPr>
-          <p:cNvPr id="72" name="Rectangle 71"/>
-          <p:cNvSpPr/>
-          <p:nvPr/>
-        </p:nvSpPr>
-        <p:spPr>
-          <a:xfrm>
-            <a:off x="9063990" y="4370832"/>
-            <a:ext cx="788670" cy="365760"/>
-          </a:xfrm>
-          <a:prstGeom prst="rect">
-            <a:avLst/>
-          </a:prstGeom>
-          <a:solidFill>
-            <a:srgbClr val="F4F7FA"/>
-          </a:solidFill>
-          <a:ln w="8890">
-            <a:solidFill>
-              <a:srgbClr val="E5EAF0"/>
-            </a:solidFill>
-          </a:ln>
-          <a:effectLst/>
-        </p:spPr>
-        <p:txBody>
-          <a:bodyPr rtlCol="0" anchor="ctr"/>
-          <a:lstStyle/>
-          <a:p>
-            <a:pPr algn="ctr"/>
-          </a:p>
-        </p:txBody>
-      </p:sp>
-      <p:sp>
-        <p:nvSpPr>
-          <p:cNvPr id="73" name="TextBox 72"/>
-          <p:cNvSpPr txBox="1"/>
-          <p:nvPr/>
-        </p:nvSpPr>
-        <p:spPr>
-          <a:xfrm>
-            <a:off x="9063990" y="4370832"/>
-            <a:ext cx="788670" cy="365760"/>
-          </a:xfrm>
-          <a:prstGeom prst="rect">
-            <a:avLst/>
-          </a:prstGeom>
-          <a:noFill/>
-        </p:spPr>
-        <p:txBody>
-          <a:bodyPr wrap="square" lIns="0" rIns="0" tIns="0" bIns="0" anchor="ctr">
-            <a:spAutoFit/>
-          </a:bodyPr>
-          <a:lstStyle/>
-          <a:p>
-            <a:pPr algn="ctr">
-              <a:lnSpc>
-                <a:spcPct val="115000"/>
-              </a:lnSpc>
-            </a:pPr>
-            <a:r>
-              <a:rPr sz="850" b="0" i="0">
-                <a:solidFill>
-                  <a:srgbClr val="6B7685"/>
-                </a:solidFill>
-                <a:latin typeface="Arial"/>
-              </a:rPr>
-              <a:t>—</a:t>
-            </a:r>
-          </a:p>
-        </p:txBody>
-      </p:sp>
-      <p:sp>
-        <p:nvSpPr>
-          <p:cNvPr id="74" name="Rectangle 73"/>
-          <p:cNvSpPr/>
-          <p:nvPr/>
-        </p:nvSpPr>
-        <p:spPr>
-          <a:xfrm>
-            <a:off x="9889236" y="4370832"/>
-            <a:ext cx="788670" cy="365760"/>
-          </a:xfrm>
-          <a:prstGeom prst="rect">
-            <a:avLst/>
-          </a:prstGeom>
-          <a:solidFill>
-            <a:srgbClr val="F4F7FA"/>
-          </a:solidFill>
-          <a:ln w="8890">
-            <a:solidFill>
-              <a:srgbClr val="E5EAF0"/>
-            </a:solidFill>
-          </a:ln>
-          <a:effectLst/>
-        </p:spPr>
-        <p:txBody>
-          <a:bodyPr rtlCol="0" anchor="ctr"/>
-          <a:lstStyle/>
-          <a:p>
-            <a:pPr algn="ctr"/>
-          </a:p>
-        </p:txBody>
-      </p:sp>
-      <p:sp>
-        <p:nvSpPr>
-          <p:cNvPr id="75" name="TextBox 74"/>
-          <p:cNvSpPr txBox="1"/>
-          <p:nvPr/>
-        </p:nvSpPr>
-        <p:spPr>
-          <a:xfrm>
-            <a:off x="9889236" y="4370832"/>
-            <a:ext cx="788670" cy="365760"/>
-          </a:xfrm>
-          <a:prstGeom prst="rect">
-            <a:avLst/>
-          </a:prstGeom>
-          <a:noFill/>
-        </p:spPr>
-        <p:txBody>
-          <a:bodyPr wrap="square" lIns="0" rIns="0" tIns="0" bIns="0" anchor="ctr">
-            <a:spAutoFit/>
-          </a:bodyPr>
-          <a:lstStyle/>
-          <a:p>
-            <a:pPr algn="ctr">
-              <a:lnSpc>
-                <a:spcPct val="115000"/>
-              </a:lnSpc>
-            </a:pPr>
-            <a:r>
-              <a:rPr sz="850" b="0" i="0">
-                <a:solidFill>
-                  <a:srgbClr val="6B7685"/>
-                </a:solidFill>
-                <a:latin typeface="Arial"/>
-              </a:rPr>
-              <a:t>—</a:t>
-            </a:r>
-          </a:p>
-        </p:txBody>
-      </p:sp>
-      <p:sp>
-        <p:nvSpPr>
-          <p:cNvPr id="76" name="Rectangle 75"/>
-          <p:cNvSpPr/>
-          <p:nvPr/>
-        </p:nvSpPr>
-        <p:spPr>
-          <a:xfrm>
-            <a:off x="10714482" y="4370832"/>
-            <a:ext cx="788670" cy="365760"/>
-          </a:xfrm>
-          <a:prstGeom prst="rect">
-            <a:avLst/>
-          </a:prstGeom>
-          <a:solidFill>
-            <a:srgbClr val="F4F7FA"/>
-          </a:solidFill>
-          <a:ln w="8890">
-            <a:solidFill>
-              <a:srgbClr val="E5EAF0"/>
-            </a:solidFill>
-          </a:ln>
-          <a:effectLst/>
-        </p:spPr>
-        <p:txBody>
-          <a:bodyPr rtlCol="0" anchor="ctr"/>
-          <a:lstStyle/>
-          <a:p>
-            <a:pPr algn="ctr"/>
-          </a:p>
-        </p:txBody>
-      </p:sp>
-      <p:sp>
-        <p:nvSpPr>
-          <p:cNvPr id="77" name="TextBox 76"/>
-          <p:cNvSpPr txBox="1"/>
-          <p:nvPr/>
-        </p:nvSpPr>
-        <p:spPr>
-          <a:xfrm>
-            <a:off x="10714482" y="4370832"/>
-            <a:ext cx="788670" cy="365760"/>
-          </a:xfrm>
-          <a:prstGeom prst="rect">
-            <a:avLst/>
-          </a:prstGeom>
-          <a:noFill/>
-        </p:spPr>
-        <p:txBody>
-          <a:bodyPr wrap="square" lIns="0" rIns="0" tIns="0" bIns="0" anchor="ctr">
-            <a:spAutoFit/>
-          </a:bodyPr>
-          <a:lstStyle/>
-          <a:p>
-            <a:pPr algn="ctr">
-              <a:lnSpc>
-                <a:spcPct val="115000"/>
-              </a:lnSpc>
-            </a:pPr>
-            <a:r>
-              <a:rPr sz="850" b="0" i="0">
-                <a:solidFill>
-                  <a:srgbClr val="6B7685"/>
-                </a:solidFill>
-                <a:latin typeface="Arial"/>
-              </a:rPr>
-              <a:t>—</a:t>
-            </a:r>
-          </a:p>
-        </p:txBody>
-      </p:sp>
-      <p:sp>
-        <p:nvSpPr>
-          <p:cNvPr id="78" name="Rectangle 77"/>
-          <p:cNvSpPr/>
-          <p:nvPr/>
-        </p:nvSpPr>
-        <p:spPr>
-          <a:xfrm>
-            <a:off x="8238744" y="4764023"/>
-            <a:ext cx="788670" cy="365760"/>
-          </a:xfrm>
-          <a:prstGeom prst="rect">
-            <a:avLst/>
-          </a:prstGeom>
-          <a:solidFill>
-            <a:srgbClr val="F4F7FA"/>
-          </a:solidFill>
-          <a:ln w="8890">
-            <a:solidFill>
-              <a:srgbClr val="E5EAF0"/>
-            </a:solidFill>
-          </a:ln>
-          <a:effectLst/>
-        </p:spPr>
-        <p:txBody>
-          <a:bodyPr rtlCol="0" anchor="ctr"/>
-          <a:lstStyle/>
-          <a:p>
-            <a:pPr algn="ctr"/>
-          </a:p>
-        </p:txBody>
-      </p:sp>
-      <p:sp>
-        <p:nvSpPr>
-          <p:cNvPr id="79" name="TextBox 78"/>
-          <p:cNvSpPr txBox="1"/>
-          <p:nvPr/>
-        </p:nvSpPr>
-        <p:spPr>
-          <a:xfrm>
-            <a:off x="8238744" y="4764023"/>
-            <a:ext cx="788670" cy="365760"/>
-          </a:xfrm>
-          <a:prstGeom prst="rect">
-            <a:avLst/>
-          </a:prstGeom>
-          <a:noFill/>
-        </p:spPr>
-        <p:txBody>
-          <a:bodyPr wrap="square" lIns="0" rIns="0" tIns="0" bIns="0" anchor="ctr">
-            <a:spAutoFit/>
-          </a:bodyPr>
-          <a:lstStyle/>
-          <a:p>
-            <a:pPr algn="ctr">
-              <a:lnSpc>
-                <a:spcPct val="115000"/>
-              </a:lnSpc>
-            </a:pPr>
-            <a:r>
-              <a:rPr sz="850" b="0" i="0">
-                <a:solidFill>
-                  <a:srgbClr val="6B7685"/>
-                </a:solidFill>
-                <a:latin typeface="Arial"/>
-              </a:rPr>
-              <a:t>—</a:t>
-            </a:r>
-          </a:p>
-        </p:txBody>
-      </p:sp>
-      <p:sp>
-        <p:nvSpPr>
-          <p:cNvPr id="80" name="Rectangle 79"/>
-          <p:cNvSpPr/>
-          <p:nvPr/>
-        </p:nvSpPr>
-        <p:spPr>
-          <a:xfrm>
-            <a:off x="9063990" y="4764023"/>
-            <a:ext cx="788670" cy="365760"/>
-          </a:xfrm>
-          <a:prstGeom prst="rect">
-            <a:avLst/>
-          </a:prstGeom>
-          <a:solidFill>
-            <a:srgbClr val="F4F7FA"/>
-          </a:solidFill>
-          <a:ln w="8890">
-            <a:solidFill>
-              <a:srgbClr val="E5EAF0"/>
-            </a:solidFill>
-          </a:ln>
-          <a:effectLst/>
-        </p:spPr>
-        <p:txBody>
-          <a:bodyPr rtlCol="0" anchor="ctr"/>
-          <a:lstStyle/>
-          <a:p>
-            <a:pPr algn="ctr"/>
-          </a:p>
-        </p:txBody>
-      </p:sp>
-      <p:sp>
-        <p:nvSpPr>
-          <p:cNvPr id="81" name="TextBox 80"/>
-          <p:cNvSpPr txBox="1"/>
-          <p:nvPr/>
-        </p:nvSpPr>
-        <p:spPr>
-          <a:xfrm>
-            <a:off x="9063990" y="4764023"/>
-            <a:ext cx="788670" cy="365760"/>
-          </a:xfrm>
-          <a:prstGeom prst="rect">
-            <a:avLst/>
-          </a:prstGeom>
-          <a:noFill/>
-        </p:spPr>
-        <p:txBody>
-          <a:bodyPr wrap="square" lIns="0" rIns="0" tIns="0" bIns="0" anchor="ctr">
-            <a:spAutoFit/>
-          </a:bodyPr>
-          <a:lstStyle/>
-          <a:p>
-            <a:pPr algn="ctr">
-              <a:lnSpc>
-                <a:spcPct val="115000"/>
-              </a:lnSpc>
-            </a:pPr>
-            <a:r>
-              <a:rPr sz="850" b="0" i="0">
-                <a:solidFill>
-                  <a:srgbClr val="6B7685"/>
-                </a:solidFill>
-                <a:latin typeface="Arial"/>
-              </a:rPr>
-              <a:t>—</a:t>
-            </a:r>
-          </a:p>
-        </p:txBody>
-      </p:sp>
-      <p:sp>
-        <p:nvSpPr>
-          <p:cNvPr id="82" name="Rectangle 81"/>
-          <p:cNvSpPr/>
-          <p:nvPr/>
-        </p:nvSpPr>
-        <p:spPr>
-          <a:xfrm>
-            <a:off x="9889236" y="4764023"/>
-            <a:ext cx="788670" cy="365760"/>
-          </a:xfrm>
-          <a:prstGeom prst="rect">
-            <a:avLst/>
-          </a:prstGeom>
-          <a:solidFill>
-            <a:srgbClr val="F4F7FA"/>
-          </a:solidFill>
-          <a:ln w="8890">
-            <a:solidFill>
-              <a:srgbClr val="E5EAF0"/>
-            </a:solidFill>
-          </a:ln>
-          <a:effectLst/>
-        </p:spPr>
-        <p:txBody>
-          <a:bodyPr rtlCol="0" anchor="ctr"/>
-          <a:lstStyle/>
-          <a:p>
-            <a:pPr algn="ctr"/>
-          </a:p>
-        </p:txBody>
-      </p:sp>
-      <p:sp>
-        <p:nvSpPr>
-          <p:cNvPr id="83" name="TextBox 82"/>
-          <p:cNvSpPr txBox="1"/>
-          <p:nvPr/>
-        </p:nvSpPr>
-        <p:spPr>
-          <a:xfrm>
-            <a:off x="9889236" y="4764023"/>
-            <a:ext cx="788670" cy="365760"/>
-          </a:xfrm>
-          <a:prstGeom prst="rect">
-            <a:avLst/>
-          </a:prstGeom>
-          <a:noFill/>
-        </p:spPr>
-        <p:txBody>
-          <a:bodyPr wrap="square" lIns="0" rIns="0" tIns="0" bIns="0" anchor="ctr">
-            <a:spAutoFit/>
-          </a:bodyPr>
-          <a:lstStyle/>
-          <a:p>
-            <a:pPr algn="ctr">
-              <a:lnSpc>
-                <a:spcPct val="115000"/>
-              </a:lnSpc>
-            </a:pPr>
-            <a:r>
-              <a:rPr sz="850" b="0" i="0">
-                <a:solidFill>
-                  <a:srgbClr val="6B7685"/>
-                </a:solidFill>
-                <a:latin typeface="Arial"/>
-              </a:rPr>
-              <a:t>—</a:t>
-            </a:r>
-          </a:p>
-        </p:txBody>
-      </p:sp>
-      <p:sp>
-        <p:nvSpPr>
-          <p:cNvPr id="84" name="Rectangle 83"/>
-          <p:cNvSpPr/>
-          <p:nvPr/>
-        </p:nvSpPr>
-        <p:spPr>
-          <a:xfrm>
-            <a:off x="10714482" y="4764023"/>
-            <a:ext cx="788670" cy="365760"/>
-          </a:xfrm>
-          <a:prstGeom prst="rect">
-            <a:avLst/>
-          </a:prstGeom>
-          <a:solidFill>
-            <a:srgbClr val="F4F7FA"/>
-          </a:solidFill>
-          <a:ln w="8890">
-            <a:solidFill>
-              <a:srgbClr val="E5EAF0"/>
-            </a:solidFill>
-          </a:ln>
-          <a:effectLst/>
-        </p:spPr>
-        <p:txBody>
-          <a:bodyPr rtlCol="0" anchor="ctr"/>
-          <a:lstStyle/>
-          <a:p>
-            <a:pPr algn="ctr"/>
-          </a:p>
-        </p:txBody>
-      </p:sp>
-      <p:sp>
-        <p:nvSpPr>
-          <p:cNvPr id="85" name="TextBox 84"/>
-          <p:cNvSpPr txBox="1"/>
-          <p:nvPr/>
-        </p:nvSpPr>
-        <p:spPr>
-          <a:xfrm>
-            <a:off x="10714482" y="4764023"/>
-            <a:ext cx="788670" cy="365760"/>
-          </a:xfrm>
-          <a:prstGeom prst="rect">
-            <a:avLst/>
-          </a:prstGeom>
-          <a:noFill/>
-        </p:spPr>
-        <p:txBody>
-          <a:bodyPr wrap="square" lIns="0" rIns="0" tIns="0" bIns="0" anchor="ctr">
-            <a:spAutoFit/>
-          </a:bodyPr>
-          <a:lstStyle/>
-          <a:p>
-            <a:pPr algn="ctr">
-              <a:lnSpc>
-                <a:spcPct val="115000"/>
-              </a:lnSpc>
-            </a:pPr>
-            <a:r>
-              <a:rPr sz="850" b="0" i="0">
-                <a:solidFill>
-                  <a:srgbClr val="6B7685"/>
-                </a:solidFill>
-                <a:latin typeface="Arial"/>
-              </a:rPr>
-              <a:t>—</a:t>
-            </a:r>
-          </a:p>
-        </p:txBody>
-      </p:sp>
-      <p:sp>
-        <p:nvSpPr>
-          <p:cNvPr id="86" name="Rounded Rectangle 85"/>
-          <p:cNvSpPr/>
-          <p:nvPr/>
-        </p:nvSpPr>
-        <p:spPr>
-          <a:xfrm>
-            <a:off x="502920" y="6035040"/>
-            <a:ext cx="11183112" cy="685800"/>
+            <a:off x="502920" y="5559552"/>
+            <a:ext cx="11183112" cy="1161288"/>
           </a:xfrm>
           <a:prstGeom prst="roundRect">
             <a:avLst>
@@ -31607,14 +31343,14 @@
       </p:sp>
       <p:sp>
         <p:nvSpPr>
-          <p:cNvPr id="87" name="TextBox 86"/>
+          <p:cNvPr id="86" name="TextBox 85"/>
           <p:cNvSpPr txBox="1"/>
           <p:nvPr/>
         </p:nvSpPr>
         <p:spPr>
           <a:xfrm>
-            <a:off x="777240" y="6035040"/>
-            <a:ext cx="10607040" cy="685800"/>
+            <a:off x="777240" y="5559552"/>
+            <a:ext cx="10607040" cy="1161288"/>
           </a:xfrm>
           <a:prstGeom prst="rect">
             <a:avLst/>
@@ -31678,8 +31414,8 @@
         </p:nvSpPr>
         <p:spPr>
           <a:xfrm>
-            <a:off x="502920" y="411480"/>
-            <a:ext cx="11183112" cy="914400"/>
+            <a:off x="502920" y="228600"/>
+            <a:ext cx="11183112" cy="411480"/>
           </a:xfrm>
           <a:prstGeom prst="rect">
             <a:avLst/>
@@ -31698,7 +31434,7 @@
               </a:lnSpc>
             </a:pPr>
             <a:r>
-              <a:rPr sz="2800" b="1" i="0">
+              <a:rPr sz="2500" b="1" i="0">
                 <a:solidFill>
                   <a:srgbClr val="21295C"/>
                 </a:solidFill>
@@ -31717,12 +31453,12 @@
         </p:nvSpPr>
         <p:spPr>
           <a:xfrm>
-            <a:off x="502920" y="1051560"/>
-            <a:ext cx="11183112" cy="960120"/>
+            <a:off x="502920" y="685800"/>
+            <a:ext cx="11183112" cy="2377440"/>
           </a:xfrm>
           <a:prstGeom prst="roundRect">
             <a:avLst>
-              <a:gd name="adj" fmla="val 25000"/>
+              <a:gd name="adj" fmla="val 12820"/>
             </a:avLst>
           </a:prstGeom>
           <a:solidFill>
@@ -31759,7 +31495,7 @@
         </p:blipFill>
         <p:spPr>
           <a:xfrm>
-            <a:off x="722376" y="1225295"/>
+            <a:off x="722376" y="859536"/>
             <a:ext cx="292608" cy="292608"/>
           </a:xfrm>
           <a:prstGeom prst="rect">
@@ -31775,8 +31511,8 @@
         </p:nvSpPr>
         <p:spPr>
           <a:xfrm>
-            <a:off x="722376" y="1563624"/>
-            <a:ext cx="10744200" cy="228600"/>
+            <a:off x="722376" y="1197864"/>
+            <a:ext cx="10744200" cy="1645920"/>
           </a:xfrm>
           <a:prstGeom prst="rect">
             <a:avLst/>
@@ -31795,13 +31531,13 @@
               </a:lnSpc>
             </a:pPr>
             <a:r>
-              <a:rPr sz="1500" b="0" i="1">
+              <a:rPr sz="1450" b="0" i="1">
                 <a:solidFill>
                   <a:srgbClr val="21295C"/>
                 </a:solidFill>
                 <a:latin typeface="Arial"/>
               </a:rPr>
-              <a:t>«Поток новостей из многих источников — нужно склеивать одинаковые в одну карточку»</a:t>
+              <a:t>«Привет! Пользователи жалуются в поддержку, что лента забита — по одному и тому же событию видят десять почти одинаковых заголовков подряд от разных изданий, которые просто пересказывают одну новость своими словами. Хотим это как-то склеивать в одну карточку, чтобы не мозолило глаза. У нас источников уже больше сотни, подключаем ещё несколько в этом месяце, но это уже другой разговор с их API. Нужно понять, какая технология сюда подойдёт, желательно не сильно раздувая расходы на инфраструктуру, бюджет на новые фичи в этом квартале скромный».</a:t>
             </a:r>
           </a:p>
         </p:txBody>
@@ -31814,12 +31550,12 @@
         </p:nvSpPr>
         <p:spPr>
           <a:xfrm>
-            <a:off x="502920" y="2331720"/>
-            <a:ext cx="11183112" cy="2606040"/>
+            <a:off x="502920" y="3209544"/>
+            <a:ext cx="11183112" cy="960120"/>
           </a:xfrm>
           <a:prstGeom prst="roundRect">
             <a:avLst>
-              <a:gd name="adj" fmla="val 11695"/>
+              <a:gd name="adj" fmla="val 25000"/>
             </a:avLst>
           </a:prstGeom>
           <a:solidFill>
@@ -31856,8 +31592,8 @@
         </p:blipFill>
         <p:spPr>
           <a:xfrm>
-            <a:off x="868680" y="2926079"/>
-            <a:ext cx="822960" cy="822960"/>
+            <a:off x="822960" y="3392424"/>
+            <a:ext cx="594360" cy="594360"/>
           </a:xfrm>
           <a:prstGeom prst="rect">
             <a:avLst/>
@@ -31866,7 +31602,7 @@
       </p:pic>
       <p:pic>
         <p:nvPicPr>
-          <p:cNvPr id="8" name="Picture 7" descr="message-square-quote-1C7293-72.png"/>
+          <p:cNvPr id="8" name="Picture 7" descr="layers-028090-64.png"/>
           <p:cNvPicPr>
             <a:picLocks noChangeAspect="1"/>
           </p:cNvPicPr>
@@ -31880,72 +31616,24 @@
         </p:blipFill>
         <p:spPr>
           <a:xfrm>
-            <a:off x="1965960" y="3200400"/>
-            <a:ext cx="685800" cy="685800"/>
+            <a:off x="1600200" y="3392424"/>
+            <a:ext cx="594360" cy="594360"/>
           </a:xfrm>
           <a:prstGeom prst="rect">
             <a:avLst/>
           </a:prstGeom>
         </p:spPr>
       </p:pic>
-      <p:pic>
-        <p:nvPicPr>
-          <p:cNvPr id="9" name="Picture 8" descr="arrow-right-F0AB00-64.png"/>
-          <p:cNvPicPr>
-            <a:picLocks noChangeAspect="1"/>
-          </p:cNvPicPr>
-          <p:nvPr/>
-        </p:nvPicPr>
-        <p:blipFill>
-          <a:blip r:embed="rId5"/>
-          <a:stretch>
-            <a:fillRect/>
-          </a:stretch>
-        </p:blipFill>
-        <p:spPr>
-          <a:xfrm>
-            <a:off x="2971800" y="3291839"/>
-            <a:ext cx="502920" cy="502920"/>
-          </a:xfrm>
-          <a:prstGeom prst="rect">
-            <a:avLst/>
-          </a:prstGeom>
-        </p:spPr>
-      </p:pic>
-      <p:pic>
-        <p:nvPicPr>
-          <p:cNvPr id="10" name="Picture 9" descr="layers-065A82-96.png"/>
-          <p:cNvPicPr>
-            <a:picLocks noChangeAspect="1"/>
-          </p:cNvPicPr>
-          <p:nvPr/>
-        </p:nvPicPr>
-        <p:blipFill>
-          <a:blip r:embed="rId6"/>
-          <a:stretch>
-            <a:fillRect/>
-          </a:stretch>
-        </p:blipFill>
-        <p:spPr>
-          <a:xfrm>
-            <a:off x="3794760" y="2926079"/>
-            <a:ext cx="822960" cy="822960"/>
-          </a:xfrm>
-          <a:prstGeom prst="rect">
-            <a:avLst/>
-          </a:prstGeom>
-        </p:spPr>
-      </p:pic>
-      <p:sp>
-        <p:nvSpPr>
-          <p:cNvPr id="11" name="TextBox 10"/>
+      <p:sp>
+        <p:nvSpPr>
+          <p:cNvPr id="9" name="TextBox 8"/>
           <p:cNvSpPr txBox="1"/>
           <p:nvPr/>
         </p:nvSpPr>
         <p:spPr>
           <a:xfrm>
-            <a:off x="5029200" y="2926079"/>
-            <a:ext cx="5852160" cy="1417320"/>
+            <a:off x="2514600" y="3209544"/>
+            <a:ext cx="8869680" cy="960120"/>
           </a:xfrm>
           <a:prstGeom prst="rect">
             <a:avLst/>
@@ -31953,64 +31641,42 @@
           <a:noFill/>
         </p:spPr>
         <p:txBody>
-          <a:bodyPr wrap="square" lIns="0" rIns="0" tIns="0" bIns="0" anchor="t">
+          <a:bodyPr wrap="square" lIns="0" rIns="0" tIns="0" bIns="0" anchor="ctr">
             <a:spAutoFit/>
           </a:bodyPr>
           <a:lstStyle/>
           <a:p>
             <a:pPr algn="l">
               <a:lnSpc>
-                <a:spcPct val="128000"/>
+                <a:spcPct val="125000"/>
               </a:lnSpc>
-              <a:spcAft>
-                <a:spcPts val="1000"/>
-              </a:spcAft>
             </a:pPr>
             <a:r>
-              <a:rPr sz="1700" b="1" i="0">
+              <a:rPr sz="1500" b="0" i="1">
                 <a:solidFill>
                   <a:srgbClr val="21295C"/>
                 </a:solidFill>
                 <a:latin typeface="Arial"/>
               </a:rPr>
-              <a:t>Десять почти одинаковых заголовков от разных изданий</a:t>
-            </a:r>
-          </a:p>
-          <a:p>
-            <a:pPr algn="l">
-              <a:lnSpc>
-                <a:spcPct val="128000"/>
-              </a:lnSpc>
-              <a:spcAft>
-                <a:spcPts val="0"/>
-              </a:spcAft>
-            </a:pPr>
-            <a:r>
-              <a:rPr sz="1400" b="0" i="0">
-                <a:solidFill>
-                  <a:srgbClr val="6B7685"/>
-                </a:solidFill>
-                <a:latin typeface="Arial"/>
-              </a:rPr>
-              <a:t>→ одна объединённая карточка события</a:t>
-            </a:r>
-          </a:p>
-        </p:txBody>
-      </p:sp>
-      <p:sp>
-        <p:nvSpPr>
-          <p:cNvPr id="12" name="Rounded Rectangle 11"/>
+              <a:t>Десять почти одинаковых заголовков → одна объединённая карточка события</a:t>
+            </a:r>
+          </a:p>
+        </p:txBody>
+      </p:sp>
+      <p:sp>
+        <p:nvSpPr>
+          <p:cNvPr id="10" name="Rounded Rectangle 9"/>
           <p:cNvSpPr/>
           <p:nvPr/>
         </p:nvSpPr>
         <p:spPr>
           <a:xfrm>
-            <a:off x="502920" y="5212080"/>
-            <a:ext cx="11183112" cy="1325880"/>
+            <a:off x="502920" y="4352544"/>
+            <a:ext cx="11183112" cy="2368295"/>
           </a:xfrm>
           <a:prstGeom prst="roundRect">
             <a:avLst>
-              <a:gd name="adj" fmla="val 22988"/>
+              <a:gd name="adj" fmla="val 12870"/>
             </a:avLst>
           </a:prstGeom>
           <a:solidFill>
@@ -32033,14 +31699,14 @@
       </p:sp>
       <p:sp>
         <p:nvSpPr>
-          <p:cNvPr id="13" name="TextBox 12"/>
+          <p:cNvPr id="11" name="TextBox 10"/>
           <p:cNvSpPr txBox="1"/>
           <p:nvPr/>
         </p:nvSpPr>
         <p:spPr>
           <a:xfrm>
-            <a:off x="777240" y="5212080"/>
-            <a:ext cx="10607040" cy="1325880"/>
+            <a:off x="777240" y="4352544"/>
+            <a:ext cx="10607040" cy="2368295"/>
           </a:xfrm>
           <a:prstGeom prst="rect">
             <a:avLst/>
@@ -32059,7 +31725,7 @@
               </a:lnSpc>
             </a:pPr>
             <a:r>
-              <a:rPr sz="2200" b="1" i="0">
+              <a:rPr sz="2000" b="1" i="0">
                 <a:solidFill>
                   <a:srgbClr val="21295C"/>
                 </a:solidFill>
@@ -32701,8 +32367,8 @@
         </p:nvSpPr>
         <p:spPr>
           <a:xfrm>
-            <a:off x="502920" y="411480"/>
-            <a:ext cx="11183112" cy="914400"/>
+            <a:off x="502920" y="228600"/>
+            <a:ext cx="11183112" cy="411480"/>
           </a:xfrm>
           <a:prstGeom prst="rect">
             <a:avLst/>
@@ -32721,7 +32387,7 @@
               </a:lnSpc>
             </a:pPr>
             <a:r>
-              <a:rPr sz="2800" b="1" i="0">
+              <a:rPr sz="2600" b="1" i="0">
                 <a:solidFill>
                   <a:srgbClr val="21295C"/>
                 </a:solidFill>
@@ -32740,12 +32406,12 @@
         </p:nvSpPr>
         <p:spPr>
           <a:xfrm>
-            <a:off x="502920" y="1051560"/>
-            <a:ext cx="11183112" cy="914400"/>
+            <a:off x="502920" y="713232"/>
+            <a:ext cx="11183112" cy="2331720"/>
           </a:xfrm>
           <a:prstGeom prst="roundRect">
             <a:avLst>
-              <a:gd name="adj" fmla="val 25000"/>
+              <a:gd name="adj" fmla="val 13071"/>
             </a:avLst>
           </a:prstGeom>
           <a:solidFill>
@@ -32782,7 +32448,7 @@
         </p:blipFill>
         <p:spPr>
           <a:xfrm>
-            <a:off x="722376" y="1225295"/>
+            <a:off x="722376" y="886968"/>
             <a:ext cx="292608" cy="292608"/>
           </a:xfrm>
           <a:prstGeom prst="rect">
@@ -32798,8 +32464,8 @@
         </p:nvSpPr>
         <p:spPr>
           <a:xfrm>
-            <a:off x="722376" y="1563624"/>
-            <a:ext cx="10744200" cy="182880"/>
+            <a:off x="722376" y="1225296"/>
+            <a:ext cx="10744200" cy="1600199"/>
           </a:xfrm>
           <a:prstGeom prst="rect">
             <a:avLst/>
@@ -32824,7 +32490,7 @@
                 </a:solidFill>
                 <a:latin typeface="Arial"/>
               </a:rPr>
-              <a:t>«Прислали ZIP на 4,2 ГБ — внутри и сканы актов сверки, и договоры, нужны только накладные»</a:t>
+              <a:t>«Коллеги, выгрузила архив, как просили — вот ссылка на файлообменник, ZIP получился на 4,2 ГБ, извините, что так долго собирала, почта у нас опять письма режет после 20 МБ. Внутри вперемешку: и сканы актов сверки с поставщиками, и сами договоры, и накладные — я их особо не сортировала, как было в папке за год, так и заархивировала. Нужны вам, как понимаю, только накладные, остальное можно игнорировать. Кстати, отдельно от этого — завтра у нас закрытие месяца, если что-то понадобится досчитать по кассе, я буду занята примерно до обеда. Скажите, если архив не открылся или что-то не так с кодировкой».</a:t>
             </a:r>
           </a:p>
         </p:txBody>
@@ -32837,12 +32503,12 @@
         </p:nvSpPr>
         <p:spPr>
           <a:xfrm>
-            <a:off x="502920" y="2194560"/>
-            <a:ext cx="2644902" cy="1965960"/>
+            <a:off x="502920" y="3227832"/>
+            <a:ext cx="2644902" cy="1600200"/>
           </a:xfrm>
           <a:prstGeom prst="roundRect">
             <a:avLst>
-              <a:gd name="adj" fmla="val 15503"/>
+              <a:gd name="adj" fmla="val 19047"/>
             </a:avLst>
           </a:prstGeom>
           <a:solidFill>
@@ -32871,8 +32537,8 @@
         </p:nvSpPr>
         <p:spPr>
           <a:xfrm>
-            <a:off x="630936" y="2304288"/>
-            <a:ext cx="2388870" cy="274320"/>
+            <a:off x="630936" y="3319272"/>
+            <a:ext cx="2388870" cy="256032"/>
           </a:xfrm>
           <a:prstGeom prst="rect">
             <a:avLst/>
@@ -32891,7 +32557,7 @@
               </a:lnSpc>
             </a:pPr>
             <a:r>
-              <a:rPr sz="1150" b="1" i="0">
+              <a:rPr sz="1100" b="1" i="0">
                 <a:solidFill>
                   <a:srgbClr val="065A82"/>
                 </a:solidFill>
@@ -32910,8 +32576,8 @@
         </p:nvSpPr>
         <p:spPr>
           <a:xfrm>
-            <a:off x="630936" y="2670048"/>
-            <a:ext cx="768857" cy="329184"/>
+            <a:off x="630936" y="3630168"/>
+            <a:ext cx="768857" cy="274320"/>
           </a:xfrm>
           <a:prstGeom prst="rect">
             <a:avLst/>
@@ -32940,8 +32606,8 @@
         </p:nvSpPr>
         <p:spPr>
           <a:xfrm>
-            <a:off x="630936" y="2670048"/>
-            <a:ext cx="768857" cy="329184"/>
+            <a:off x="630936" y="3630168"/>
+            <a:ext cx="768857" cy="274320"/>
           </a:xfrm>
           <a:prstGeom prst="rect">
             <a:avLst/>
@@ -32979,8 +32645,8 @@
         </p:nvSpPr>
         <p:spPr>
           <a:xfrm>
-            <a:off x="1427226" y="2670048"/>
-            <a:ext cx="768857" cy="329184"/>
+            <a:off x="1427226" y="3630168"/>
+            <a:ext cx="768857" cy="274320"/>
           </a:xfrm>
           <a:prstGeom prst="rect">
             <a:avLst/>
@@ -33009,8 +32675,8 @@
         </p:nvSpPr>
         <p:spPr>
           <a:xfrm>
-            <a:off x="1427226" y="2670048"/>
-            <a:ext cx="768857" cy="329184"/>
+            <a:off x="1427226" y="3630168"/>
+            <a:ext cx="768857" cy="274320"/>
           </a:xfrm>
           <a:prstGeom prst="rect">
             <a:avLst/>
@@ -33048,8 +32714,8 @@
         </p:nvSpPr>
         <p:spPr>
           <a:xfrm>
-            <a:off x="2223516" y="2670048"/>
-            <a:ext cx="768857" cy="329184"/>
+            <a:off x="2223516" y="3630168"/>
+            <a:ext cx="768857" cy="274320"/>
           </a:xfrm>
           <a:prstGeom prst="rect">
             <a:avLst/>
@@ -33078,8 +32744,8 @@
         </p:nvSpPr>
         <p:spPr>
           <a:xfrm>
-            <a:off x="2223516" y="2670048"/>
-            <a:ext cx="768857" cy="329184"/>
+            <a:off x="2223516" y="3630168"/>
+            <a:ext cx="768857" cy="274320"/>
           </a:xfrm>
           <a:prstGeom prst="rect">
             <a:avLst/>
@@ -33117,8 +32783,8 @@
         </p:nvSpPr>
         <p:spPr>
           <a:xfrm>
-            <a:off x="630936" y="3026663"/>
-            <a:ext cx="768857" cy="329184"/>
+            <a:off x="630936" y="3931920"/>
+            <a:ext cx="768857" cy="274320"/>
           </a:xfrm>
           <a:prstGeom prst="rect">
             <a:avLst/>
@@ -33149,8 +32815,8 @@
         </p:nvSpPr>
         <p:spPr>
           <a:xfrm>
-            <a:off x="1427226" y="3026663"/>
-            <a:ext cx="768857" cy="329184"/>
+            <a:off x="1427226" y="3931920"/>
+            <a:ext cx="768857" cy="274320"/>
           </a:xfrm>
           <a:prstGeom prst="rect">
             <a:avLst/>
@@ -33181,8 +32847,8 @@
         </p:nvSpPr>
         <p:spPr>
           <a:xfrm>
-            <a:off x="2223516" y="3026663"/>
-            <a:ext cx="768857" cy="329184"/>
+            <a:off x="2223516" y="3931920"/>
+            <a:ext cx="768857" cy="274320"/>
           </a:xfrm>
           <a:prstGeom prst="rect">
             <a:avLst/>
@@ -33213,12 +32879,12 @@
         </p:nvSpPr>
         <p:spPr>
           <a:xfrm>
-            <a:off x="3348990" y="2194560"/>
-            <a:ext cx="2644902" cy="1965960"/>
+            <a:off x="3348990" y="3227832"/>
+            <a:ext cx="2644902" cy="1600200"/>
           </a:xfrm>
           <a:prstGeom prst="roundRect">
             <a:avLst>
-              <a:gd name="adj" fmla="val 15503"/>
+              <a:gd name="adj" fmla="val 19047"/>
             </a:avLst>
           </a:prstGeom>
           <a:solidFill>
@@ -33247,8 +32913,8 @@
         </p:nvSpPr>
         <p:spPr>
           <a:xfrm>
-            <a:off x="3477006" y="2304288"/>
-            <a:ext cx="2388870" cy="274320"/>
+            <a:off x="3477006" y="3319272"/>
+            <a:ext cx="2388870" cy="256032"/>
           </a:xfrm>
           <a:prstGeom prst="rect">
             <a:avLst/>
@@ -33267,7 +32933,7 @@
               </a:lnSpc>
             </a:pPr>
             <a:r>
-              <a:rPr sz="1150" b="1" i="0">
+              <a:rPr sz="1100" b="1" i="0">
                 <a:solidFill>
                   <a:srgbClr val="065A82"/>
                 </a:solidFill>
@@ -33286,8 +32952,8 @@
         </p:nvSpPr>
         <p:spPr>
           <a:xfrm>
-            <a:off x="3477006" y="2670048"/>
-            <a:ext cx="768857" cy="329184"/>
+            <a:off x="3477006" y="3630168"/>
+            <a:ext cx="768857" cy="274320"/>
           </a:xfrm>
           <a:prstGeom prst="rect">
             <a:avLst/>
@@ -33316,8 +32982,8 @@
         </p:nvSpPr>
         <p:spPr>
           <a:xfrm>
-            <a:off x="3477006" y="2670048"/>
-            <a:ext cx="768857" cy="329184"/>
+            <a:off x="3477006" y="3630168"/>
+            <a:ext cx="768857" cy="274320"/>
           </a:xfrm>
           <a:prstGeom prst="rect">
             <a:avLst/>
@@ -33355,8 +33021,8 @@
         </p:nvSpPr>
         <p:spPr>
           <a:xfrm>
-            <a:off x="4273296" y="2670048"/>
-            <a:ext cx="768857" cy="329184"/>
+            <a:off x="4273296" y="3630168"/>
+            <a:ext cx="768857" cy="274320"/>
           </a:xfrm>
           <a:prstGeom prst="rect">
             <a:avLst/>
@@ -33385,8 +33051,8 @@
         </p:nvSpPr>
         <p:spPr>
           <a:xfrm>
-            <a:off x="4273296" y="2670048"/>
-            <a:ext cx="768857" cy="329184"/>
+            <a:off x="4273296" y="3630168"/>
+            <a:ext cx="768857" cy="274320"/>
           </a:xfrm>
           <a:prstGeom prst="rect">
             <a:avLst/>
@@ -33424,8 +33090,8 @@
         </p:nvSpPr>
         <p:spPr>
           <a:xfrm>
-            <a:off x="5069586" y="2670048"/>
-            <a:ext cx="768857" cy="329184"/>
+            <a:off x="5069586" y="3630168"/>
+            <a:ext cx="768857" cy="274320"/>
           </a:xfrm>
           <a:prstGeom prst="rect">
             <a:avLst/>
@@ -33454,8 +33120,8 @@
         </p:nvSpPr>
         <p:spPr>
           <a:xfrm>
-            <a:off x="5069586" y="2670048"/>
-            <a:ext cx="768857" cy="329184"/>
+            <a:off x="5069586" y="3630168"/>
+            <a:ext cx="768857" cy="274320"/>
           </a:xfrm>
           <a:prstGeom prst="rect">
             <a:avLst/>
@@ -33493,8 +33159,8 @@
         </p:nvSpPr>
         <p:spPr>
           <a:xfrm>
-            <a:off x="3477006" y="3026663"/>
-            <a:ext cx="768857" cy="329184"/>
+            <a:off x="3477006" y="3931920"/>
+            <a:ext cx="768857" cy="274320"/>
           </a:xfrm>
           <a:prstGeom prst="rect">
             <a:avLst/>
@@ -33525,8 +33191,8 @@
         </p:nvSpPr>
         <p:spPr>
           <a:xfrm>
-            <a:off x="4273296" y="3026663"/>
-            <a:ext cx="768857" cy="329184"/>
+            <a:off x="4273296" y="3931920"/>
+            <a:ext cx="768857" cy="274320"/>
           </a:xfrm>
           <a:prstGeom prst="rect">
             <a:avLst/>
@@ -33557,8 +33223,8 @@
         </p:nvSpPr>
         <p:spPr>
           <a:xfrm>
-            <a:off x="5069586" y="3026663"/>
-            <a:ext cx="768857" cy="329184"/>
+            <a:off x="5069586" y="3931920"/>
+            <a:ext cx="768857" cy="274320"/>
           </a:xfrm>
           <a:prstGeom prst="rect">
             <a:avLst/>
@@ -33589,12 +33255,12 @@
         </p:nvSpPr>
         <p:spPr>
           <a:xfrm>
-            <a:off x="6195060" y="2194560"/>
-            <a:ext cx="2644902" cy="1965960"/>
+            <a:off x="6195060" y="3227832"/>
+            <a:ext cx="2644902" cy="1600200"/>
           </a:xfrm>
           <a:prstGeom prst="roundRect">
             <a:avLst>
-              <a:gd name="adj" fmla="val 15503"/>
+              <a:gd name="adj" fmla="val 19047"/>
             </a:avLst>
           </a:prstGeom>
           <a:solidFill>
@@ -33623,8 +33289,8 @@
         </p:nvSpPr>
         <p:spPr>
           <a:xfrm>
-            <a:off x="6323076" y="2304288"/>
-            <a:ext cx="2388870" cy="274320"/>
+            <a:off x="6323076" y="3319272"/>
+            <a:ext cx="2388870" cy="256032"/>
           </a:xfrm>
           <a:prstGeom prst="rect">
             <a:avLst/>
@@ -33643,7 +33309,7 @@
               </a:lnSpc>
             </a:pPr>
             <a:r>
-              <a:rPr sz="1150" b="1" i="0">
+              <a:rPr sz="1100" b="1" i="0">
                 <a:solidFill>
                   <a:srgbClr val="065A82"/>
                 </a:solidFill>
@@ -33662,8 +33328,8 @@
         </p:nvSpPr>
         <p:spPr>
           <a:xfrm>
-            <a:off x="6323076" y="2670048"/>
-            <a:ext cx="768857" cy="329184"/>
+            <a:off x="6323076" y="3630168"/>
+            <a:ext cx="768857" cy="274320"/>
           </a:xfrm>
           <a:prstGeom prst="rect">
             <a:avLst/>
@@ -33692,8 +33358,8 @@
         </p:nvSpPr>
         <p:spPr>
           <a:xfrm>
-            <a:off x="6323076" y="2670048"/>
-            <a:ext cx="768857" cy="329184"/>
+            <a:off x="6323076" y="3630168"/>
+            <a:ext cx="768857" cy="274320"/>
           </a:xfrm>
           <a:prstGeom prst="rect">
             <a:avLst/>
@@ -33731,8 +33397,8 @@
         </p:nvSpPr>
         <p:spPr>
           <a:xfrm>
-            <a:off x="7119366" y="2670048"/>
-            <a:ext cx="768857" cy="329184"/>
+            <a:off x="7119366" y="3630168"/>
+            <a:ext cx="768857" cy="274320"/>
           </a:xfrm>
           <a:prstGeom prst="rect">
             <a:avLst/>
@@ -33761,8 +33427,8 @@
         </p:nvSpPr>
         <p:spPr>
           <a:xfrm>
-            <a:off x="7119366" y="2670048"/>
-            <a:ext cx="768857" cy="329184"/>
+            <a:off x="7119366" y="3630168"/>
+            <a:ext cx="768857" cy="274320"/>
           </a:xfrm>
           <a:prstGeom prst="rect">
             <a:avLst/>
@@ -33800,8 +33466,8 @@
         </p:nvSpPr>
         <p:spPr>
           <a:xfrm>
-            <a:off x="7915656" y="2670048"/>
-            <a:ext cx="768857" cy="329184"/>
+            <a:off x="7915656" y="3630168"/>
+            <a:ext cx="768857" cy="274320"/>
           </a:xfrm>
           <a:prstGeom prst="rect">
             <a:avLst/>
@@ -33830,8 +33496,8 @@
         </p:nvSpPr>
         <p:spPr>
           <a:xfrm>
-            <a:off x="7915656" y="2670048"/>
-            <a:ext cx="768857" cy="329184"/>
+            <a:off x="7915656" y="3630168"/>
+            <a:ext cx="768857" cy="274320"/>
           </a:xfrm>
           <a:prstGeom prst="rect">
             <a:avLst/>
@@ -33869,8 +33535,8 @@
         </p:nvSpPr>
         <p:spPr>
           <a:xfrm>
-            <a:off x="6323076" y="3026663"/>
-            <a:ext cx="768857" cy="329184"/>
+            <a:off x="6323076" y="3931920"/>
+            <a:ext cx="768857" cy="274320"/>
           </a:xfrm>
           <a:prstGeom prst="rect">
             <a:avLst/>
@@ -33901,8 +33567,8 @@
         </p:nvSpPr>
         <p:spPr>
           <a:xfrm>
-            <a:off x="7119366" y="3026663"/>
-            <a:ext cx="768857" cy="329184"/>
+            <a:off x="7119366" y="3931920"/>
+            <a:ext cx="768857" cy="274320"/>
           </a:xfrm>
           <a:prstGeom prst="rect">
             <a:avLst/>
@@ -33933,8 +33599,8 @@
         </p:nvSpPr>
         <p:spPr>
           <a:xfrm>
-            <a:off x="7915656" y="3026663"/>
-            <a:ext cx="768857" cy="329184"/>
+            <a:off x="7915656" y="3931920"/>
+            <a:ext cx="768857" cy="274320"/>
           </a:xfrm>
           <a:prstGeom prst="rect">
             <a:avLst/>
@@ -33965,12 +33631,12 @@
         </p:nvSpPr>
         <p:spPr>
           <a:xfrm>
-            <a:off x="9041130" y="2194560"/>
-            <a:ext cx="2644902" cy="1965960"/>
+            <a:off x="9041130" y="3227832"/>
+            <a:ext cx="2644902" cy="1600200"/>
           </a:xfrm>
           <a:prstGeom prst="roundRect">
             <a:avLst>
-              <a:gd name="adj" fmla="val 15503"/>
+              <a:gd name="adj" fmla="val 19047"/>
             </a:avLst>
           </a:prstGeom>
           <a:solidFill>
@@ -33999,8 +33665,8 @@
         </p:nvSpPr>
         <p:spPr>
           <a:xfrm>
-            <a:off x="9169146" y="2304288"/>
-            <a:ext cx="2388870" cy="274320"/>
+            <a:off x="9169146" y="3319272"/>
+            <a:ext cx="2388870" cy="256032"/>
           </a:xfrm>
           <a:prstGeom prst="rect">
             <a:avLst/>
@@ -34019,7 +33685,7 @@
               </a:lnSpc>
             </a:pPr>
             <a:r>
-              <a:rPr sz="1150" b="1" i="0">
+              <a:rPr sz="1100" b="1" i="0">
                 <a:solidFill>
                   <a:srgbClr val="065A82"/>
                 </a:solidFill>
@@ -34038,8 +33704,8 @@
         </p:nvSpPr>
         <p:spPr>
           <a:xfrm>
-            <a:off x="9169146" y="2670048"/>
-            <a:ext cx="768857" cy="329184"/>
+            <a:off x="9169146" y="3630168"/>
+            <a:ext cx="768857" cy="274320"/>
           </a:xfrm>
           <a:prstGeom prst="rect">
             <a:avLst/>
@@ -34068,8 +33734,8 @@
         </p:nvSpPr>
         <p:spPr>
           <a:xfrm>
-            <a:off x="9169146" y="2670048"/>
-            <a:ext cx="768857" cy="329184"/>
+            <a:off x="9169146" y="3630168"/>
+            <a:ext cx="768857" cy="274320"/>
           </a:xfrm>
           <a:prstGeom prst="rect">
             <a:avLst/>
@@ -34107,8 +33773,8 @@
         </p:nvSpPr>
         <p:spPr>
           <a:xfrm>
-            <a:off x="9965436" y="2670048"/>
-            <a:ext cx="768857" cy="329184"/>
+            <a:off x="9965436" y="3630168"/>
+            <a:ext cx="768857" cy="274320"/>
           </a:xfrm>
           <a:prstGeom prst="rect">
             <a:avLst/>
@@ -34137,8 +33803,8 @@
         </p:nvSpPr>
         <p:spPr>
           <a:xfrm>
-            <a:off x="9965436" y="2670048"/>
-            <a:ext cx="768857" cy="329184"/>
+            <a:off x="9965436" y="3630168"/>
+            <a:ext cx="768857" cy="274320"/>
           </a:xfrm>
           <a:prstGeom prst="rect">
             <a:avLst/>
@@ -34176,8 +33842,8 @@
         </p:nvSpPr>
         <p:spPr>
           <a:xfrm>
-            <a:off x="10761726" y="2670048"/>
-            <a:ext cx="768857" cy="329184"/>
+            <a:off x="10761726" y="3630168"/>
+            <a:ext cx="768857" cy="274320"/>
           </a:xfrm>
           <a:prstGeom prst="rect">
             <a:avLst/>
@@ -34206,8 +33872,8 @@
         </p:nvSpPr>
         <p:spPr>
           <a:xfrm>
-            <a:off x="10761726" y="2670048"/>
-            <a:ext cx="768857" cy="329184"/>
+            <a:off x="10761726" y="3630168"/>
+            <a:ext cx="768857" cy="274320"/>
           </a:xfrm>
           <a:prstGeom prst="rect">
             <a:avLst/>
@@ -34245,8 +33911,8 @@
         </p:nvSpPr>
         <p:spPr>
           <a:xfrm>
-            <a:off x="9169146" y="3026663"/>
-            <a:ext cx="768857" cy="329184"/>
+            <a:off x="9169146" y="3931920"/>
+            <a:ext cx="768857" cy="274320"/>
           </a:xfrm>
           <a:prstGeom prst="rect">
             <a:avLst/>
@@ -34277,8 +33943,8 @@
         </p:nvSpPr>
         <p:spPr>
           <a:xfrm>
-            <a:off x="9965436" y="3026663"/>
-            <a:ext cx="768857" cy="329184"/>
+            <a:off x="9965436" y="3931920"/>
+            <a:ext cx="768857" cy="274320"/>
           </a:xfrm>
           <a:prstGeom prst="rect">
             <a:avLst/>
@@ -34309,8 +33975,8 @@
         </p:nvSpPr>
         <p:spPr>
           <a:xfrm>
-            <a:off x="10761726" y="3026663"/>
-            <a:ext cx="768857" cy="329184"/>
+            <a:off x="10761726" y="3931920"/>
+            <a:ext cx="768857" cy="274320"/>
           </a:xfrm>
           <a:prstGeom prst="rect">
             <a:avLst/>
@@ -34335,57 +34001,18 @@
       </p:sp>
       <p:sp>
         <p:nvSpPr>
-          <p:cNvPr id="50" name="TextBox 49"/>
-          <p:cNvSpPr txBox="1"/>
-          <p:nvPr/>
-        </p:nvSpPr>
-        <p:spPr>
-          <a:xfrm>
-            <a:off x="502920" y="4251959"/>
-            <a:ext cx="11183112" cy="320040"/>
-          </a:xfrm>
-          <a:prstGeom prst="rect">
-            <a:avLst/>
-          </a:prstGeom>
-          <a:noFill/>
-        </p:spPr>
-        <p:txBody>
-          <a:bodyPr wrap="square" lIns="0" rIns="0" tIns="0" bIns="0" anchor="t">
-            <a:spAutoFit/>
-          </a:bodyPr>
-          <a:lstStyle/>
-          <a:p>
-            <a:pPr algn="ctr">
-              <a:lnSpc>
-                <a:spcPct val="115000"/>
-              </a:lnSpc>
-            </a:pPr>
-            <a:r>
-              <a:rPr sz="1200" b="0" i="1">
-                <a:solidFill>
-                  <a:srgbClr val="6B7685"/>
-                </a:solidFill>
-                <a:latin typeface="Arial"/>
-              </a:rPr>
-              <a:t>Форматы разъехались — разные колонки, разные форматы дат, один документ на английском</a:t>
-            </a:r>
-          </a:p>
-        </p:txBody>
-      </p:sp>
-      <p:sp>
-        <p:nvSpPr>
-          <p:cNvPr id="51" name="Rounded Rectangle 50"/>
+          <p:cNvPr id="50" name="Rounded Rectangle 49"/>
           <p:cNvSpPr/>
           <p:nvPr/>
         </p:nvSpPr>
         <p:spPr>
           <a:xfrm>
-            <a:off x="502920" y="4663440"/>
-            <a:ext cx="11183112" cy="777240"/>
+            <a:off x="502920" y="5029200"/>
+            <a:ext cx="11183112" cy="1691639"/>
           </a:xfrm>
           <a:prstGeom prst="roundRect">
             <a:avLst>
-              <a:gd name="adj" fmla="val 25000"/>
+              <a:gd name="adj" fmla="val 18018"/>
             </a:avLst>
           </a:prstGeom>
           <a:solidFill>
@@ -34408,14 +34035,14 @@
       </p:sp>
       <p:sp>
         <p:nvSpPr>
-          <p:cNvPr id="52" name="TextBox 51"/>
+          <p:cNvPr id="51" name="TextBox 50"/>
           <p:cNvSpPr txBox="1"/>
           <p:nvPr/>
         </p:nvSpPr>
         <p:spPr>
           <a:xfrm>
-            <a:off x="777240" y="4663440"/>
-            <a:ext cx="10607040" cy="777240"/>
+            <a:off x="777240" y="5029200"/>
+            <a:ext cx="10607040" cy="1691639"/>
           </a:xfrm>
           <a:prstGeom prst="rect">
             <a:avLst/>
@@ -34434,7 +34061,7 @@
               </a:lnSpc>
             </a:pPr>
             <a:r>
-              <a:rPr sz="2200" b="1" i="0">
+              <a:rPr sz="2000" b="1" i="0">
                 <a:solidFill>
                   <a:srgbClr val="21295C"/>
                 </a:solidFill>
@@ -34852,8 +34479,8 @@
         </p:nvSpPr>
         <p:spPr>
           <a:xfrm>
-            <a:off x="502920" y="411480"/>
-            <a:ext cx="11183112" cy="914400"/>
+            <a:off x="502920" y="228600"/>
+            <a:ext cx="11183112" cy="411480"/>
           </a:xfrm>
           <a:prstGeom prst="rect">
             <a:avLst/>
@@ -34872,7 +34499,7 @@
               </a:lnSpc>
             </a:pPr>
             <a:r>
-              <a:rPr sz="2800" b="1" i="0">
+              <a:rPr sz="2600" b="1" i="0">
                 <a:solidFill>
                   <a:srgbClr val="21295C"/>
                 </a:solidFill>
@@ -34891,12 +34518,12 @@
         </p:nvSpPr>
         <p:spPr>
           <a:xfrm>
-            <a:off x="502920" y="1051560"/>
-            <a:ext cx="11183112" cy="960120"/>
+            <a:off x="502920" y="713232"/>
+            <a:ext cx="11183112" cy="2377440"/>
           </a:xfrm>
           <a:prstGeom prst="roundRect">
             <a:avLst>
-              <a:gd name="adj" fmla="val 25000"/>
+              <a:gd name="adj" fmla="val 12820"/>
             </a:avLst>
           </a:prstGeom>
           <a:solidFill>
@@ -34933,7 +34560,7 @@
         </p:blipFill>
         <p:spPr>
           <a:xfrm>
-            <a:off x="722376" y="1225295"/>
+            <a:off x="722376" y="886968"/>
             <a:ext cx="292608" cy="292608"/>
           </a:xfrm>
           <a:prstGeom prst="rect">
@@ -34949,8 +34576,8 @@
         </p:nvSpPr>
         <p:spPr>
           <a:xfrm>
-            <a:off x="722376" y="1563624"/>
-            <a:ext cx="10744200" cy="228600"/>
+            <a:off x="722376" y="1225296"/>
+            <a:ext cx="10744200" cy="1645920"/>
           </a:xfrm>
           <a:prstGeom prst="rect">
             <a:avLst/>
@@ -34969,13 +34596,13 @@
               </a:lnSpc>
             </a:pPr>
             <a:r>
-              <a:rPr sz="1600" b="0" i="1">
+              <a:rPr sz="1400" b="0" i="1">
                 <a:solidFill>
                   <a:srgbClr val="21295C"/>
                 </a:solidFill>
                 <a:latin typeface="Arial"/>
               </a:rPr>
-              <a:t>«40 ГБ логов за квартал — подрядчик ждёт архив в пятницу»</a:t>
+              <a:t>«Слушай, у нас подрядчик по перфомансу просит логи прода за квартал для анализа — говорят, без них не смогут найти, почему просадки на пиках. Я выгрузил, получилось около 40 ГБ, архив уже лежит на сервере. Но там внутри вперемешку и номера телефонов, и почты клиентов, и один раз даже видел фразу типа «передайте это Ивану из бухгалтерии» — видимо, из тела какого-то запроса залогировалось. Подрядчику нужна сама механика — структура запросов, тайминги, коды ошибок — а не данные людей, это же нельзя просто так отдавать. Они ждут архив в пятницу, у них спринт начинается, так что руками перебирать некогда совсем».</a:t>
             </a:r>
           </a:p>
         </p:txBody>
@@ -34988,12 +34615,12 @@
         </p:nvSpPr>
         <p:spPr>
           <a:xfrm>
-            <a:off x="502920" y="2286000"/>
-            <a:ext cx="11183112" cy="2651760"/>
+            <a:off x="502920" y="3273552"/>
+            <a:ext cx="11183112" cy="1051560"/>
           </a:xfrm>
           <a:prstGeom prst="roundRect">
             <a:avLst>
-              <a:gd name="adj" fmla="val 11494"/>
+              <a:gd name="adj" fmla="val 25000"/>
             </a:avLst>
           </a:prstGeom>
           <a:solidFill>
@@ -35030,96 +34657,24 @@
         </p:blipFill>
         <p:spPr>
           <a:xfrm>
-            <a:off x="868680" y="2788920"/>
-            <a:ext cx="868680" cy="868680"/>
+            <a:off x="822960" y="3479292"/>
+            <a:ext cx="640080" cy="640080"/>
           </a:xfrm>
           <a:prstGeom prst="rect">
             <a:avLst/>
           </a:prstGeom>
         </p:spPr>
       </p:pic>
-      <p:pic>
-        <p:nvPicPr>
-          <p:cNvPr id="8" name="Picture 7" descr="phone-028090-64.png"/>
-          <p:cNvPicPr>
-            <a:picLocks noChangeAspect="1"/>
-          </p:cNvPicPr>
-          <p:nvPr/>
-        </p:nvPicPr>
-        <p:blipFill>
-          <a:blip r:embed="rId4"/>
-          <a:stretch>
-            <a:fillRect/>
-          </a:stretch>
-        </p:blipFill>
-        <p:spPr>
-          <a:xfrm>
-            <a:off x="2057400" y="3017520"/>
-            <a:ext cx="502920" cy="502920"/>
-          </a:xfrm>
-          <a:prstGeom prst="rect">
-            <a:avLst/>
-          </a:prstGeom>
-        </p:spPr>
-      </p:pic>
-      <p:pic>
-        <p:nvPicPr>
-          <p:cNvPr id="9" name="Picture 8" descr="mail-065A82-96.png"/>
-          <p:cNvPicPr>
-            <a:picLocks noChangeAspect="1"/>
-          </p:cNvPicPr>
-          <p:nvPr/>
-        </p:nvPicPr>
-        <p:blipFill>
-          <a:blip r:embed="rId5"/>
-          <a:stretch>
-            <a:fillRect/>
-          </a:stretch>
-        </p:blipFill>
-        <p:spPr>
-          <a:xfrm>
-            <a:off x="2834640" y="2971800"/>
-            <a:ext cx="548640" cy="548640"/>
-          </a:xfrm>
-          <a:prstGeom prst="rect">
-            <a:avLst/>
-          </a:prstGeom>
-        </p:spPr>
-      </p:pic>
-      <p:pic>
-        <p:nvPicPr>
-          <p:cNvPr id="10" name="Picture 9" descr="user-round-F0AB00-64.png"/>
-          <p:cNvPicPr>
-            <a:picLocks noChangeAspect="1"/>
-          </p:cNvPicPr>
-          <p:nvPr/>
-        </p:nvPicPr>
-        <p:blipFill>
-          <a:blip r:embed="rId6"/>
-          <a:stretch>
-            <a:fillRect/>
-          </a:stretch>
-        </p:blipFill>
-        <p:spPr>
-          <a:xfrm>
-            <a:off x="3611880" y="3017520"/>
-            <a:ext cx="502920" cy="502920"/>
-          </a:xfrm>
-          <a:prstGeom prst="rect">
-            <a:avLst/>
-          </a:prstGeom>
-        </p:spPr>
-      </p:pic>
-      <p:sp>
-        <p:nvSpPr>
-          <p:cNvPr id="11" name="TextBox 10"/>
+      <p:sp>
+        <p:nvSpPr>
+          <p:cNvPr id="8" name="TextBox 7"/>
           <p:cNvSpPr txBox="1"/>
           <p:nvPr/>
         </p:nvSpPr>
         <p:spPr>
           <a:xfrm>
-            <a:off x="4480560" y="2834640"/>
-            <a:ext cx="6400800" cy="1737360"/>
+            <a:off x="1691640" y="3273552"/>
+            <a:ext cx="9692640" cy="1051560"/>
           </a:xfrm>
           <a:prstGeom prst="rect">
             <a:avLst/>
@@ -35127,45 +34682,23 @@
           <a:noFill/>
         </p:spPr>
         <p:txBody>
-          <a:bodyPr wrap="square" lIns="0" rIns="0" tIns="0" bIns="0" anchor="t">
+          <a:bodyPr wrap="square" lIns="0" rIns="0" tIns="0" bIns="0" anchor="ctr">
             <a:spAutoFit/>
           </a:bodyPr>
           <a:lstStyle/>
           <a:p>
             <a:pPr algn="l">
               <a:lnSpc>
-                <a:spcPct val="130000"/>
+                <a:spcPct val="128000"/>
               </a:lnSpc>
-              <a:spcAft>
-                <a:spcPts val="1000"/>
-              </a:spcAft>
             </a:pPr>
             <a:r>
-              <a:rPr sz="1700" b="1" i="0">
+              <a:rPr sz="1500" b="0" i="1">
                 <a:solidFill>
                   <a:srgbClr val="21295C"/>
                 </a:solidFill>
                 <a:latin typeface="Arial"/>
               </a:rPr>
-              <a:t>Одна строка лога — телефон, email и фраза «передайте это Ивану из бухгалтерии»</a:t>
-            </a:r>
-          </a:p>
-          <a:p>
-            <a:pPr algn="l">
-              <a:lnSpc>
-                <a:spcPct val="130000"/>
-              </a:lnSpc>
-              <a:spcAft>
-                <a:spcPts val="0"/>
-              </a:spcAft>
-            </a:pPr>
-            <a:r>
-              <a:rPr sz="1400" b="0" i="0">
-                <a:solidFill>
-                  <a:srgbClr val="6B7685"/>
-                </a:solidFill>
-                <a:latin typeface="Arial"/>
-              </a:rPr>
               <a:t>Подрядчику нужны структура запросов, тайминги, ошибки — не данные людей</a:t>
             </a:r>
           </a:p>
@@ -35173,18 +34706,18 @@
       </p:sp>
       <p:sp>
         <p:nvSpPr>
-          <p:cNvPr id="12" name="Rounded Rectangle 11"/>
+          <p:cNvPr id="9" name="Rounded Rectangle 8"/>
           <p:cNvSpPr/>
           <p:nvPr/>
         </p:nvSpPr>
         <p:spPr>
           <a:xfrm>
-            <a:off x="502920" y="5212080"/>
-            <a:ext cx="11183112" cy="1325880"/>
+            <a:off x="502920" y="4526280"/>
+            <a:ext cx="11183112" cy="2194559"/>
           </a:xfrm>
           <a:prstGeom prst="roundRect">
             <a:avLst>
-              <a:gd name="adj" fmla="val 22988"/>
+              <a:gd name="adj" fmla="val 13888"/>
             </a:avLst>
           </a:prstGeom>
           <a:solidFill>
@@ -35207,14 +34740,14 @@
       </p:sp>
       <p:sp>
         <p:nvSpPr>
-          <p:cNvPr id="13" name="TextBox 12"/>
+          <p:cNvPr id="10" name="TextBox 9"/>
           <p:cNvSpPr txBox="1"/>
           <p:nvPr/>
         </p:nvSpPr>
         <p:spPr>
           <a:xfrm>
-            <a:off x="777240" y="5212080"/>
-            <a:ext cx="10607040" cy="1325880"/>
+            <a:off x="777240" y="4526280"/>
+            <a:ext cx="10607040" cy="2194559"/>
           </a:xfrm>
           <a:prstGeom prst="rect">
             <a:avLst/>
@@ -35233,7 +34766,7 @@
               </a:lnSpc>
             </a:pPr>
             <a:r>
-              <a:rPr sz="2200" b="1" i="0">
+              <a:rPr sz="2000" b="1" i="0">
                 <a:solidFill>
                   <a:srgbClr val="21295C"/>
                 </a:solidFill>

--- a/library/seminars/sem-02/rendered/sem-02.pptx
+++ b/library/seminars/sem-02/rendered/sem-02.pptx
@@ -795,57 +795,97 @@
           <a:lstStyle/>
           <a:p>
             <a:r>
-              <a:t>Зачитайте реплику целиком. Ключевое для решения — не выделено особо: идея</a:t>
-            </a:r>
-          </a:p>
-          <a:p>
-            <a:r>
-              <a:t>подсказок ответов и поиска похожих обращений, 12 операторов на линии,</a:t>
-            </a:r>
-          </a:p>
-          <a:p>
-            <a:r>
-              <a:t>около 300 тикетов в день, пик с 10:00 до 13:00. Онбординг новичков,</a:t>
-            </a:r>
-          </a:p>
-          <a:p>
-            <a:r>
-              <a:t>квартальное ревью — шум, к архитектурному выбору не относится. На слайде</a:t>
-            </a:r>
-          </a:p>
-          <a:p>
-            <a:r>
-              <a:t>показан рабочий стол оператора техподдержки: список тикетов, окно ответа</a:t>
-            </a:r>
-          </a:p>
-          <a:p>
-            <a:r>
-              <a:t>клиенту. Операторы весь рабочий день сидят в одном и том же интерфейсе</a:t>
-            </a:r>
-          </a:p>
-          <a:p>
-            <a:r>
-              <a:t>helpdesk-системы — что-то вроде Zendesk или Jira Service Management,</a:t>
-            </a:r>
-          </a:p>
-          <a:p>
-            <a:r>
-              <a:t>открывают тикет за тикетом, переключаются между обращениями десятками раз</a:t>
-            </a:r>
-          </a:p>
-          <a:p>
-            <a:r>
-              <a:t>за смену. Вопрос в зал: где должен жить этот помощник? Что вы предложите —</a:t>
-            </a:r>
-          </a:p>
-          <a:p>
-            <a:r>
-              <a:t>отдельное окно, встроенная подсказка прямо в интерфейсе, что-то ещё? И, что</a:t>
-            </a:r>
-          </a:p>
-          <a:p>
-            <a:r>
-              <a:t>не менее важно, почему именно так, а не иначе?</a:t>
+              <a:t>Зачитайте реплику целиком. Прямые сигналы: идея подсказок ответов и</a:t>
+            </a:r>
+          </a:p>
+          <a:p>
+            <a:r>
+              <a:t>поиска похожих обращений, 12 операторов на линии, около 300 тикетов в</a:t>
+            </a:r>
+          </a:p>
+          <a:p>
+            <a:r>
+              <a:t>день, пик с 10:00 до 13:00. Косвенный сигнал стоит явно вытащить в</a:t>
+            </a:r>
+          </a:p>
+          <a:p>
+            <a:r>
+              <a:t>обсуждении: часть операторов уже параллельно работает в Telegram —</a:t>
+            </a:r>
+          </a:p>
+          <a:p>
+            <a:r>
+              <a:t>это вторая, отдельная точка встраивания помощника, о которой заказчик</a:t>
+            </a:r>
+          </a:p>
+          <a:p>
+            <a:r>
+              <a:t>не спросил напрямую, но она реально существует и может оказаться не менее</a:t>
+            </a:r>
+          </a:p>
+          <a:p>
+            <a:r>
+              <a:t>важной, чем helpdesk. Корпоративный SSO — тоже косвенный плюс: единая</a:t>
+            </a:r>
+          </a:p>
+          <a:p>
+            <a:r>
+              <a:t>авторизация снижает цену интеграции, если помощник будет отдельным окном.</a:t>
+            </a:r>
+          </a:p>
+          <a:p>
+            <a:r>
+              <a:t>Обновление парка ноутбуков — шум-двойник: похоже на ИТ-факт про</a:t>
+            </a:r>
+          </a:p>
+          <a:p>
+            <a:r>
+              <a:t>инфраструктуру поддержки, но к архитектуре помощника отношения не имеет.</a:t>
+            </a:r>
+          </a:p>
+          <a:p>
+            <a:r>
+              <a:t>На слайде показан рабочий стол оператора техподдержки: список тикетов,</a:t>
+            </a:r>
+          </a:p>
+          <a:p>
+            <a:r>
+              <a:t>окно ответа клиенту. Операторы весь рабочий день сидят в одном и том же</a:t>
+            </a:r>
+          </a:p>
+          <a:p>
+            <a:r>
+              <a:t>интерфейсе helpdesk-системы — что-то вроде Zendesk или Jira Service</a:t>
+            </a:r>
+          </a:p>
+          <a:p>
+            <a:r>
+              <a:t>Management, открывают тикет за тикетом, переключаются между обращениями</a:t>
+            </a:r>
+          </a:p>
+          <a:p>
+            <a:r>
+              <a:t>десятками раз за смену. Вопрос в зал: где должен жить этот помощник? Что</a:t>
+            </a:r>
+          </a:p>
+          <a:p>
+            <a:r>
+              <a:t>вы предложите — отдельное окно, встроенная подсказка прямо в интерфейсе,</a:t>
+            </a:r>
+          </a:p>
+          <a:p>
+            <a:r>
+              <a:t>что-то ещё? И, что не менее важно, почему именно так, а не иначе? При</a:t>
+            </a:r>
+          </a:p>
+          <a:p>
+            <a:r>
+              <a:t>разборе спросите: какие факты из реплики повлияли на ваш выбор, а какие</a:t>
+            </a:r>
+          </a:p>
+          <a:p>
+            <a:r>
+              <a:t>нет?</a:t>
             </a:r>
           </a:p>
         </p:txBody>
@@ -920,62 +960,87 @@
           </a:p>
           <a:p>
             <a:r>
-              <a:t>интонацией. Ключевое для решения — расположено внутри абзаца, а не в</a:t>
-            </a:r>
-          </a:p>
-          <a:p>
-            <a:r>
-              <a:t>первой фразе: открытого API нет, кастомизаций нет, систему купили 4 года</a:t>
-            </a:r>
-          </a:p>
-          <a:p>
-            <a:r>
-              <a:t>назад, на ней же тикеты HR и фасилити-менеджмента, контракт с вендором ещё</a:t>
-            </a:r>
-          </a:p>
-          <a:p>
-            <a:r>
-              <a:t>на 2 года. Переписка с вендором, бюджет на год, будущий пересмотр ИТ-</a:t>
-            </a:r>
-          </a:p>
-          <a:p>
-            <a:r>
-              <a:t>ландшафта — шум, к архитектурному выбору не относится. Вопрос в зал: что</a:t>
-            </a:r>
-          </a:p>
-          <a:p>
-            <a:r>
-              <a:t>делаем? Обратите внимание, я не говорю вам, хорошо это или плохо для</a:t>
-            </a:r>
-          </a:p>
-          <a:p>
-            <a:r>
-              <a:t>вашего плана — просто называю факт, который вы бы узнали, только если бы</a:t>
-            </a:r>
-          </a:p>
-          <a:p>
-            <a:r>
-              <a:t>сами спросили ИТ-отдел заранее, до того как начали проектировать решение.</a:t>
-            </a:r>
-          </a:p>
-          <a:p>
-            <a:r>
-              <a:t>Кто хочет высказаться первым, что теперь предлагаете? И кто из тех, кто</a:t>
-            </a:r>
-          </a:p>
-          <a:p>
-            <a:r>
-              <a:t>минуту назад предлагал встроить помощника прямо в интерфейс — что вы</a:t>
-            </a:r>
-          </a:p>
-          <a:p>
-            <a:r>
-              <a:t>думаете сейчас, когда выяснилось, что сам интерфейс для вас закрыт</a:t>
-            </a:r>
-          </a:p>
-          <a:p>
-            <a:r>
-              <a:t>наглухо?</a:t>
+              <a:t>интонацией. Прямые сигналы, расположены внутри абзаца, а не в первой</a:t>
+            </a:r>
+          </a:p>
+          <a:p>
+            <a:r>
+              <a:t>фразе: открытого API нет, кастомизаций нет, систему купили 4 года назад,</a:t>
+            </a:r>
+          </a:p>
+          <a:p>
+            <a:r>
+              <a:t>на ней же тикеты HR и фасилити-менеджмента, контракт с вендором ещё на</a:t>
+            </a:r>
+          </a:p>
+          <a:p>
+            <a:r>
+              <a:t>2 года. Косвенный сигнал стоит явно вытащить: Telegram-бот интегрируется</a:t>
+            </a:r>
+          </a:p>
+          <a:p>
+            <a:r>
+              <a:t>проще, чем закрытый коробочный helpdesk, — то есть у той второй точки</a:t>
+            </a:r>
+          </a:p>
+          <a:p>
+            <a:r>
+              <a:t>встраивания из прошлой реплики (операторы в Telegram) цена интеграции</a:t>
+            </a:r>
+          </a:p>
+          <a:p>
+            <a:r>
+              <a:t>ниже, и это меняет расклад вариантов, даже если аудитория сама не</a:t>
+            </a:r>
+          </a:p>
+          <a:p>
+            <a:r>
+              <a:t>вспомнит про Telegram без наводки. Редизайн корпоративного портала — шум-</a:t>
+            </a:r>
+          </a:p>
+          <a:p>
+            <a:r>
+              <a:t>двойник: похоже на ИТ-инициативу того же профиля, но никак не пересекается</a:t>
+            </a:r>
+          </a:p>
+          <a:p>
+            <a:r>
+              <a:t>с интеграцией в helpdesk. Вопрос в зал: что делаем? Обратите внимание, я</a:t>
+            </a:r>
+          </a:p>
+          <a:p>
+            <a:r>
+              <a:t>не говорю вам, хорошо это или плохо для вашего плана — просто называю</a:t>
+            </a:r>
+          </a:p>
+          <a:p>
+            <a:r>
+              <a:t>факт, который вы бы узнали, только если бы сами спросили ИТ-отдел</a:t>
+            </a:r>
+          </a:p>
+          <a:p>
+            <a:r>
+              <a:t>заранее, до того как начали проектировать решение. Кто хочет высказаться</a:t>
+            </a:r>
+          </a:p>
+          <a:p>
+            <a:r>
+              <a:t>первым, что теперь предлагаете? И кто из тех, кто минуту назад предлагал</a:t>
+            </a:r>
+          </a:p>
+          <a:p>
+            <a:r>
+              <a:t>встроить помощника прямо в интерфейс — что вы думаете сейчас, когда</a:t>
+            </a:r>
+          </a:p>
+          <a:p>
+            <a:r>
+              <a:t>выяснилось, что сам интерфейс для вас закрыт наглухо? При разборе</a:t>
+            </a:r>
+          </a:p>
+          <a:p>
+            <a:r>
+              <a:t>спросите: какие факты из реплики повлияли на ваш выбор, а какие нет?</a:t>
             </a:r>
           </a:p>
         </p:txBody>
@@ -1195,47 +1260,72 @@
           <a:lstStyle/>
           <a:p>
             <a:r>
-              <a:t>Зачитайте реплику из маркетинга целиком. Ключевое для решения — не</a:t>
-            </a:r>
-          </a:p>
-          <a:p>
-            <a:r>
-              <a:t>выделено особо: маркетинг хочет именно отдельный сервис-приложение по</a:t>
-            </a:r>
-          </a:p>
-          <a:p>
-            <a:r>
-              <a:t>образцу конкурента, каталог 12 000 товарных позиций, описания сейчас пишет</a:t>
-            </a:r>
-          </a:p>
-          <a:p>
-            <a:r>
-              <a:t>один копирайтер на аутсорсе. Конференция ритейла, демо для инвесторов,</a:t>
-            </a:r>
-          </a:p>
-          <a:p>
-            <a:r>
-              <a:t>жалобы копирайтера на нагрузку, баннеры на главной — шум, к архитектурному</a:t>
-            </a:r>
-          </a:p>
-          <a:p>
-            <a:r>
-              <a:t>выбору не относится. На слайде — макет отдельного нового сервиса: форма</a:t>
-            </a:r>
-          </a:p>
-          <a:p>
-            <a:r>
-              <a:t>ввода, кнопка «сгенерировать». Вопрос в зал: отдельный сервис — хорошая</a:t>
-            </a:r>
-          </a:p>
-          <a:p>
-            <a:r>
-              <a:t>идея, или нет? Что скажете, и почему именно так — что в этой постановке</a:t>
-            </a:r>
-          </a:p>
-          <a:p>
-            <a:r>
-              <a:t>вообще определяет, стоит ли делать новый инструмент или нет?</a:t>
+              <a:t>Зачитайте реплику из маркетинга целиком. Прямой сигнал: маркетинг хочет</a:t>
+            </a:r>
+          </a:p>
+          <a:p>
+            <a:r>
+              <a:t>именно отдельный сервис-приложение по образцу конкурента, каталог 12 000</a:t>
+            </a:r>
+          </a:p>
+          <a:p>
+            <a:r>
+              <a:t>товарных позиций. Косвенный сигнал стоит явно вытащить в обсуждении:</a:t>
+            </a:r>
+          </a:p>
+          <a:p>
+            <a:r>
+              <a:t>копирайтер уже пишет описания прямо в общей админке каталога — то есть</a:t>
+            </a:r>
+          </a:p>
+          <a:p>
+            <a:r>
+              <a:t>у маркетинга есть единое рабочее место, куда можно встроить кнопку,</a:t>
+            </a:r>
+          </a:p>
+          <a:p>
+            <a:r>
+              <a:t>и это меняет ответ на вопрос «отдельный сервис или нет» ещё до официального</a:t>
+            </a:r>
+          </a:p>
+          <a:p>
+            <a:r>
+              <a:t>разбора. Баннеры на главной и внедрение CRM в другом отделе — шум-</a:t>
+            </a:r>
+          </a:p>
+          <a:p>
+            <a:r>
+              <a:t>двойники: оба похожи на «параллельный ИТ-проект компании», но ни один не</a:t>
+            </a:r>
+          </a:p>
+          <a:p>
+            <a:r>
+              <a:t>влияет на архитектуру для описаний товаров. На слайде — макет отдельного</a:t>
+            </a:r>
+          </a:p>
+          <a:p>
+            <a:r>
+              <a:t>нового сервиса: форма ввода, кнопка «сгенерировать». Вопрос в зал:</a:t>
+            </a:r>
+          </a:p>
+          <a:p>
+            <a:r>
+              <a:t>отдельный сервис — хорошая идея, или нет? Что скажете, и почему именно</a:t>
+            </a:r>
+          </a:p>
+          <a:p>
+            <a:r>
+              <a:t>так — что в этой постановке вообще определяет, стоит ли делать новый</a:t>
+            </a:r>
+          </a:p>
+          <a:p>
+            <a:r>
+              <a:t>инструмент или нет? При разборе спросите: какие факты из реплики повлияли</a:t>
+            </a:r>
+          </a:p>
+          <a:p>
+            <a:r>
+              <a:t>на ваш выбор, а какие нет?</a:t>
             </a:r>
           </a:p>
         </p:txBody>
@@ -2227,57 +2317,92 @@
           <a:lstStyle/>
           <a:p>
             <a:r>
-              <a:t>Зачитайте реплику целиком. Ключевое для решения — не выделено интонацией:</a:t>
-            </a:r>
-          </a:p>
-          <a:p>
-            <a:r>
-              <a:t>после каждого созвона транскрипт целиком приходит письмом, нужен протокол</a:t>
-            </a:r>
-          </a:p>
-          <a:p>
-            <a:r>
-              <a:t>с решениями, поручениями и сроками, около 15 встреч в неделю, сейчас</a:t>
-            </a:r>
-          </a:p>
-          <a:p>
-            <a:r>
-              <a:t>протокол пишет проджект-менеджер вручную. Имя Насти, её спринт-отчёты и</a:t>
-            </a:r>
-          </a:p>
-          <a:p>
-            <a:r>
-              <a:t>онбординг новых, аудит процессов, английский с подрядчиком — шум, к</a:t>
-            </a:r>
-          </a:p>
-          <a:p>
-            <a:r>
-              <a:t>архитектуре задачи не относится. На входе у нас — полный транскрипт одной</a:t>
-            </a:r>
-          </a:p>
-          <a:p>
-            <a:r>
-              <a:t>встречи целиком, разумного объёма, буквально запись одного созвона, а на</a:t>
-            </a:r>
-          </a:p>
-          <a:p>
-            <a:r>
-              <a:t>выходе нужны структурированные решения, поручения и сроки, разложенные по</a:t>
-            </a:r>
-          </a:p>
-          <a:p>
-            <a:r>
-              <a:t>пунктам. Вопрос в зал: какая архитектура здесь нужна? Аргументируйте,</a:t>
-            </a:r>
-          </a:p>
-          <a:p>
-            <a:r>
-              <a:t>почему именно так — что конкретно в этой постановке подсказывает вам этот</a:t>
-            </a:r>
-          </a:p>
-          <a:p>
-            <a:r>
-              <a:t>выбор, а не другой? Кто готов ответить первым?</a:t>
+              <a:t>Зачитайте реплику целиком. Прямые сигналы, не выделены интонацией: после</a:t>
+            </a:r>
+          </a:p>
+          <a:p>
+            <a:r>
+              <a:t>каждого созвона транскрипт целиком приходит письмом, нужен протокол с</a:t>
+            </a:r>
+          </a:p>
+          <a:p>
+            <a:r>
+              <a:t>решениями, поручениями и сроками, около 15 встреч в неделю, сейчас</a:t>
+            </a:r>
+          </a:p>
+          <a:p>
+            <a:r>
+              <a:t>протокол пишет проджект-менеджер вручную. Косвенные сигналы стоит явно</a:t>
+            </a:r>
+          </a:p>
+          <a:p>
+            <a:r>
+              <a:t>вытащить, хотя сейчас они на архитектуру v1 не влияют: часть встреч на</a:t>
+            </a:r>
+          </a:p>
+          <a:p>
+            <a:r>
+              <a:t>английском — транскрипт всё равно один связный документ, язык не меняет</a:t>
+            </a:r>
+          </a:p>
+          <a:p>
+            <a:r>
+              <a:t>схему v1, но всплывёт как деталь позже; и наличие открытого REST API у</a:t>
+            </a:r>
+          </a:p>
+          <a:p>
+            <a:r>
+              <a:t>YouTrack — это заранее готовит почву для v3 (агент, который сам заводит</a:t>
+            </a:r>
+          </a:p>
+          <a:p>
+            <a:r>
+              <a:t>задачи), хотя сейчас про это ещё рано говорить. Протоколы уже складываются</a:t>
+            </a:r>
+          </a:p>
+          <a:p>
+            <a:r>
+              <a:t>на корпоративный диск — тоже задел на будущее (v2, хранилище), но сейчас</a:t>
+            </a:r>
+          </a:p>
+          <a:p>
+            <a:r>
+              <a:t>не меняет ответ. Ничего из этого — не шум в строгом смысле, но и не</a:t>
+            </a:r>
+          </a:p>
+          <a:p>
+            <a:r>
+              <a:t>должно менять ответ на первый вопрос: на входе у нас всё ещё полный</a:t>
+            </a:r>
+          </a:p>
+          <a:p>
+            <a:r>
+              <a:t>транскрипт одной встречи целиком, разумного объёма, а на выходе нужны</a:t>
+            </a:r>
+          </a:p>
+          <a:p>
+            <a:r>
+              <a:t>структурированные решения, поручения и сроки. Вопрос в зал: какая</a:t>
+            </a:r>
+          </a:p>
+          <a:p>
+            <a:r>
+              <a:t>архитектура здесь нужна? Аргументируйте, почему именно так — что конкретно</a:t>
+            </a:r>
+          </a:p>
+          <a:p>
+            <a:r>
+              <a:t>в этой постановке подсказывает вам этот выбор, а не другой? Кто готов</a:t>
+            </a:r>
+          </a:p>
+          <a:p>
+            <a:r>
+              <a:t>ответить первым? При разборе спросите: какие факты из реплики повлияли</a:t>
+            </a:r>
+          </a:p>
+          <a:p>
+            <a:r>
+              <a:t>на ваш выбор, а какие нет?</a:t>
             </a:r>
           </a:p>
           <a:p/>
@@ -2478,57 +2603,87 @@
           <a:lstStyle/>
           <a:p>
             <a:r>
-              <a:t>Зачитайте реплику целиком, не педалируя ключевую часть интонацией. Ключевое</a:t>
-            </a:r>
-          </a:p>
-          <a:p>
-            <a:r>
-              <a:t>для решения — растворено в рассказе про планёрку: протоколы копятся в общей</a:t>
-            </a:r>
-          </a:p>
-          <a:p>
-            <a:r>
-              <a:t>папке, вопрос «что решали по подрядчику X в мае» ищется по теме и примерной</a:t>
-            </a:r>
-          </a:p>
-          <a:p>
-            <a:r>
-              <a:t>дате, а не по точному документу, и это уже не одна встреча, а много</a:t>
-            </a:r>
-          </a:p>
-          <a:p>
-            <a:r>
-              <a:t>накопленных протоколов. Бюджет на квартал, отпускной график — шум, к</a:t>
-            </a:r>
-          </a:p>
-          <a:p>
-            <a:r>
-              <a:t>архитектуре не относится. Вопрос в зал: меняет ли это архитектуру? Что</a:t>
-            </a:r>
-          </a:p>
-          <a:p>
-            <a:r>
-              <a:t>именно изменилось по сравнению с тем, что мы обсуждали минуту назад? Дайте</a:t>
-            </a:r>
-          </a:p>
-          <a:p>
-            <a:r>
-              <a:t>себе секунду сопоставить новую просьбу с тем решением, которое вы предлагали</a:t>
-            </a:r>
-          </a:p>
-          <a:p>
-            <a:r>
-              <a:t>для одной встречи. Кто хочет высказаться первым? И отдельно спрошу тех, кто</a:t>
-            </a:r>
-          </a:p>
-          <a:p>
-            <a:r>
-              <a:t>минуту назад говорил про разовый вызов модели: кто из вас сейчас передумал —</a:t>
-            </a:r>
-          </a:p>
-          <a:p>
-            <a:r>
-              <a:t>и почему именно эта деталь заставила вас пересмотреть ответ?</a:t>
+              <a:t>Зачитайте реплику целиком, не педалируя ключевую часть интонацией. Прямой</a:t>
+            </a:r>
+          </a:p>
+          <a:p>
+            <a:r>
+              <a:t>сигнал, растворён в рассказе про планёрку: протоколы копятся в общей папке,</a:t>
+            </a:r>
+          </a:p>
+          <a:p>
+            <a:r>
+              <a:t>вопрос «что решали по подрядчику X в мае» ищется по теме и примерной дате,</a:t>
+            </a:r>
+          </a:p>
+          <a:p>
+            <a:r>
+              <a:t>а не по точному документу — это уже не одна встреча, а много накопленных</a:t>
+            </a:r>
+          </a:p>
+          <a:p>
+            <a:r>
+              <a:t>протоколов. Косвенный сигнал стоит явно проговорить: скорость роста</a:t>
+            </a:r>
+          </a:p>
+          <a:p>
+            <a:r>
+              <a:t>папки (полгигабайта в квартал) — это не просто «архив уже большой», а</a:t>
+            </a:r>
+          </a:p>
+          <a:p>
+            <a:r>
+              <a:t>свидетельство, что база будет расти и дальше, значит решение нужно</a:t>
+            </a:r>
+          </a:p>
+          <a:p>
+            <a:r>
+              <a:t>проектировать не под текущий объём, а под растущий. Отпускной график и</a:t>
+            </a:r>
+          </a:p>
+          <a:p>
+            <a:r>
+              <a:t>редизайн портала — шум-двойники: оба всплыли в той же реплике, но ни</a:t>
+            </a:r>
+          </a:p>
+          <a:p>
+            <a:r>
+              <a:t>один не имеет отношения к поиску по протоколам. Вопрос в зал: меняет ли</a:t>
+            </a:r>
+          </a:p>
+          <a:p>
+            <a:r>
+              <a:t>это архитектуру? Что именно изменилось по сравнению с тем, что мы</a:t>
+            </a:r>
+          </a:p>
+          <a:p>
+            <a:r>
+              <a:t>обсуждали минуту назад? Дайте себе секунду сопоставить новую просьбу с</a:t>
+            </a:r>
+          </a:p>
+          <a:p>
+            <a:r>
+              <a:t>тем решением, которое вы предлагали для одной встречи. Кто хочет</a:t>
+            </a:r>
+          </a:p>
+          <a:p>
+            <a:r>
+              <a:t>высказаться первым? И отдельно спрошу тех, кто минуту назад говорил про</a:t>
+            </a:r>
+          </a:p>
+          <a:p>
+            <a:r>
+              <a:t>разовый вызов модели: кто из вас сейчас передумал — и почему именно эта</a:t>
+            </a:r>
+          </a:p>
+          <a:p>
+            <a:r>
+              <a:t>деталь заставила вас пересмотреть ответ? При разборе спросите: какие</a:t>
+            </a:r>
+          </a:p>
+          <a:p>
+            <a:r>
+              <a:t>факты из реплики повлияли на ваш выбор, а какие нет?</a:t>
             </a:r>
           </a:p>
         </p:txBody>
@@ -2733,52 +2888,82 @@
           <a:lstStyle/>
           <a:p>
             <a:r>
-              <a:t>Зачитайте реплику целиком. Ключевое для решения — не выделено особо:</a:t>
-            </a:r>
-          </a:p>
-          <a:p>
-            <a:r>
-              <a:t>поручения из протоколов система уже находит, но их всё равно вручную</a:t>
-            </a:r>
-          </a:p>
-          <a:p>
-            <a:r>
-              <a:t>переносят в таск-трекер одно за другим, и половина поручений из майских</a:t>
-            </a:r>
-          </a:p>
-          <a:p>
-            <a:r>
-              <a:t>протоколов до сих пор без исполнителя. Благодарность за поиск, ретро, цвет</a:t>
-            </a:r>
-          </a:p>
-          <a:p>
-            <a:r>
-              <a:t>тегов в таск-трекере — шум, к архитектуре не относится. Вопрос в зал:</a:t>
-            </a:r>
-          </a:p>
-          <a:p>
-            <a:r>
-              <a:t>меняет ли это архитектуру ещё раз? Что здесь появилось нового по сравнению</a:t>
-            </a:r>
-          </a:p>
-          <a:p>
-            <a:r>
-              <a:t>с поиском по базе, о котором мы только что говорили минуту назад? Кто</a:t>
-            </a:r>
-          </a:p>
-          <a:p>
-            <a:r>
-              <a:t>передумал — и, что важнее самого факта смены мнения, почему именно эта</a:t>
-            </a:r>
-          </a:p>
-          <a:p>
-            <a:r>
-              <a:t>деталь заставила вас пересмотреть архитектуру, а не просто добавить ещё</a:t>
-            </a:r>
-          </a:p>
-          <a:p>
-            <a:r>
-              <a:t>один шаг к прежнему решению?</a:t>
+              <a:t>Зачитайте реплику целиком. Прямой сигнал, не выделен особо: поручения из</a:t>
+            </a:r>
+          </a:p>
+          <a:p>
+            <a:r>
+              <a:t>протоколов система уже находит, но их всё равно вручную переносят в</a:t>
+            </a:r>
+          </a:p>
+          <a:p>
+            <a:r>
+              <a:t>таск-трекер одно за другим, и половина поручений из майских протоколов</a:t>
+            </a:r>
+          </a:p>
+          <a:p>
+            <a:r>
+              <a:t>до сих пор без исполнителя. Косвенный сигнал здесь — ключевой для этого</a:t>
+            </a:r>
+          </a:p>
+          <a:p>
+            <a:r>
+              <a:t>шага разбора, проговорите явно: наличие открытого REST API у YouTrack —</a:t>
+            </a:r>
+          </a:p>
+          <a:p>
+            <a:r>
+              <a:t>это именно то, что делает следующий архитектурный шаг (агент, вызывающий</a:t>
+            </a:r>
+          </a:p>
+          <a:p>
+            <a:r>
+              <a:t>API таск-трекера) технически дешёвым, а не гипотетическим. Без открытого</a:t>
+            </a:r>
+          </a:p>
+          <a:p>
+            <a:r>
+              <a:t>API пришлось бы городить что-то через экспорт-импорт или писать</a:t>
+            </a:r>
+          </a:p>
+          <a:p>
+            <a:r>
+              <a:t>интеграцию с нуля. Цвет тегов в трекере — шум-двойник: тоже про</a:t>
+            </a:r>
+          </a:p>
+          <a:p>
+            <a:r>
+              <a:t>таск-трекер, но чисто косметический вопрос, не влияет на архитектуру.</a:t>
+            </a:r>
+          </a:p>
+          <a:p>
+            <a:r>
+              <a:t>Вопрос в зал: меняет ли это архитектуру ещё раз? Что здесь появилось</a:t>
+            </a:r>
+          </a:p>
+          <a:p>
+            <a:r>
+              <a:t>нового по сравнению с поиском по базе, о котором мы только что говорили</a:t>
+            </a:r>
+          </a:p>
+          <a:p>
+            <a:r>
+              <a:t>минуту назад? Кто передумал — и, что важнее самого факта смены мнения,</a:t>
+            </a:r>
+          </a:p>
+          <a:p>
+            <a:r>
+              <a:t>почему именно эта деталь заставила вас пересмотреть архитектуру, а не</a:t>
+            </a:r>
+          </a:p>
+          <a:p>
+            <a:r>
+              <a:t>просто добавить ещё один шаг к прежнему решению? При разборе спросите:</a:t>
+            </a:r>
+          </a:p>
+          <a:p>
+            <a:r>
+              <a:t>какие факты из реплики повлияли на ваш выбор, а какие нет?</a:t>
             </a:r>
           </a:p>
         </p:txBody>
@@ -2983,47 +3168,77 @@
           <a:lstStyle/>
           <a:p>
             <a:r>
-              <a:t>Зачитайте реплику целиком. Ключевое для решения — не выделено особо:</a:t>
-            </a:r>
-          </a:p>
-          <a:p>
-            <a:r>
-              <a:t>нужен именно еженедельный (по расписанию, не по запросу) дайджест по</a:t>
-            </a:r>
-          </a:p>
-          <a:p>
-            <a:r>
-              <a:t>нескольким конкретным источникам — рабочему чату и почте, — раз в неделю к</a:t>
-            </a:r>
-          </a:p>
-          <a:p>
-            <a:r>
-              <a:t>пятнице 17:00, и информацию нужно свести в одно связное сообщение. Переезд</a:t>
-            </a:r>
-          </a:p>
-          <a:p>
-            <a:r>
-              <a:t>на другой мессенджер — шум, к архитектуре не относится. Вопрос в зал: какая</a:t>
-            </a:r>
-          </a:p>
-          <a:p>
-            <a:r>
-              <a:t>архитектура здесь нужна — разовый вызов модели, RAG, агент, или что-то ещё?</a:t>
-            </a:r>
-          </a:p>
-          <a:p>
-            <a:r>
-              <a:t>Аргументируйте, не просто называйте технологию — объясните, почему выбрали</a:t>
-            </a:r>
-          </a:p>
-          <a:p>
-            <a:r>
-              <a:t>именно её, и что конкретно в постановке навело вас именно на эту мысль. Кто</a:t>
-            </a:r>
-          </a:p>
-          <a:p>
-            <a:r>
-              <a:t>готов? Аргументируйте свой выбор.</a:t>
+              <a:t>Зачитайте реплику целиком. Прямой сигнал, не выделен особо: нужен именно</a:t>
+            </a:r>
+          </a:p>
+          <a:p>
+            <a:r>
+              <a:t>еженедельный (по расписанию, не по запросу) дайджест по нескольким</a:t>
+            </a:r>
+          </a:p>
+          <a:p>
+            <a:r>
+              <a:t>конкретным источникам — рабочему чату и почте, — раз в неделю к пятнице</a:t>
+            </a:r>
+          </a:p>
+          <a:p>
+            <a:r>
+              <a:t>17:00, информацию нужно свести в одно связное сообщение. Косвенный сигнал</a:t>
+            </a:r>
+          </a:p>
+          <a:p>
+            <a:r>
+              <a:t>стоит вытащить: у обоих источников (чат и почта) уже есть API для выгрузки</a:t>
+            </a:r>
+          </a:p>
+          <a:p>
+            <a:r>
+              <a:t>истории — то есть техническая возможность собирать данные по расписанию</a:t>
+            </a:r>
+          </a:p>
+          <a:p>
+            <a:r>
+              <a:t>уже есть, вопрос только в том, какая архитектура обрабатывает собранное.</a:t>
+            </a:r>
+          </a:p>
+          <a:p>
+            <a:r>
+              <a:t>Переезд на мессенджер и тестирование VPN — шум-двойники: оба про</a:t>
+            </a:r>
+          </a:p>
+          <a:p>
+            <a:r>
+              <a:t>инфраструктуру коммуникации компании, но ни один не влияет на архитектуру</a:t>
+            </a:r>
+          </a:p>
+          <a:p>
+            <a:r>
+              <a:t>дайджеста. Вопрос в зал: какая архитектура здесь нужна — разовый вызов</a:t>
+            </a:r>
+          </a:p>
+          <a:p>
+            <a:r>
+              <a:t>модели, RAG, агент, или что-то ещё? Аргументируйте, не просто называйте</a:t>
+            </a:r>
+          </a:p>
+          <a:p>
+            <a:r>
+              <a:t>технологию — объясните, почему выбрали именно её, и что конкретно в</a:t>
+            </a:r>
+          </a:p>
+          <a:p>
+            <a:r>
+              <a:t>постановке навело вас именно на эту мысль. Кто готов? Аргументируйте свой</a:t>
+            </a:r>
+          </a:p>
+          <a:p>
+            <a:r>
+              <a:t>выбор. При разборе спросите: какие факты из реплики повлияли на ваш</a:t>
+            </a:r>
+          </a:p>
+          <a:p>
+            <a:r>
+              <a:t>выбор, а какие нет?</a:t>
             </a:r>
           </a:p>
         </p:txBody>
@@ -3635,52 +3850,87 @@
           <a:lstStyle/>
           <a:p>
             <a:r>
-              <a:t>Зачитайте реплику руководителя отдела продаж целиком. Ключевое для</a:t>
-            </a:r>
-          </a:p>
-          <a:p>
-            <a:r>
-              <a:t>решения — не выделено особо: нужна карточка-выжимка по звонку (потребность</a:t>
-            </a:r>
-          </a:p>
-          <a:p>
-            <a:r>
-              <a:t>/ возражения / договорённости), 8 менеджеров, по 15-20 звонков в день,</a:t>
-            </a:r>
-          </a:p>
-          <a:p>
-            <a:r>
-              <a:t>записи лежат в телефонии и никуда не выгружаются, история клиента ведётся</a:t>
-            </a:r>
-          </a:p>
-          <a:p>
-            <a:r>
-              <a:t>в CRM компании. Стратегическая сессия, дубли контактов в CRM — шум, к</a:t>
-            </a:r>
-          </a:p>
-          <a:p>
-            <a:r>
-              <a:t>архитектуре не относится. На входе — запись разговора, обычный свободный</a:t>
-            </a:r>
-          </a:p>
-          <a:p>
-            <a:r>
-              <a:t>диалог между менеджером и клиентом, без всякой структуры, с</a:t>
-            </a:r>
-          </a:p>
-          <a:p>
-            <a:r>
-              <a:t>перебиваниями, паузами, отступлениями от темы, иногда с посторонними</a:t>
-            </a:r>
-          </a:p>
-          <a:p>
-            <a:r>
-              <a:t>звуками на фоне. Вопрос в зал: как это построить? Что предложите, и</a:t>
-            </a:r>
-          </a:p>
-          <a:p>
-            <a:r>
-              <a:t>почему именно так? Кто начнёт?</a:t>
+              <a:t>Зачитайте реплику руководителя отдела продаж целиком. Прямой сигнал, не</a:t>
+            </a:r>
+          </a:p>
+          <a:p>
+            <a:r>
+              <a:t>выделен особо: нужна карточка-выжимка по звонку (потребность / возражения</a:t>
+            </a:r>
+          </a:p>
+          <a:p>
+            <a:r>
+              <a:t>/ договорённости), 8 менеджеров, по 15-20 звонков в день. Косвенные</a:t>
+            </a:r>
+          </a:p>
+          <a:p>
+            <a:r>
+              <a:t>сигналы стоит явно вытащить: телефония уже сама кладёт записи в облако —</a:t>
+            </a:r>
+          </a:p>
+          <a:p>
+            <a:r>
+              <a:t>не нужно решать проблему выгрузки данных отдельно; CRM Битрикс24 с</a:t>
+            </a:r>
+          </a:p>
+          <a:p>
+            <a:r>
+              <a:t>открытым REST API — карточку можно писать сразу в CRM без кастомной</a:t>
+            </a:r>
+          </a:p>
+          <a:p>
+            <a:r>
+              <a:t>интеграции; а привычка аналитиков уже пользоваться облачным ИИ по API —</a:t>
+            </a:r>
+          </a:p>
+          <a:p>
+            <a:r>
+              <a:t>косвенный сигнал, что организация психологически готова к внешнему API</a:t>
+            </a:r>
+          </a:p>
+          <a:p>
+            <a:r>
+              <a:t>и это не будет для неё новым классом риска как такового (хотя данные</a:t>
+            </a:r>
+          </a:p>
+          <a:p>
+            <a:r>
+              <a:t>звонков — не то же самое, что черновики отчётов, к этому вопрос вернётся</a:t>
+            </a:r>
+          </a:p>
+          <a:p>
+            <a:r>
+              <a:t>позже). Дубли контактов в CRM — шум-двойник: тоже про CRM, но чисто</a:t>
+            </a:r>
+          </a:p>
+          <a:p>
+            <a:r>
+              <a:t>про качество данных, не про архитектуру извлечения. На входе — запись</a:t>
+            </a:r>
+          </a:p>
+          <a:p>
+            <a:r>
+              <a:t>разговора, обычный свободный диалог между менеджером и клиентом, без</a:t>
+            </a:r>
+          </a:p>
+          <a:p>
+            <a:r>
+              <a:t>всякой структуры, с перебиваниями, паузами, отступлениями от темы, иногда</a:t>
+            </a:r>
+          </a:p>
+          <a:p>
+            <a:r>
+              <a:t>с посторонними звуками на фоне. Вопрос в зал: как это построить? Что</a:t>
+            </a:r>
+          </a:p>
+          <a:p>
+            <a:r>
+              <a:t>предложите, и почему именно так? Кто начнёт? При разборе спросите: какие</a:t>
+            </a:r>
+          </a:p>
+          <a:p>
+            <a:r>
+              <a:t>факты из реплики повлияли на ваш выбор, а какие нет?</a:t>
             </a:r>
           </a:p>
         </p:txBody>
@@ -3905,47 +4155,67 @@
           </a:p>
           <a:p>
             <a:r>
-              <a:t>Ключевое для решения растворено в контексте: у CTO — GPU-сервера нет и</a:t>
-            </a:r>
-          </a:p>
-          <a:p>
-            <a:r>
-              <a:t>бюджета на него в этом году нет, то есть про мощную локальную</a:t>
-            </a:r>
-          </a:p>
-          <a:p>
-            <a:r>
-              <a:t>инфраструктуру для тяжёлой модели речи не идёт; у РОП — нужны именно пять</a:t>
-            </a:r>
-          </a:p>
-          <a:p>
-            <a:r>
-              <a:t>конкретных полей в CRM, не беседа и не анализ тона голоса. Юрист на демо,</a:t>
-            </a:r>
-          </a:p>
-          <a:p>
-            <a:r>
-              <a:t>приоритеты финансового директора, миграция почты, ноутбуки поддержки,</a:t>
-            </a:r>
-          </a:p>
-          <a:p>
-            <a:r>
-              <a:t>понедельничный отчёт РОПа — шум, к архитектуре не относится. Вопрос в</a:t>
-            </a:r>
-          </a:p>
-          <a:p>
-            <a:r>
-              <a:t>зал: меняет ли это архитектуру ещё раз? Что из сказанного раньше теперь</a:t>
-            </a:r>
-          </a:p>
-          <a:p>
-            <a:r>
-              <a:t>стоит пересмотреть, и как эти две реплики вместе, а не по отдельности,</a:t>
-            </a:r>
-          </a:p>
-          <a:p>
-            <a:r>
-              <a:t>меняют картину?</a:t>
+              <a:t>Прямые сигналы растворены в контексте: у CTO — GPU-сервера нет и бюджета</a:t>
+            </a:r>
+          </a:p>
+          <a:p>
+            <a:r>
+              <a:t>на него в этом году нет, то есть про мощную локальную инфраструктуру для</a:t>
+            </a:r>
+          </a:p>
+          <a:p>
+            <a:r>
+              <a:t>тяжёлой модели речи не идёт; у РОП — нужны именно пять конкретных полей</a:t>
+            </a:r>
+          </a:p>
+          <a:p>
+            <a:r>
+              <a:t>в CRM, не беседа и не анализ тона голоса. Косвенный сигнал стоит вытащить</a:t>
+            </a:r>
+          </a:p>
+          <a:p>
+            <a:r>
+              <a:t>из реплики РОПа: поля должны писаться прямо в Битрикс24 — это тот же</a:t>
+            </a:r>
+          </a:p>
+          <a:p>
+            <a:r>
+              <a:t>CRM с открытым API, о котором уже говорили в постановке, значит вывод</a:t>
+            </a:r>
+          </a:p>
+          <a:p>
+            <a:r>
+              <a:t>решения технически некуда пристраивать заново, точка интеграции уже</a:t>
+            </a:r>
+          </a:p>
+          <a:p>
+            <a:r>
+              <a:t>известна. Миграция почты и обновление ноутбуков — шум-двойники, оба про</a:t>
+            </a:r>
+          </a:p>
+          <a:p>
+            <a:r>
+              <a:t>ИТ-бюджет квартала, но не про инференс модели. Вопрос в зал: меняет ли</a:t>
+            </a:r>
+          </a:p>
+          <a:p>
+            <a:r>
+              <a:t>это архитектуру ещё раз? Что из сказанного раньше теперь стоит</a:t>
+            </a:r>
+          </a:p>
+          <a:p>
+            <a:r>
+              <a:t>пересмотреть, и как эти две реплики вместе, а не по отдельности, меняют</a:t>
+            </a:r>
+          </a:p>
+          <a:p>
+            <a:r>
+              <a:t>картину? При разборе спросите: какие факты из реплик повлияли на ваш</a:t>
+            </a:r>
+          </a:p>
+          <a:p>
+            <a:r>
+              <a:t>выбор, а какие нет?</a:t>
             </a:r>
           </a:p>
         </p:txBody>
@@ -4885,57 +5155,87 @@
           </a:p>
           <a:p>
             <a:r>
-              <a:t>выловить из неё то, что относится к задаче. Ключевое для решения: три</a:t>
-            </a:r>
-          </a:p>
-          <a:p>
-            <a:r>
-              <a:t>человека, около 400 накладных в месяц, всё руками в 1С, к концу квартала</a:t>
-            </a:r>
-          </a:p>
-          <a:p>
-            <a:r>
-              <a:t>завал и ошибки, и два примера накладных, где форматы «вроде одинаковые».</a:t>
-            </a:r>
-          </a:p>
-          <a:p>
-            <a:r>
-              <a:t>Всё остальное — отпуск Олега, Дима после релиза мобилки, склад, ревью</a:t>
-            </a:r>
-          </a:p>
-          <a:p>
-            <a:r>
-              <a:t>бюджета — шум, к архитектуре задачи отношения не имеет. Покажите на</a:t>
-            </a:r>
-          </a:p>
-          <a:p>
-            <a:r>
-              <a:t>слайде оба примера накладных и третью карточку — целевую таблицу в 1С с</a:t>
-            </a:r>
-          </a:p>
-          <a:p>
-            <a:r>
-              <a:t>теми же полями (Дата / № накладной / Позиция / Сумма), чтобы аудитория</a:t>
-            </a:r>
-          </a:p>
-          <a:p>
-            <a:r>
-              <a:t>сразу увидела совпадение структуры между источником и целью. Вопрос в</a:t>
-            </a:r>
-          </a:p>
-          <a:p>
-            <a:r>
-              <a:t>зал: что вы предложите? Нужен ли здесь ИИ вообще, или можно обойтись без</a:t>
-            </a:r>
-          </a:p>
-          <a:p>
-            <a:r>
-              <a:t>него? Какие конкретно поля вы бы вытаскивали, и что, на ваш взгляд,</a:t>
-            </a:r>
-          </a:p>
-          <a:p>
-            <a:r>
-              <a:t>определяет сложность этой задачи? Кто готов высказаться первым?</a:t>
+              <a:t>выловить из неё то, что относится к задаче. Прямые сигналы: три человека,</a:t>
+            </a:r>
+          </a:p>
+          <a:p>
+            <a:r>
+              <a:t>около 400 накладных в месяц, всё руками в 1С, к концу квартала завал и</a:t>
+            </a:r>
+          </a:p>
+          <a:p>
+            <a:r>
+              <a:t>ошибки, два примера накладных, где форматы «вроде одинаковые». Косвенный</a:t>
+            </a:r>
+          </a:p>
+          <a:p>
+            <a:r>
+              <a:t>сигнал, который стоит отдельно вытащить в обсуждении: у компании уже есть</a:t>
+            </a:r>
+          </a:p>
+          <a:p>
+            <a:r>
+              <a:t>контракт и живой опыт работы с LLM по API (маркетинг и YandexGPT) — это не</a:t>
+            </a:r>
+          </a:p>
+          <a:p>
+            <a:r>
+              <a:t>меняет архитектурный выбор для этой задачи напрямую, но снимает вопрос</a:t>
+            </a:r>
+          </a:p>
+          <a:p>
+            <a:r>
+              <a:t>«а вообще можно ли нам гонять данные через внешний API» до того, как он</a:t>
+            </a:r>
+          </a:p>
+          <a:p>
+            <a:r>
+              <a:t>всплывёт как гипотетический риск. Миграция почты — шум-двойник: звучит</a:t>
+            </a:r>
+          </a:p>
+          <a:p>
+            <a:r>
+              <a:t>как ИТ-факт про инфраструктуру, но к парсингу накладных отношения не</a:t>
+            </a:r>
+          </a:p>
+          <a:p>
+            <a:r>
+              <a:t>имеет. Покажите на слайде оба примера накладных и третью карточку —</a:t>
+            </a:r>
+          </a:p>
+          <a:p>
+            <a:r>
+              <a:t>целевую таблицу в 1С с теми же полями (Дата / № накладной / Позиция /</a:t>
+            </a:r>
+          </a:p>
+          <a:p>
+            <a:r>
+              <a:t>Сумма), чтобы аудитория сразу увидела совпадение структуры между</a:t>
+            </a:r>
+          </a:p>
+          <a:p>
+            <a:r>
+              <a:t>источником и целью. Вопрос в зал: что вы предложите? Нужен ли здесь ИИ</a:t>
+            </a:r>
+          </a:p>
+          <a:p>
+            <a:r>
+              <a:t>вообще, или можно обойтись без него? Какие конкретно поля вы бы</a:t>
+            </a:r>
+          </a:p>
+          <a:p>
+            <a:r>
+              <a:t>вытаскивали, и что, на ваш взгляд, определяет сложность этой задачи? Кто</a:t>
+            </a:r>
+          </a:p>
+          <a:p>
+            <a:r>
+              <a:t>готов высказаться первым? При разборе отдельно спросите: какие факты из</a:t>
+            </a:r>
+          </a:p>
+          <a:p>
+            <a:r>
+              <a:t>реплики повлияли на ваш выбор, а какие нет?</a:t>
             </a:r>
           </a:p>
           <a:p/>
@@ -5011,52 +5311,72 @@
           <a:lstStyle/>
           <a:p>
             <a:r>
-              <a:t>Зачитайте реплику продакта целиком. Ключевое для решения — не выделено</a:t>
-            </a:r>
-          </a:p>
-          <a:p>
-            <a:r>
-              <a:t>особо: поток новостей из многих источников, нужно склеивать сообщения об</a:t>
-            </a:r>
-          </a:p>
-          <a:p>
-            <a:r>
-              <a:t>одном и том же событии в одну карточку. Жалобы в поддержку, подключение</a:t>
-            </a:r>
-          </a:p>
-          <a:p>
-            <a:r>
-              <a:t>новых источников, бюджет на фичи — шум, к архитектуре не относится.</a:t>
-            </a:r>
-          </a:p>
-          <a:p>
-            <a:r>
-              <a:t>Вопрос в зал: какая технология здесь нужна? Интуитивно многие сейчас</a:t>
-            </a:r>
-          </a:p>
-          <a:p>
-            <a:r>
-              <a:t>скажут — нужно понимание смысла текста, значит модель, и придётся гонять</a:t>
-            </a:r>
-          </a:p>
-          <a:p>
-            <a:r>
-              <a:t>каждую пару новостей через LLM, сравнивая их попарно. Согласны с этим, или</a:t>
-            </a:r>
-          </a:p>
-          <a:p>
-            <a:r>
-              <a:t>у кого-то в зале уже есть сомнения на этот счёт? Подумайте, сколько таких</a:t>
-            </a:r>
-          </a:p>
-          <a:p>
-            <a:r>
-              <a:t>пар новостей нужно будет сравнивать каждый день при большом потоке</a:t>
-            </a:r>
-          </a:p>
-          <a:p>
-            <a:r>
-              <a:t>источников.</a:t>
+              <a:t>Зачитайте реплику продакта целиком. Прямой сигнал, не выделен особо:</a:t>
+            </a:r>
+          </a:p>
+          <a:p>
+            <a:r>
+              <a:t>поток новостей из многих источников, нужно склеивать сообщения об одном</a:t>
+            </a:r>
+          </a:p>
+          <a:p>
+            <a:r>
+              <a:t>и том же событии в одну карточку. Косвенный сигнал стоит вытащить: все</a:t>
+            </a:r>
+          </a:p>
+          <a:p>
+            <a:r>
+              <a:t>источники уже нормализованы через единый RSS-агрегатор, то есть формат</a:t>
+            </a:r>
+          </a:p>
+          <a:p>
+            <a:r>
+              <a:t>заголовка и метаданных единый — не нужно решать задачу парсинга разных</a:t>
+            </a:r>
+          </a:p>
+          <a:p>
+            <a:r>
+              <a:t>форматов, только задачу сравнения содержимого. Редизайн карточки</a:t>
+            </a:r>
+          </a:p>
+          <a:p>
+            <a:r>
+              <a:t>источника — шум-двойник: похож на изменение того же интерфейса ленты, но</a:t>
+            </a:r>
+          </a:p>
+          <a:p>
+            <a:r>
+              <a:t>не имеет отношения к склейке дублей. Вопрос в зал: какая технология здесь</a:t>
+            </a:r>
+          </a:p>
+          <a:p>
+            <a:r>
+              <a:t>нужна? Интуитивно многие сейчас скажут — нужно понимание смысла текста,</a:t>
+            </a:r>
+          </a:p>
+          <a:p>
+            <a:r>
+              <a:t>значит модель, и придётся гонять каждую пару новостей через LLM, сравнивая</a:t>
+            </a:r>
+          </a:p>
+          <a:p>
+            <a:r>
+              <a:t>их попарно. Согласны с этим, или у кого-то в зале уже есть сомнения на</a:t>
+            </a:r>
+          </a:p>
+          <a:p>
+            <a:r>
+              <a:t>этот счёт? Подумайте, сколько таких пар новостей нужно будет сравнивать</a:t>
+            </a:r>
+          </a:p>
+          <a:p>
+            <a:r>
+              <a:t>каждый день при большом потоке источников. При разборе спросите: какие</a:t>
+            </a:r>
+          </a:p>
+          <a:p>
+            <a:r>
+              <a:t>факты из реплики повлияли на ваш выбор, а какие нет?</a:t>
             </a:r>
           </a:p>
         </p:txBody>
@@ -5367,72 +5687,102 @@
           <a:lstStyle/>
           <a:p>
             <a:r>
-              <a:t>Зачитайте цитату бухгалтера. Ключевое для решения — она в середине текста,</a:t>
-            </a:r>
-          </a:p>
-          <a:p>
-            <a:r>
-              <a:t>не выделена: внутри архива вперемешку и сканы актов сверки, и договоры, и</a:t>
-            </a:r>
-          </a:p>
-          <a:p>
-            <a:r>
-              <a:t>сами накладные, отсортировать заранее не просили. Файлообменник, размер</a:t>
-            </a:r>
-          </a:p>
-          <a:p>
-            <a:r>
-              <a:t>письма 20 МБ, закрытие месяца, занятость до обеда — шум, к архитектуре</a:t>
-            </a:r>
-          </a:p>
-          <a:p>
-            <a:r>
-              <a:t>задачи не относится. На слайде показаны несколько примеров накладных из</a:t>
-            </a:r>
-          </a:p>
-          <a:p>
-            <a:r>
-              <a:t>этого архива — форматы уже не такие одинаковые, как в первых двух</a:t>
-            </a:r>
-          </a:p>
-          <a:p>
-            <a:r>
-              <a:t>документах: один выглядит как обычная таблица, во втором поля названы и</a:t>
-            </a:r>
-          </a:p>
-          <a:p>
-            <a:r>
-              <a:t>расположены иначе, третий — со свободным текстом вместо чёткой таблицы, а</a:t>
-            </a:r>
-          </a:p>
-          <a:p>
-            <a:r>
-              <a:t>четвёртый и вовсе на английском языке, потому что один из поставщиков —</a:t>
-            </a:r>
-          </a:p>
-          <a:p>
-            <a:r>
-              <a:t>иностранный. Это тот же архив, только теперь мы видим его целиком, а не</a:t>
-            </a:r>
-          </a:p>
-          <a:p>
-            <a:r>
-              <a:t>два выбранных примера. Вопрос в зал: меняет ли это ваш ответ? Дайте</a:t>
-            </a:r>
-          </a:p>
-          <a:p>
-            <a:r>
-              <a:t>секунду посмотреть на эти четыре карточки и сравнить с тем, что видели</a:t>
-            </a:r>
-          </a:p>
-          <a:p>
-            <a:r>
-              <a:t>минуту назад. И если вы говорили про чистый парсер без ИИ — что вы сейчас</a:t>
-            </a:r>
-          </a:p>
-          <a:p>
-            <a:r>
-              <a:t>думаете, когда видите этот разброс форматов?</a:t>
+              <a:t>Зачитайте цитату бухгалтера. Прямой сигнал, не выделен интонацией:</a:t>
+            </a:r>
+          </a:p>
+          <a:p>
+            <a:r>
+              <a:t>внутри архива вперемешку и сканы актов сверки, и договоры, и сами</a:t>
+            </a:r>
+          </a:p>
+          <a:p>
+            <a:r>
+              <a:t>накладные, отсортировать заранее не просили. Косвенные сигналы стоит явно</a:t>
+            </a:r>
+          </a:p>
+          <a:p>
+            <a:r>
+              <a:t>проговорить: часть потока (два крупнейших поставщика через ЭДО) уже</a:t>
+            </a:r>
+          </a:p>
+          <a:p>
+            <a:r>
+              <a:t>приходит структурированными XML — этот кусок вообще не нуждается в</a:t>
+            </a:r>
+          </a:p>
+          <a:p>
+            <a:r>
+              <a:t>LLM-извлечении; а качество сканов (200dpi со старых сканеров) — это</a:t>
+            </a:r>
+          </a:p>
+          <a:p>
+            <a:r>
+              <a:t>ограничение снизу для точности OCR, если решение пойдёт через</a:t>
+            </a:r>
+          </a:p>
+          <a:p>
+            <a:r>
+              <a:t>распознавание изображения. Переход бухгалтерии на ЭДО с ФНС — шум-</a:t>
+            </a:r>
+          </a:p>
+          <a:p>
+            <a:r>
+              <a:t>двойник: похоже по теме, но это отдельный процесс про счета-фактуры в</a:t>
+            </a:r>
+          </a:p>
+          <a:p>
+            <a:r>
+              <a:t>налоговую, к парсингу накладных поставщиков не относится. На слайде</a:t>
+            </a:r>
+          </a:p>
+          <a:p>
+            <a:r>
+              <a:t>показаны несколько примеров накладных из архива — форматы уже не такие</a:t>
+            </a:r>
+          </a:p>
+          <a:p>
+            <a:r>
+              <a:t>одинаковые, как в первых двух документах: один выглядит как обычная</a:t>
+            </a:r>
+          </a:p>
+          <a:p>
+            <a:r>
+              <a:t>таблица, во втором поля названы и расположены иначе, третий — со</a:t>
+            </a:r>
+          </a:p>
+          <a:p>
+            <a:r>
+              <a:t>свободным текстом вместо чёткой таблицы, а четвёртый на английском языке,</a:t>
+            </a:r>
+          </a:p>
+          <a:p>
+            <a:r>
+              <a:t>потому что один из поставщиков иностранный. Это тот же архив, только</a:t>
+            </a:r>
+          </a:p>
+          <a:p>
+            <a:r>
+              <a:t>теперь мы видим его целиком. Вопрос в зал: меняет ли это ваш ответ? И</a:t>
+            </a:r>
+          </a:p>
+          <a:p>
+            <a:r>
+              <a:t>если вы говорили про чистый парсер без ИИ — что вы думаете сейчас, видя</a:t>
+            </a:r>
+          </a:p>
+          <a:p>
+            <a:r>
+              <a:t>этот разброс форматов? А что думаете о доле потока через ЭДО, которая</a:t>
+            </a:r>
+          </a:p>
+          <a:p>
+            <a:r>
+              <a:t>вообще не требует разбора? При разборе спросите: какие факты из</a:t>
+            </a:r>
+          </a:p>
+          <a:p>
+            <a:r>
+              <a:t>реплики повлияли на ваш выбор, а какие нет?</a:t>
             </a:r>
           </a:p>
         </p:txBody>
@@ -5642,32 +5992,52 @@
           <a:lstStyle/>
           <a:p>
             <a:r>
-              <a:t>Зачитайте реплику коллеги, который готовит логи для подрядчика. Ключевое</a:t>
-            </a:r>
-          </a:p>
-          <a:p>
-            <a:r>
-              <a:t>для решения — не выделено особо: 40 ГБ логов за квартал, дедлайн пятница,</a:t>
-            </a:r>
-          </a:p>
-          <a:p>
-            <a:r>
-              <a:t>подрядчику нужна структура запросов/тайминги/ошибки, но не данные</a:t>
-            </a:r>
-          </a:p>
-          <a:p>
-            <a:r>
-              <a:t>конкретных людей, и в логах вперемешку встречаются телефон, email и фраза</a:t>
-            </a:r>
-          </a:p>
-          <a:p>
-            <a:r>
-              <a:t>вроде «передайте это Ивану из бухгалтерии». Спринт подрядчика — шум, к</a:t>
-            </a:r>
-          </a:p>
-          <a:p>
-            <a:r>
-              <a:t>решению задачи не относится. Пример строки</a:t>
+              <a:t>Зачитайте реплику коллеги, который готовит логи для подрядчика. Прямые</a:t>
+            </a:r>
+          </a:p>
+          <a:p>
+            <a:r>
+              <a:t>сигналы: 40 ГБ логов за квартал, дедлайн пятница, подрядчику нужна</a:t>
+            </a:r>
+          </a:p>
+          <a:p>
+            <a:r>
+              <a:t>структура запросов/тайминги/ошибки, но не данные конкретных людей, в</a:t>
+            </a:r>
+          </a:p>
+          <a:p>
+            <a:r>
+              <a:t>логах вперемешку телефон, email и фраза вроде «передайте это Ивану из</a:t>
+            </a:r>
+          </a:p>
+          <a:p>
+            <a:r>
+              <a:t>бухгалтерии». Косвенный сигнал стоит вытащить отдельно: логи уже в</a:t>
+            </a:r>
+          </a:p>
+          <a:p>
+            <a:r>
+              <a:t>JSON построчно — значит, границы полей и структура запроса уже</a:t>
+            </a:r>
+          </a:p>
+          <a:p>
+            <a:r>
+              <a:t>детерминированы, искать нужно только персональные данные внутри значений,</a:t>
+            </a:r>
+          </a:p>
+          <a:p>
+            <a:r>
+              <a:t>а не парсить сам формат лога с нуля. Тестирование VPN-решения — шум-</a:t>
+            </a:r>
+          </a:p>
+          <a:p>
+            <a:r>
+              <a:t>двойник: похоже на смежную тему безопасности данных, но никак не влияет</a:t>
+            </a:r>
+          </a:p>
+          <a:p>
+            <a:r>
+              <a:t>на то, как вычищать персоналку из уже выгруженного архива. Пример строки</a:t>
             </a:r>
           </a:p>
           <a:p>
@@ -5687,7 +6057,12 @@
           </a:p>
           <a:p>
             <a:r>
-              <a:t>что бы вы предложили в первую очередь?</a:t>
+              <a:t>что бы вы предложили в первую очередь? При разборе спросите: какие факты</a:t>
+            </a:r>
+          </a:p>
+          <a:p>
+            <a:r>
+              <a:t>из реплики повлияли на ваш выбор, а какие нет?</a:t>
             </a:r>
           </a:p>
         </p:txBody>
@@ -9603,7 +9978,7 @@
                 </a:solidFill>
                 <a:latin typeface="Arial"/>
               </a:rPr>
-              <a:t>«Привет, давно хотели это обсудить с командой поддержки. Идея простая: сделать ИИ-помощника для операторов — подсказки ответов на тикеты, поиск похожих обращений в истории, чтобы не рыться каждый раз вручную. У нас на линии 12 операторов, поток около 300 тикетов в день, с явным пиком с 10:00 до 13:00 — после обеда обычно спокойнее. Руководитель поддержки, Света, давно жалуется, что новичков долго вводить в курс — сейчас на это уходит недели три, и это отдельная тема, надо бы отдельно посмотреть на онбординг. Если получится сделать помощника — было бы здорово успеть показать на квартальном ревью, но это не жёсткий дедлайн, скорее ориентир».</a:t>
+              <a:t>«Идея простая: ИИ-помощник для операторов — подсказки ответов на тикеты, поиск похожих обращений в истории. На линии 12 операторов, поток около 300 тикетов в день, пик с 10:00 до 13:00. Часть тех же операторов параллельно отвечает клиентам в Telegram — там отдельный чат-канал, человек 4 держат его постоянно открытым. Вход у всех через корпоративный SSO, так что с авторизацией проблем быть не должно. Отдельно у нас сейчас обновляют парк ноутбуков в поддержке, но это не к вам. Было бы здорово успеть показать на квартальном ревью».</a:t>
             </a:r>
           </a:p>
         </p:txBody>
@@ -9974,7 +10349,7 @@
                 </a:solidFill>
                 <a:latin typeface="Arial"/>
               </a:rPr>
-              <a:t>«Слышал про идею с помощником для поддержки, хочу сразу обрисовать картину. У нас коробочный helpdesk, открытого API нет, кастомизаций нет — мы писали вендору ещё в марте с вопросом про интеграцию, ответа так и не получили. Систему купили 4 года назад, на ней же висят тикеты от HR и от фасилити-менеджмента, так что трогать её надо аккуратно. Контракт с вендором ещё на 2 года, продлевать раньше срока смысла нет. В следующем квартале, кстати, будем пересматривать весь ландшафт ИТ-систем — но это отдельный процесс, и вас туда пока звать рано».</a:t>
+              <a:t>«У нас коробочный helpdesk, открытого API нет, кастомизаций нет — писали вендору ещё в марте, ответа так и не получили. Систему купили 4 года назад, на ней же тикеты от HR и фасилити-менеджмента. Контракт ещё на 2 года. Telegram-канал поддержки — отдельная история, там своя простая интеграция через бота, если вдруг понадобится. В следующем квартале редизайним корпоративный портал, но это отдельный процесс и не про helpdesk».</a:t>
             </a:r>
           </a:p>
         </p:txBody>
@@ -11129,7 +11504,7 @@
                 </a:solidFill>
                 <a:latin typeface="Arial"/>
               </a:rPr>
-              <a:t>«Ребята, у нас на прошлой неделе руководитель был на конференции ритейла, увидел там у одного из конкурентов классный сервис для генерации описаний товаров — с виду прямо как отдельное приложение, зашёл, вбил характеристики, получил готовый текст под карточку. Хочет, чтобы у нас было что-то похожее, желательно к концу месяца, у нас как раз намечается демо для инвесторов. Каталог большой — около 12 000 товарных позиций, сейчас описания пишет один копирайтер на аутсорсе, по мере поступления новых товаров, и она, кстати, уже жаловалась, что не успевает и просила доплату за срочность. Ах да, отдельно нужно бы ещё обновить баннеры на главной странице сайта, но это к другому разговору».</a:t>
+              <a:t>«Руководитель был на конференции ритейла, увидел у конкурента сервис для генерации описаний товаров — отдельное приложение, вбил характеристики, получил текст под карточку. Хочет похожее к концу месяца. Каталог большой — около 12 000 товарных позиций, все заводятся через общую админку каталога, копирайтер на аутсорсе пишет описания прямо там же. Отдельно нужно бы обновить баннеры на главной, но это к другому разговору. Заодно в другом отделе параллельно внедряют новую CRM — не про нас».</a:t>
             </a:r>
           </a:p>
         </p:txBody>
@@ -16506,11 +16881,11 @@
         <p:spPr>
           <a:xfrm>
             <a:off x="502920" y="713232"/>
-            <a:ext cx="11183112" cy="1828800"/>
+            <a:ext cx="11183112" cy="2148840"/>
           </a:xfrm>
           <a:prstGeom prst="roundRect">
             <a:avLst>
-              <a:gd name="adj" fmla="val 16666"/>
+              <a:gd name="adj" fmla="val 14184"/>
             </a:avLst>
           </a:prstGeom>
           <a:solidFill>
@@ -16564,7 +16939,7 @@
         <p:spPr>
           <a:xfrm>
             <a:off x="722376" y="1225296"/>
-            <a:ext cx="10744200" cy="1097280"/>
+            <a:ext cx="10744200" cy="1417320"/>
           </a:xfrm>
           <a:prstGeom prst="rect">
             <a:avLst/>
@@ -16583,13 +16958,13 @@
               </a:lnSpc>
             </a:pPr>
             <a:r>
-              <a:rPr sz="1450" b="0" i="1">
+              <a:rPr sz="1400" b="0" i="1">
                 <a:solidFill>
                   <a:srgbClr val="21295C"/>
                 </a:solidFill>
                 <a:latin typeface="Arial"/>
               </a:rPr>
-              <a:t>«Коллеги, у нас после каждого созвона Zoom кладёт транскрипт в письмо — я их складываю в папку, но руки не доходят. Протокол по-прежнему пишет Настя-проджект руками, минут по 30-40, а у неё и так спринт-отчёты и онбординг двух новых. Встреч штук 15 в неделю, часть на английском с подрядчиком. Можно из транскрипта автоматом делать протокол — решения, поручения, сроки? В идеале до конца квартала, у нас аудит процессов».</a:t>
+              <a:t>«После каждого созвона Zoom кладёт транскрипт в письмо, руки не доходят. Протокол по-прежнему пишет проджект руками, минут по 30-40. Встреч штук 15 в неделю, часть на английском с подрядчиком — Zoom их тоже транскрибирует, просто на другом языке. Готовые протоколы уже складываем на общий корпоративный диск, папка по проектам. Задачи из встреч ведём в YouTrack, у него открытый REST API, если понадобится. Можно из транскрипта автоматом делать протокол — решения, поручения, сроки? В идеале до конца квартала».</a:t>
             </a:r>
           </a:p>
         </p:txBody>
@@ -16602,12 +16977,12 @@
         </p:nvSpPr>
         <p:spPr>
           <a:xfrm>
-            <a:off x="502920" y="2724912"/>
-            <a:ext cx="3931920" cy="3520440"/>
+            <a:off x="502920" y="3044952"/>
+            <a:ext cx="3931920" cy="3200400"/>
           </a:xfrm>
           <a:prstGeom prst="roundRect">
             <a:avLst>
-              <a:gd name="adj" fmla="val 8658"/>
+              <a:gd name="adj" fmla="val 9523"/>
             </a:avLst>
           </a:prstGeom>
           <a:solidFill>
@@ -16638,15 +17013,15 @@
         </p:nvPicPr>
         <p:blipFill>
           <a:blip r:embed="rId3"/>
-          <a:srcRect l="12477" r="12477"/>
+          <a:srcRect l="8449" r="8449"/>
           <a:stretch>
             <a:fillRect/>
           </a:stretch>
         </p:blipFill>
         <p:spPr>
           <a:xfrm>
-            <a:off x="612648" y="2834640"/>
-            <a:ext cx="3712463" cy="3300984"/>
+            <a:off x="612648" y="3154680"/>
+            <a:ext cx="3712463" cy="2980944"/>
           </a:xfrm>
           <a:prstGeom prst="rect">
             <a:avLst/>
@@ -16661,7 +17036,7 @@
         </p:nvSpPr>
         <p:spPr>
           <a:xfrm>
-            <a:off x="4709159" y="2724912"/>
+            <a:off x="4709159" y="3044952"/>
             <a:ext cx="6976872" cy="1600200"/>
           </a:xfrm>
           <a:prstGeom prst="roundRect">
@@ -16695,7 +17070,7 @@
         </p:nvSpPr>
         <p:spPr>
           <a:xfrm>
-            <a:off x="4892040" y="2871216"/>
+            <a:off x="4892040" y="3191256"/>
             <a:ext cx="6611112" cy="1307592"/>
           </a:xfrm>
           <a:prstGeom prst="rect">
@@ -16734,12 +17109,12 @@
         </p:nvSpPr>
         <p:spPr>
           <a:xfrm>
-            <a:off x="4709159" y="4599432"/>
-            <a:ext cx="6976872" cy="1645920"/>
+            <a:off x="4709159" y="4919472"/>
+            <a:ext cx="6976872" cy="1325880"/>
           </a:xfrm>
           <a:prstGeom prst="roundRect">
             <a:avLst>
-              <a:gd name="adj" fmla="val 18518"/>
+              <a:gd name="adj" fmla="val 22988"/>
             </a:avLst>
           </a:prstGeom>
           <a:solidFill>
@@ -16768,8 +17143,8 @@
         </p:nvSpPr>
         <p:spPr>
           <a:xfrm>
-            <a:off x="4892040" y="4599432"/>
-            <a:ext cx="6611112" cy="1645920"/>
+            <a:off x="4892040" y="4919472"/>
+            <a:ext cx="6611112" cy="1325880"/>
           </a:xfrm>
           <a:prstGeom prst="rect">
             <a:avLst/>
@@ -17419,6 +17794,45 @@
           </a:p>
         </p:txBody>
       </p:sp>
+      <p:sp>
+        <p:nvSpPr>
+          <p:cNvPr id="20" name="TextBox 19"/>
+          <p:cNvSpPr txBox="1"/>
+          <p:nvPr/>
+        </p:nvSpPr>
+        <p:spPr>
+          <a:xfrm>
+            <a:off x="502920" y="6473952"/>
+            <a:ext cx="11183112" cy="365760"/>
+          </a:xfrm>
+          <a:prstGeom prst="rect">
+            <a:avLst/>
+          </a:prstGeom>
+          <a:noFill/>
+        </p:spPr>
+        <p:txBody>
+          <a:bodyPr wrap="square" lIns="0" rIns="0" tIns="0" bIns="0" anchor="t">
+            <a:spAutoFit/>
+          </a:bodyPr>
+          <a:lstStyle/>
+          <a:p>
+            <a:pPr algn="l">
+              <a:lnSpc>
+                <a:spcPct val="115000"/>
+              </a:lnSpc>
+            </a:pPr>
+            <a:r>
+              <a:rPr sz="1200" b="0" i="1">
+                <a:solidFill>
+                  <a:srgbClr val="1C7293"/>
+                </a:solidFill>
+                <a:latin typeface="Arial"/>
+              </a:rPr>
+              <a:t>транскрипт уже приходит готовым письмом — отдельный шаг сборки входных данных не нужен</a:t>
+            </a:r>
+          </a:p>
+        </p:txBody>
+      </p:sp>
     </p:spTree>
   </p:cSld>
   <p:clrMapOvr>
@@ -17576,7 +17990,7 @@
                 </a:solidFill>
                 <a:latin typeface="Arial"/>
               </a:rPr>
-              <a:t>«Народ, было на планёрке сегодня — уже неловко даже пересказывать. Обсуждали бюджет на следующий квартал, и тут кто-то из финансов спрашивает: „А что мы вообще решали по подрядчику X ещё в мае, у нас там были какие-то договорённости про скидку?“ И повисла пауза — никто с ходу не вспомнил, в каком это было протоколе. Протоколы у нас копятся в общей папке на диске, названы более-менее по датам, но искать по ним руками — то ещё удовольствие, особенно если помнишь только примерную тему, а не точную дату созвона. Кстати, по ходу дела там же обсуждали ещё отпускной график на лето, но это уже другая история, не по делу».</a:t>
+              <a:t>«Было на планёрке сегодня, неловко пересказывать. Обсуждали бюджет на квартал, и кто-то из финансов спрашивает: „А что мы вообще решали по подрядчику X ещё в мае, там были договорённости про скидку?“ Повисла пауза. Протоколы копятся в общей папке на диске, названы более-менее по датам, искать по ним руками — то ещё удовольствие, особенно если помнишь только тему, а не дату. Сама папка растёт где-то на полгигабайта в квартал. Кстати, там же обсуждали отпускной график на лето, и отдельно — редизайн корпоративного портала, но это другая история».</a:t>
             </a:r>
           </a:p>
         </p:txBody>
@@ -19041,7 +19455,7 @@
                 </a:solidFill>
                 <a:latin typeface="Arial"/>
               </a:rPr>
-              <a:t>«Слушайте, спасибо большое за поиск по протоколам, реально экономит время, особенно перед ретро. Но вот что заметила: поручения из протоколов мы всё равно руками переносим в таск-трекер — открываем протокол, читаем, что там нашла система, и одно за другим заводим карточки, проставляем исполнителя и срок. Причём я специально прошлась по майским протоколам вчера вечером, и получилось, что примерно половина поручений так и висит без исполнителя — просто руки не дошли перенести. Отдельно ещё хотела спросить, можно ли поменять цвет тегов в самом таск-трекере, а то команда путается в приоритетах, но это, наверное, вопрос не к вам, а к админу инструмента».</a:t>
+              <a:t>«Спасибо за поиск по протоколам, реально экономит время перед ретро. Но вот что заметила: поручения из протоколов мы всё равно руками переносим в YouTrack — открываем протокол, читаем, что нашла система, заводим карточки, проставляем исполнителя и срок. У YouTrack, я узнавала, открытый REST API, задачу можно создать одним вызовом. Прошлась по майским протоколам вчера вечером — примерно половина поручений так и висит без исполнителя, руки не дошли перенести. Отдельно хотела спросить про цвет тегов в трекере, но это, наверное, к админу инструмента».</a:t>
             </a:r>
           </a:p>
         </p:txBody>
@@ -20862,6 +21276,45 @@
           </a:p>
         </p:txBody>
       </p:sp>
+      <p:sp>
+        <p:nvSpPr>
+          <p:cNvPr id="52" name="TextBox 51"/>
+          <p:cNvSpPr txBox="1"/>
+          <p:nvPr/>
+        </p:nvSpPr>
+        <p:spPr>
+          <a:xfrm>
+            <a:off x="502920" y="6473952"/>
+            <a:ext cx="11183112" cy="365760"/>
+          </a:xfrm>
+          <a:prstGeom prst="rect">
+            <a:avLst/>
+          </a:prstGeom>
+          <a:noFill/>
+        </p:spPr>
+        <p:txBody>
+          <a:bodyPr wrap="square" lIns="0" rIns="0" tIns="0" bIns="0" anchor="t">
+            <a:spAutoFit/>
+          </a:bodyPr>
+          <a:lstStyle/>
+          <a:p>
+            <a:pPr algn="l">
+              <a:lnSpc>
+                <a:spcPct val="115000"/>
+              </a:lnSpc>
+            </a:pPr>
+            <a:r>
+              <a:rPr sz="1200" b="0" i="1">
+                <a:solidFill>
+                  <a:srgbClr val="1C7293"/>
+                </a:solidFill>
+                <a:latin typeface="Arial"/>
+              </a:rPr>
+              <a:t>у таск-трекера открытый API — интеграция дешёвая, а не гипотетическая</a:t>
+            </a:r>
+          </a:p>
+        </p:txBody>
+      </p:sp>
     </p:spTree>
   </p:cSld>
   <p:clrMapOvr>
@@ -21019,7 +21472,7 @@
                 </a:solidFill>
                 <a:latin typeface="Arial"/>
               </a:rPr>
-              <a:t>«Привет, обсуждали на планёрке — хотим еженедельный дайджест по рабочим чатам и почте команды: что обсуждали, что решили за неделю, коротко, одним сообщением, чтобы не перечитывать всю переписку заново по вечерам в пятницу. Нужен по пятницам к 17:00 — чтобы руководитель успел прочитать перед выходными, а не разгребал всё в понедельник утром вперемешку с новой почтой. Источников несколько: рабочий чат команды и почта, надо свести в одно связное сообщение, а не просто склеить куски подряд. Кстати, отдельно от этого — хотели ещё обсудить, стоит ли переезжать с текущего чата на другой мессенджер, но это дело не срочное, как-нибудь в другой раз».</a:t>
+              <a:t>«Обсуждали на планёрке — хотим еженедельный дайджест по рабочим чатам и почте команды: что обсуждали, что решили за неделю, одним сообщением. Нужен по пятницам к 17:00. Источников несколько: рабочий чат команды и почта, у обоих есть API для выгрузки истории сообщений. Надо свести в одно связное сообщение, а не склеить куски подряд. Кстати, отдельно обсуждали, стоит ли переезжать на другой мессенджер, и параллельно тестируем новое VPN-решение для удалёнщиков — но это не к дайджесту».</a:t>
             </a:r>
           </a:p>
         </p:txBody>
@@ -22852,7 +23305,7 @@
                 </a:solidFill>
                 <a:latin typeface="Arial"/>
               </a:rPr>
-              <a:t>«Привет! Тут у нас родилась идея на стратегической сессии — хочу по каждому звонку менеджера получать карточку: какая потребность у клиента, какие возражения прозвучали, какие договорённости достигли. А то перед следующим звонком с тем же клиентом менеджеры перематывают запись туда-сюда, ищут, на чём остановились в прошлый раз. В отделе у меня 8 менеджеров, у каждого по 15-20 звонков в день, записи сейчас просто лежат в телефонии, никуда не выгружаются. Вся история клиента у нас в CRM, но её тоже давно пора почистить от дублей контактов — но это отдельная головная боль, обсудим как-нибудь потом».</a:t>
+              <a:t>«Хочу по каждому звонку менеджера получать карточку: потребность, возражения, договорённости. Менеджеры перематывают запись, ищут, на чём остановились в прошлый раз. В отделе 8 менеджеров, по 15-20 звонков в день, телефония пишет разговор в mp3 и сама кладёт файл в облако — выгружать вручную не нужно. CRM у нас Битрикс24, открытый REST API. Аналитики отдела уже используют облачный ИИ по API для черновиков квартальных отчётов. CRM, кстати, тоже пора почистить от дублей контактов, но это отдельная головная боль».</a:t>
             </a:r>
           </a:p>
         </p:txBody>
@@ -24066,7 +24519,7 @@
                 </a:solidFill>
                 <a:latin typeface="Arial"/>
               </a:rPr>
-              <a:t>«Коллеги, разговор случился на еженедельном созвоне по бюджету — туда же, кстати, пригласили и юриста, который на прошлой неделе смотрел демо прототипа. Хочу сразу обозначить ограничение по инфраструктуре: GPU-сервера у нас нет, и бюджета на него в этом году тоже нет — приоритеты на квартал уже утверждены финансовым директором, туда попали миграция на новую почтовую систему и обновление парка ноутбуков в поддержке. Если модель тяжёлая, придётся идти через облачный API, но там свои вопросы по данным, мы их уже обсуждали. В следующем году, может, вернёмся к разговору про свой сервер, но не сейчас».</a:t>
+              <a:t>«Разговор случился на созвоне по бюджету. Обозначу ограничение по инфраструктуре: GPU-сервера у нас нет, и бюджета на него в этом году тоже нет — приоритеты на квартал утверждены, туда попали миграция на новую почтовую систему и обновление парка ноутбуков в поддержке. Если модель тяжёлая, придётся идти через облачный API, но там свои вопросы по данным, мы их уже обсуждали. В следующем году, может, вернёмся к разговору про свой сервер».</a:t>
             </a:r>
           </a:p>
         </p:txBody>
@@ -24260,7 +24713,7 @@
                 </a:solidFill>
                 <a:latin typeface="Arial"/>
               </a:rPr>
-              <a:t>«Меня, честно говоря, весь этот разговор про модели и облака не очень касается — я не технарь. Мне для работы нужно простое: пять полей в CRM по каждому звонку — потребность, возражения, договорённости, следующий шаг, оценка вероятности сделки. Не пересказ разговора целиком, не анализ тона голоса менеджера, ничего такого. Просто эти пять полей должны заполняться сами, чтобы я видел их у себя в отчёте по отделу, который я и так каждый понедельник собираю руками из заметок ребят».</a:t>
+              <a:t>«Мне для работы нужно простое: пять полей в CRM по каждому звонку — потребность, возражения, договорённости, следующий шаг, оценка вероятности сделки. Не пересказ разговора целиком, не анализ тона голоса. Просто эти пять полей должны заполняться сами прямо в Битрикс24, чтобы я видел их у себя в отчёте по отделу, который и так каждый понедельник собираю руками из заметок ребят».</a:t>
             </a:r>
           </a:p>
         </p:txBody>
@@ -28551,7 +29004,7 @@
                 </a:solidFill>
                 <a:latin typeface="Arial"/>
               </a:rPr>
-              <a:t>«Привет! Пишет Марина, временно за продакта по фин.процессам, пока Олег в отпуске. Бухгалтерия реально тонет: три человека руками забивают накладные поставщиков в 1С, около 400 штук в месяц, к концу квартала завал и ошибки в суммах. Приложила два примера накладных за прошлую неделю — форматы вроде одинаковые. Можно это как-то автоматом сделать? Заодно спроси у Димы, когда освободится после релиза мобилки — хотела обсудить с ним ещё и склад, но это отдельная история. По срокам — прикидка хотя бы до пятницы была бы супер, у нас на этой неделе ревью бюджета».</a:t>
+              <a:t>«Марина, продакт по фин.процессам. Бухгалтерия тонет: три человека руками забивают накладные поставщиков в 1С, около 400 штук в месяц, к концу квартала завал и ошибки в суммах. Приложила два примера накладных за прошлую неделю — форматы вроде одинаковые. Можно это как-то автоматом сделать? Кстати, маркетинг уже полгода гоняет YandexGPT по API для описаний товаров, договор с ними есть — может, тот же контур подойдёт и нам. Отдельно у нас идёт миграция почты на новый сервер, но это не к вам. По срокам — прикидка хотя бы до пятницы была бы супер».</a:t>
             </a:r>
           </a:p>
         </p:txBody>
@@ -31537,7 +31990,7 @@
                 </a:solidFill>
                 <a:latin typeface="Arial"/>
               </a:rPr>
-              <a:t>«Привет! Пользователи жалуются в поддержку, что лента забита — по одному и тому же событию видят десять почти одинаковых заголовков подряд от разных изданий, которые просто пересказывают одну новость своими словами. Хотим это как-то склеивать в одну карточку, чтобы не мозолило глаза. У нас источников уже больше сотни, подключаем ещё несколько в этом месяце, но это уже другой разговор с их API. Нужно понять, какая технология сюда подойдёт, желательно не сильно раздувая расходы на инфраструктуру, бюджет на новые фичи в этом квартале скромный».</a:t>
+              <a:t>«Пользователи жалуются в поддержку, что лента забита — по одному событию видят десять почти одинаковых заголовков подряд от разных изданий. Хотим склеивать в одну карточку. Источников уже больше сотни, все приходят через единый RSS-агрегатор, формат заголовка и времени публикации у всех одинаковый. Подключаем ещё несколько в этом месяце. Отдельно редактор попросил обновить дизайн карточки источника на сайте, но это не к дедупликации. Бюджет на новые фичи в этом квартале скромный».</a:t>
             </a:r>
           </a:p>
         </p:txBody>
@@ -32490,7 +32943,7 @@
                 </a:solidFill>
                 <a:latin typeface="Arial"/>
               </a:rPr>
-              <a:t>«Коллеги, выгрузила архив, как просили — вот ссылка на файлообменник, ZIP получился на 4,2 ГБ, извините, что так долго собирала, почта у нас опять письма режет после 20 МБ. Внутри вперемешку: и сканы актов сверки с поставщиками, и сами договоры, и накладные — я их особо не сортировала, как было в папке за год, так и заархивировала. Нужны вам, как понимаю, только накладные, остальное можно игнорировать. Кстати, отдельно от этого — завтра у нас закрытие месяца, если что-то понадобится досчитать по кассе, я буду занята примерно до обеда. Скажите, если архив не открылся или что-то не так с кодировкой».</a:t>
+              <a:t>«Коллеги, выгрузила архив, как просили, ZIP на 4,2 ГБ. Внутри вперемешку: сканы актов сверки, договоры и сами накладные — не сортировала, как было в папке за год, так и заархивировала. Два наших крупнейших поставщика вообще подключены через ЭДО и присылают накладные уже структурированными XML-файлами, без разбора обойдётся. Остальное — сканы со старых сканеров на складе, они дают 200dpi и уже сжаты. Кстати, бухгалтерия параллельно переходит на ЭДО с ФНС по счетам-фактурам, но это отдельный проект, не про накладные поставщиков».</a:t>
             </a:r>
           </a:p>
         </p:txBody>
@@ -34602,7 +35055,7 @@
                 </a:solidFill>
                 <a:latin typeface="Arial"/>
               </a:rPr>
-              <a:t>«Слушай, у нас подрядчик по перфомансу просит логи прода за квартал для анализа — говорят, без них не смогут найти, почему просадки на пиках. Я выгрузил, получилось около 40 ГБ, архив уже лежит на сервере. Но там внутри вперемешку и номера телефонов, и почты клиентов, и один раз даже видел фразу типа «передайте это Ивану из бухгалтерии» — видимо, из тела какого-то запроса залогировалось. Подрядчику нужна сама механика — структура запросов, тайминги, коды ошибок — а не данные людей, это же нельзя просто так отдавать. Они ждут архив в пятницу, у них спринт начинается, так что руками перебирать некогда совсем».</a:t>
+              <a:t>«Подрядчик по перфомансу просит логи прода за квартал — без них не смогут найти просадки на пиках. Выгрузил около 40 ГБ, архив уже на сервере. Внутри вперемешку телефоны, почты клиентов, один раз фраза „передайте это Ивану из бухгалтерии“ — залогировалось из тела запроса. Логи уже в стандартном JSON построчно, структуру парсить легко. Подрядчику нужны тайминги и коды ошибок, не данные людей. Отдельно тестируем новое VPN-решение для удалёнки, но это не к логам. Ждут архив в пятницу».</a:t>
             </a:r>
           </a:p>
         </p:txBody>
